--- a/192524483_DEVADHARSHINI E PYTHON.pptx
+++ b/192524483_DEVADHARSHINI E PYTHON.pptx
@@ -7,19 +7,21 @@
   <p:sldIdLst>
     <p:sldId id="256" r:id="rId2"/>
     <p:sldId id="257" r:id="rId3"/>
-    <p:sldId id="258" r:id="rId4"/>
-    <p:sldId id="259" r:id="rId5"/>
-    <p:sldId id="271" r:id="rId6"/>
-    <p:sldId id="260" r:id="rId7"/>
-    <p:sldId id="261" r:id="rId8"/>
-    <p:sldId id="262" r:id="rId9"/>
-    <p:sldId id="263" r:id="rId10"/>
-    <p:sldId id="264" r:id="rId11"/>
-    <p:sldId id="265" r:id="rId12"/>
-    <p:sldId id="266" r:id="rId13"/>
-    <p:sldId id="267" r:id="rId14"/>
-    <p:sldId id="268" r:id="rId15"/>
-    <p:sldId id="272" r:id="rId16"/>
+    <p:sldId id="273" r:id="rId4"/>
+    <p:sldId id="258" r:id="rId5"/>
+    <p:sldId id="259" r:id="rId6"/>
+    <p:sldId id="271" r:id="rId7"/>
+    <p:sldId id="260" r:id="rId8"/>
+    <p:sldId id="261" r:id="rId9"/>
+    <p:sldId id="262" r:id="rId10"/>
+    <p:sldId id="263" r:id="rId11"/>
+    <p:sldId id="264" r:id="rId12"/>
+    <p:sldId id="265" r:id="rId13"/>
+    <p:sldId id="266" r:id="rId14"/>
+    <p:sldId id="267" r:id="rId15"/>
+    <p:sldId id="268" r:id="rId16"/>
+    <p:sldId id="274" r:id="rId17"/>
+    <p:sldId id="272" r:id="rId18"/>
   </p:sldIdLst>
   <p:sldSz cx="12192000" cy="6858000"/>
   <p:notesSz cx="6858000" cy="9144000"/>
@@ -275,7 +277,7 @@
           <a:p>
             <a:fld id="{033D173E-4786-44C8-8E9D-B52CC1421896}" type="datetimeFigureOut">
               <a:rPr lang="en-IN" smtClean="0"/>
-              <a:t>28-02-2026</a:t>
+              <a:t>02-03-2026</a:t>
             </a:fld>
             <a:endParaRPr lang="en-IN"/>
           </a:p>
@@ -475,7 +477,7 @@
           <a:p>
             <a:fld id="{033D173E-4786-44C8-8E9D-B52CC1421896}" type="datetimeFigureOut">
               <a:rPr lang="en-IN" smtClean="0"/>
-              <a:t>28-02-2026</a:t>
+              <a:t>02-03-2026</a:t>
             </a:fld>
             <a:endParaRPr lang="en-IN"/>
           </a:p>
@@ -685,7 +687,7 @@
           <a:p>
             <a:fld id="{033D173E-4786-44C8-8E9D-B52CC1421896}" type="datetimeFigureOut">
               <a:rPr lang="en-IN" smtClean="0"/>
-              <a:t>28-02-2026</a:t>
+              <a:t>02-03-2026</a:t>
             </a:fld>
             <a:endParaRPr lang="en-IN"/>
           </a:p>
@@ -885,7 +887,7 @@
           <a:p>
             <a:fld id="{033D173E-4786-44C8-8E9D-B52CC1421896}" type="datetimeFigureOut">
               <a:rPr lang="en-IN" smtClean="0"/>
-              <a:t>28-02-2026</a:t>
+              <a:t>02-03-2026</a:t>
             </a:fld>
             <a:endParaRPr lang="en-IN"/>
           </a:p>
@@ -1161,7 +1163,7 @@
           <a:p>
             <a:fld id="{033D173E-4786-44C8-8E9D-B52CC1421896}" type="datetimeFigureOut">
               <a:rPr lang="en-IN" smtClean="0"/>
-              <a:t>28-02-2026</a:t>
+              <a:t>02-03-2026</a:t>
             </a:fld>
             <a:endParaRPr lang="en-IN"/>
           </a:p>
@@ -1429,7 +1431,7 @@
           <a:p>
             <a:fld id="{033D173E-4786-44C8-8E9D-B52CC1421896}" type="datetimeFigureOut">
               <a:rPr lang="en-IN" smtClean="0"/>
-              <a:t>28-02-2026</a:t>
+              <a:t>02-03-2026</a:t>
             </a:fld>
             <a:endParaRPr lang="en-IN"/>
           </a:p>
@@ -1844,7 +1846,7 @@
           <a:p>
             <a:fld id="{033D173E-4786-44C8-8E9D-B52CC1421896}" type="datetimeFigureOut">
               <a:rPr lang="en-IN" smtClean="0"/>
-              <a:t>28-02-2026</a:t>
+              <a:t>02-03-2026</a:t>
             </a:fld>
             <a:endParaRPr lang="en-IN"/>
           </a:p>
@@ -1986,7 +1988,7 @@
           <a:p>
             <a:fld id="{033D173E-4786-44C8-8E9D-B52CC1421896}" type="datetimeFigureOut">
               <a:rPr lang="en-IN" smtClean="0"/>
-              <a:t>28-02-2026</a:t>
+              <a:t>02-03-2026</a:t>
             </a:fld>
             <a:endParaRPr lang="en-IN"/>
           </a:p>
@@ -2099,7 +2101,7 @@
           <a:p>
             <a:fld id="{033D173E-4786-44C8-8E9D-B52CC1421896}" type="datetimeFigureOut">
               <a:rPr lang="en-IN" smtClean="0"/>
-              <a:t>28-02-2026</a:t>
+              <a:t>02-03-2026</a:t>
             </a:fld>
             <a:endParaRPr lang="en-IN"/>
           </a:p>
@@ -2412,7 +2414,7 @@
           <a:p>
             <a:fld id="{033D173E-4786-44C8-8E9D-B52CC1421896}" type="datetimeFigureOut">
               <a:rPr lang="en-IN" smtClean="0"/>
-              <a:t>28-02-2026</a:t>
+              <a:t>02-03-2026</a:t>
             </a:fld>
             <a:endParaRPr lang="en-IN"/>
           </a:p>
@@ -2701,7 +2703,7 @@
           <a:p>
             <a:fld id="{033D173E-4786-44C8-8E9D-B52CC1421896}" type="datetimeFigureOut">
               <a:rPr lang="en-IN" smtClean="0"/>
-              <a:t>28-02-2026</a:t>
+              <a:t>02-03-2026</a:t>
             </a:fld>
             <a:endParaRPr lang="en-IN"/>
           </a:p>
@@ -2944,7 +2946,7 @@
           <a:p>
             <a:fld id="{033D173E-4786-44C8-8E9D-B52CC1421896}" type="datetimeFigureOut">
               <a:rPr lang="en-IN" smtClean="0"/>
-              <a:t>28-02-2026</a:t>
+              <a:t>02-03-2026</a:t>
             </a:fld>
             <a:endParaRPr lang="en-IN"/>
           </a:p>
@@ -3692,7 +3694,7 @@
           <p:cNvPr id="2" name="Title 1">
             <a:extLst>
               <a:ext uri="{FF2B5EF4-FFF2-40B4-BE49-F238E27FC236}">
-                <a16:creationId xmlns:a16="http://schemas.microsoft.com/office/drawing/2014/main" id="{D83F80DC-4AC5-313C-BDA3-201C9E13DFE7}"/>
+                <a16:creationId xmlns:a16="http://schemas.microsoft.com/office/drawing/2014/main" id="{2EE4A332-29CA-1798-D214-A68445F4BAB4}"/>
               </a:ext>
             </a:extLst>
           </p:cNvPr>
@@ -3705,651 +3707,8 @@
         </p:nvSpPr>
         <p:spPr>
           <a:xfrm>
-            <a:off x="838200" y="0"/>
-            <a:ext cx="10515600" cy="841375"/>
-          </a:xfrm>
-        </p:spPr>
-        <p:txBody>
-          <a:bodyPr/>
-          <a:lstStyle/>
-          <a:p>
-            <a:pPr algn="ctr"/>
-            <a:r>
-              <a:rPr lang="en-IN" b="1" dirty="0">
-                <a:latin typeface="Times New Roman" panose="02020603050405020304" pitchFamily="18" charset="0"/>
-                <a:cs typeface="Times New Roman" panose="02020603050405020304" pitchFamily="18" charset="0"/>
-              </a:rPr>
-              <a:t>MODULE 2 OUTPUT</a:t>
-            </a:r>
-          </a:p>
-        </p:txBody>
-      </p:sp>
-      <p:pic>
-        <p:nvPicPr>
-          <p:cNvPr id="4" name="Picture 3">
-            <a:extLst>
-              <a:ext uri="{FF2B5EF4-FFF2-40B4-BE49-F238E27FC236}">
-                <a16:creationId xmlns:a16="http://schemas.microsoft.com/office/drawing/2014/main" id="{909922BA-BA5C-816B-0070-B419FBF5A07D}"/>
-              </a:ext>
-            </a:extLst>
-          </p:cNvPr>
-          <p:cNvPicPr>
-            <a:picLocks noChangeAspect="1"/>
-          </p:cNvPicPr>
-          <p:nvPr/>
-        </p:nvPicPr>
-        <p:blipFill>
-          <a:blip r:embed="rId2"/>
-          <a:stretch>
-            <a:fillRect/>
-          </a:stretch>
-        </p:blipFill>
-        <p:spPr>
-          <a:xfrm>
-            <a:off x="0" y="-8783"/>
-            <a:ext cx="1219354" cy="1081314"/>
-          </a:xfrm>
-          <a:prstGeom prst="rect">
-            <a:avLst/>
-          </a:prstGeom>
-        </p:spPr>
-      </p:pic>
-      <p:pic>
-        <p:nvPicPr>
-          <p:cNvPr id="5" name="Picture 4">
-            <a:extLst>
-              <a:ext uri="{FF2B5EF4-FFF2-40B4-BE49-F238E27FC236}">
-                <a16:creationId xmlns:a16="http://schemas.microsoft.com/office/drawing/2014/main" id="{6FC04F42-1E4B-6F46-101D-BBD972EFAB8D}"/>
-              </a:ext>
-            </a:extLst>
-          </p:cNvPr>
-          <p:cNvPicPr>
-            <a:picLocks noChangeAspect="1"/>
-          </p:cNvPicPr>
-          <p:nvPr/>
-        </p:nvPicPr>
-        <p:blipFill>
-          <a:blip r:embed="rId3"/>
-          <a:stretch>
-            <a:fillRect/>
-          </a:stretch>
-        </p:blipFill>
-        <p:spPr>
-          <a:xfrm>
-            <a:off x="11274046" y="-15129"/>
-            <a:ext cx="917954" cy="1087660"/>
-          </a:xfrm>
-          <a:prstGeom prst="rect">
-            <a:avLst/>
-          </a:prstGeom>
-        </p:spPr>
-      </p:pic>
-      <p:pic>
-        <p:nvPicPr>
-          <p:cNvPr id="11" name="Content Placeholder 10">
-            <a:extLst>
-              <a:ext uri="{FF2B5EF4-FFF2-40B4-BE49-F238E27FC236}">
-                <a16:creationId xmlns:a16="http://schemas.microsoft.com/office/drawing/2014/main" id="{A080C221-3D51-0C9B-9D40-CC176B4907A2}"/>
-              </a:ext>
-            </a:extLst>
-          </p:cNvPr>
-          <p:cNvPicPr>
-            <a:picLocks noGrp="1" noChangeAspect="1"/>
-          </p:cNvPicPr>
-          <p:nvPr>
-            <p:ph idx="1"/>
-          </p:nvPr>
-        </p:nvPicPr>
-        <p:blipFill>
-          <a:blip r:embed="rId4"/>
-          <a:stretch>
-            <a:fillRect/>
-          </a:stretch>
-        </p:blipFill>
-        <p:spPr>
-          <a:xfrm>
-            <a:off x="1127270" y="1850571"/>
-            <a:ext cx="10332976" cy="3461599"/>
-          </a:xfrm>
-          <a:prstGeom prst="rect">
-            <a:avLst/>
-          </a:prstGeom>
-        </p:spPr>
-      </p:pic>
-    </p:spTree>
-    <p:extLst>
-      <p:ext uri="{BB962C8B-B14F-4D97-AF65-F5344CB8AC3E}">
-        <p14:creationId xmlns:p14="http://schemas.microsoft.com/office/powerpoint/2010/main" val="1439752788"/>
-      </p:ext>
-    </p:extLst>
-  </p:cSld>
-  <p:clrMapOvr>
-    <a:masterClrMapping/>
-  </p:clrMapOvr>
-</p:sld>
-</file>
-
-<file path=ppt/slides/slide11.xml><?xml version="1.0" encoding="utf-8"?>
-<p:sld xmlns:a="http://schemas.openxmlformats.org/drawingml/2006/main" xmlns:r="http://schemas.openxmlformats.org/officeDocument/2006/relationships" xmlns:p="http://schemas.openxmlformats.org/presentationml/2006/main">
-  <p:cSld>
-    <p:spTree>
-      <p:nvGrpSpPr>
-        <p:cNvPr id="1" name=""/>
-        <p:cNvGrpSpPr/>
-        <p:nvPr/>
-      </p:nvGrpSpPr>
-      <p:grpSpPr>
-        <a:xfrm>
-          <a:off x="0" y="0"/>
-          <a:ext cx="0" cy="0"/>
-          <a:chOff x="0" y="0"/>
-          <a:chExt cx="0" cy="0"/>
-        </a:xfrm>
-      </p:grpSpPr>
-      <p:sp>
-        <p:nvSpPr>
-          <p:cNvPr id="2" name="Title 1">
-            <a:extLst>
-              <a:ext uri="{FF2B5EF4-FFF2-40B4-BE49-F238E27FC236}">
-                <a16:creationId xmlns:a16="http://schemas.microsoft.com/office/drawing/2014/main" id="{4275D722-9924-8059-649B-BD3A02DCA22F}"/>
-              </a:ext>
-            </a:extLst>
-          </p:cNvPr>
-          <p:cNvSpPr>
-            <a:spLocks noGrp="1"/>
-          </p:cNvSpPr>
-          <p:nvPr>
-            <p:ph type="title"/>
-          </p:nvPr>
-        </p:nvSpPr>
-        <p:spPr>
-          <a:xfrm>
-            <a:off x="838200" y="-255361"/>
-            <a:ext cx="10515600" cy="1325563"/>
-          </a:xfrm>
-        </p:spPr>
-        <p:txBody>
-          <a:bodyPr/>
-          <a:lstStyle/>
-          <a:p>
-            <a:pPr algn="ctr"/>
-            <a:r>
-              <a:rPr lang="en-IN" b="1" dirty="0">
-                <a:latin typeface="Times New Roman" panose="02020603050405020304" pitchFamily="18" charset="0"/>
-                <a:cs typeface="Times New Roman" panose="02020603050405020304" pitchFamily="18" charset="0"/>
-              </a:rPr>
-              <a:t>ADVANTAGES</a:t>
-            </a:r>
-          </a:p>
-        </p:txBody>
-      </p:sp>
-      <p:sp>
-        <p:nvSpPr>
-          <p:cNvPr id="3" name="Content Placeholder 2">
-            <a:extLst>
-              <a:ext uri="{FF2B5EF4-FFF2-40B4-BE49-F238E27FC236}">
-                <a16:creationId xmlns:a16="http://schemas.microsoft.com/office/drawing/2014/main" id="{76ABEA54-B407-FC50-796E-DE417999785B}"/>
-              </a:ext>
-            </a:extLst>
-          </p:cNvPr>
-          <p:cNvSpPr>
-            <a:spLocks noGrp="1"/>
-          </p:cNvSpPr>
-          <p:nvPr>
-            <p:ph idx="1"/>
-          </p:nvPr>
-        </p:nvSpPr>
-        <p:spPr>
-          <a:xfrm>
-            <a:off x="359228" y="1477283"/>
-            <a:ext cx="10765972" cy="4351338"/>
-          </a:xfrm>
-        </p:spPr>
-        <p:txBody>
-          <a:bodyPr>
-            <a:noAutofit/>
-          </a:bodyPr>
-          <a:lstStyle/>
-          <a:p>
-            <a:pPr algn="just">
-              <a:lnSpc>
-                <a:spcPct val="150000"/>
-              </a:lnSpc>
-            </a:pPr>
-            <a:r>
-              <a:rPr lang="en-US" dirty="0">
-                <a:latin typeface="Times New Roman" panose="02020603050405020304" pitchFamily="18" charset="0"/>
-                <a:cs typeface="Times New Roman" panose="02020603050405020304" pitchFamily="18" charset="0"/>
-              </a:rPr>
-              <a:t>The system reduces the use of paper and supports eco-friendly record keeping.</a:t>
-            </a:r>
-          </a:p>
-          <a:p>
-            <a:pPr algn="just">
-              <a:lnSpc>
-                <a:spcPct val="150000"/>
-              </a:lnSpc>
-            </a:pPr>
-            <a:r>
-              <a:rPr lang="en-US" dirty="0">
-                <a:latin typeface="Times New Roman" panose="02020603050405020304" pitchFamily="18" charset="0"/>
-                <a:cs typeface="Times New Roman" panose="02020603050405020304" pitchFamily="18" charset="0"/>
-              </a:rPr>
-              <a:t>It provides automatic date and time tracking for better organization.</a:t>
-            </a:r>
-          </a:p>
-          <a:p>
-            <a:pPr algn="just">
-              <a:lnSpc>
-                <a:spcPct val="150000"/>
-              </a:lnSpc>
-            </a:pPr>
-            <a:r>
-              <a:rPr lang="en-US" dirty="0">
-                <a:latin typeface="Times New Roman" panose="02020603050405020304" pitchFamily="18" charset="0"/>
-                <a:cs typeface="Times New Roman" panose="02020603050405020304" pitchFamily="18" charset="0"/>
-              </a:rPr>
-              <a:t>File attachment support makes documentation more complete.</a:t>
-            </a:r>
-          </a:p>
-          <a:p>
-            <a:pPr algn="just">
-              <a:lnSpc>
-                <a:spcPct val="150000"/>
-              </a:lnSpc>
-            </a:pPr>
-            <a:r>
-              <a:rPr lang="en-US" dirty="0">
-                <a:latin typeface="Times New Roman" panose="02020603050405020304" pitchFamily="18" charset="0"/>
-                <a:cs typeface="Times New Roman" panose="02020603050405020304" pitchFamily="18" charset="0"/>
-              </a:rPr>
-              <a:t>Data is stored securely and can be accessed easily.</a:t>
-            </a:r>
-          </a:p>
-          <a:p>
-            <a:pPr algn="just">
-              <a:lnSpc>
-                <a:spcPct val="150000"/>
-              </a:lnSpc>
-            </a:pPr>
-            <a:r>
-              <a:rPr lang="en-US" dirty="0">
-                <a:latin typeface="Times New Roman" panose="02020603050405020304" pitchFamily="18" charset="0"/>
-                <a:cs typeface="Times New Roman" panose="02020603050405020304" pitchFamily="18" charset="0"/>
-              </a:rPr>
-              <a:t>Overall, it improves efficiency compared to traditional diaries.</a:t>
-            </a:r>
-            <a:endParaRPr lang="en-IN" dirty="0">
-              <a:latin typeface="Times New Roman" panose="02020603050405020304" pitchFamily="18" charset="0"/>
-              <a:cs typeface="Times New Roman" panose="02020603050405020304" pitchFamily="18" charset="0"/>
-            </a:endParaRPr>
-          </a:p>
-        </p:txBody>
-      </p:sp>
-      <p:pic>
-        <p:nvPicPr>
-          <p:cNvPr id="4" name="Picture 3">
-            <a:extLst>
-              <a:ext uri="{FF2B5EF4-FFF2-40B4-BE49-F238E27FC236}">
-                <a16:creationId xmlns:a16="http://schemas.microsoft.com/office/drawing/2014/main" id="{7B9849E3-7F49-6E41-04FA-CC27B9EC4F5C}"/>
-              </a:ext>
-            </a:extLst>
-          </p:cNvPr>
-          <p:cNvPicPr>
-            <a:picLocks noChangeAspect="1"/>
-          </p:cNvPicPr>
-          <p:nvPr/>
-        </p:nvPicPr>
-        <p:blipFill>
-          <a:blip r:embed="rId2"/>
-          <a:stretch>
-            <a:fillRect/>
-          </a:stretch>
-        </p:blipFill>
-        <p:spPr>
-          <a:xfrm>
-            <a:off x="0" y="-8783"/>
-            <a:ext cx="1219354" cy="1081314"/>
-          </a:xfrm>
-          <a:prstGeom prst="rect">
-            <a:avLst/>
-          </a:prstGeom>
-        </p:spPr>
-      </p:pic>
-      <p:pic>
-        <p:nvPicPr>
-          <p:cNvPr id="5" name="Picture 4">
-            <a:extLst>
-              <a:ext uri="{FF2B5EF4-FFF2-40B4-BE49-F238E27FC236}">
-                <a16:creationId xmlns:a16="http://schemas.microsoft.com/office/drawing/2014/main" id="{97BAA0C5-E925-218F-79B2-1DB31DF64322}"/>
-              </a:ext>
-            </a:extLst>
-          </p:cNvPr>
-          <p:cNvPicPr>
-            <a:picLocks noChangeAspect="1"/>
-          </p:cNvPicPr>
-          <p:nvPr/>
-        </p:nvPicPr>
-        <p:blipFill>
-          <a:blip r:embed="rId3"/>
-          <a:stretch>
-            <a:fillRect/>
-          </a:stretch>
-        </p:blipFill>
-        <p:spPr>
-          <a:xfrm>
-            <a:off x="11274046" y="-15129"/>
-            <a:ext cx="917954" cy="1087660"/>
-          </a:xfrm>
-          <a:prstGeom prst="rect">
-            <a:avLst/>
-          </a:prstGeom>
-        </p:spPr>
-      </p:pic>
-    </p:spTree>
-    <p:extLst>
-      <p:ext uri="{BB962C8B-B14F-4D97-AF65-F5344CB8AC3E}">
-        <p14:creationId xmlns:p14="http://schemas.microsoft.com/office/powerpoint/2010/main" val="659824688"/>
-      </p:ext>
-    </p:extLst>
-  </p:cSld>
-  <p:clrMapOvr>
-    <a:masterClrMapping/>
-  </p:clrMapOvr>
-</p:sld>
-</file>
-
-<file path=ppt/slides/slide12.xml><?xml version="1.0" encoding="utf-8"?>
-<p:sld xmlns:a="http://schemas.openxmlformats.org/drawingml/2006/main" xmlns:r="http://schemas.openxmlformats.org/officeDocument/2006/relationships" xmlns:p="http://schemas.openxmlformats.org/presentationml/2006/main">
-  <p:cSld>
-    <p:spTree>
-      <p:nvGrpSpPr>
-        <p:cNvPr id="1" name=""/>
-        <p:cNvGrpSpPr/>
-        <p:nvPr/>
-      </p:nvGrpSpPr>
-      <p:grpSpPr>
-        <a:xfrm>
-          <a:off x="0" y="0"/>
-          <a:ext cx="0" cy="0"/>
-          <a:chOff x="0" y="0"/>
-          <a:chExt cx="0" cy="0"/>
-        </a:xfrm>
-      </p:grpSpPr>
-      <p:sp>
-        <p:nvSpPr>
-          <p:cNvPr id="2" name="Title 1">
-            <a:extLst>
-              <a:ext uri="{FF2B5EF4-FFF2-40B4-BE49-F238E27FC236}">
-                <a16:creationId xmlns:a16="http://schemas.microsoft.com/office/drawing/2014/main" id="{A05BB167-7A9A-0868-95B6-05AF027D03AD}"/>
-              </a:ext>
-            </a:extLst>
-          </p:cNvPr>
-          <p:cNvSpPr>
-            <a:spLocks noGrp="1"/>
-          </p:cNvSpPr>
-          <p:nvPr>
-            <p:ph type="title"/>
-          </p:nvPr>
-        </p:nvSpPr>
-        <p:spPr>
-          <a:xfrm>
-            <a:off x="838200" y="365125"/>
-            <a:ext cx="10515600" cy="407761"/>
-          </a:xfrm>
-        </p:spPr>
-        <p:txBody>
-          <a:bodyPr>
-            <a:normAutofit fontScale="90000"/>
-          </a:bodyPr>
-          <a:lstStyle/>
-          <a:p>
-            <a:pPr algn="ctr"/>
-            <a:r>
-              <a:rPr lang="en-IN" b="1" dirty="0">
-                <a:latin typeface="Times New Roman" panose="02020603050405020304" pitchFamily="18" charset="0"/>
-                <a:cs typeface="Times New Roman" panose="02020603050405020304" pitchFamily="18" charset="0"/>
-              </a:rPr>
-              <a:t>APPLICATIONS</a:t>
-            </a:r>
-          </a:p>
-        </p:txBody>
-      </p:sp>
-      <p:sp>
-        <p:nvSpPr>
-          <p:cNvPr id="3" name="Content Placeholder 2">
-            <a:extLst>
-              <a:ext uri="{FF2B5EF4-FFF2-40B4-BE49-F238E27FC236}">
-                <a16:creationId xmlns:a16="http://schemas.microsoft.com/office/drawing/2014/main" id="{786DADCC-A73A-67CF-688C-B2941830FEFD}"/>
-              </a:ext>
-            </a:extLst>
-          </p:cNvPr>
-          <p:cNvSpPr>
-            <a:spLocks noGrp="1"/>
-          </p:cNvSpPr>
-          <p:nvPr>
-            <p:ph idx="1"/>
-          </p:nvPr>
-        </p:nvSpPr>
-        <p:spPr>
-          <a:xfrm>
-            <a:off x="1219354" y="1785256"/>
-            <a:ext cx="9710272" cy="3559629"/>
-          </a:xfrm>
-        </p:spPr>
-        <p:txBody>
-          <a:bodyPr>
-            <a:normAutofit lnSpcReduction="10000"/>
-          </a:bodyPr>
-          <a:lstStyle/>
-          <a:p>
-            <a:pPr>
-              <a:lnSpc>
-                <a:spcPct val="150000"/>
-              </a:lnSpc>
-            </a:pPr>
-            <a:r>
-              <a:rPr lang="en-US" dirty="0">
-                <a:latin typeface="Times New Roman" panose="02020603050405020304" pitchFamily="18" charset="0"/>
-                <a:cs typeface="Times New Roman" panose="02020603050405020304" pitchFamily="18" charset="0"/>
-              </a:rPr>
-              <a:t>This system can be used as a personal daily journal.</a:t>
-            </a:r>
-          </a:p>
-          <a:p>
-            <a:pPr>
-              <a:lnSpc>
-                <a:spcPct val="150000"/>
-              </a:lnSpc>
-            </a:pPr>
-            <a:r>
-              <a:rPr lang="en-US" dirty="0">
-                <a:latin typeface="Times New Roman" panose="02020603050405020304" pitchFamily="18" charset="0"/>
-                <a:cs typeface="Times New Roman" panose="02020603050405020304" pitchFamily="18" charset="0"/>
-              </a:rPr>
-              <a:t>It can be used by students to record academic activities.</a:t>
-            </a:r>
-          </a:p>
-          <a:p>
-            <a:pPr>
-              <a:lnSpc>
-                <a:spcPct val="150000"/>
-              </a:lnSpc>
-            </a:pPr>
-            <a:r>
-              <a:rPr lang="en-US" dirty="0">
-                <a:latin typeface="Times New Roman" panose="02020603050405020304" pitchFamily="18" charset="0"/>
-                <a:cs typeface="Times New Roman" panose="02020603050405020304" pitchFamily="18" charset="0"/>
-              </a:rPr>
-              <a:t>It is useful in offices for maintaining daily work logs.</a:t>
-            </a:r>
-          </a:p>
-          <a:p>
-            <a:pPr>
-              <a:lnSpc>
-                <a:spcPct val="150000"/>
-              </a:lnSpc>
-            </a:pPr>
-            <a:r>
-              <a:rPr lang="en-US" dirty="0">
-                <a:latin typeface="Times New Roman" panose="02020603050405020304" pitchFamily="18" charset="0"/>
-                <a:cs typeface="Times New Roman" panose="02020603050405020304" pitchFamily="18" charset="0"/>
-              </a:rPr>
-              <a:t>It can also be used for project documentation and record keeping.</a:t>
-            </a:r>
-          </a:p>
-          <a:p>
-            <a:endParaRPr lang="en-IN" dirty="0"/>
-          </a:p>
-        </p:txBody>
-      </p:sp>
-      <p:pic>
-        <p:nvPicPr>
-          <p:cNvPr id="4" name="Picture 3">
-            <a:extLst>
-              <a:ext uri="{FF2B5EF4-FFF2-40B4-BE49-F238E27FC236}">
-                <a16:creationId xmlns:a16="http://schemas.microsoft.com/office/drawing/2014/main" id="{C4E5B6F8-9BD0-91F8-08DA-F21DB7FDF54F}"/>
-              </a:ext>
-            </a:extLst>
-          </p:cNvPr>
-          <p:cNvPicPr>
-            <a:picLocks noChangeAspect="1"/>
-          </p:cNvPicPr>
-          <p:nvPr/>
-        </p:nvPicPr>
-        <p:blipFill>
-          <a:blip r:embed="rId2"/>
-          <a:stretch>
-            <a:fillRect/>
-          </a:stretch>
-        </p:blipFill>
-        <p:spPr>
-          <a:xfrm>
-            <a:off x="0" y="-8783"/>
-            <a:ext cx="1219354" cy="1081314"/>
-          </a:xfrm>
-          <a:prstGeom prst="rect">
-            <a:avLst/>
-          </a:prstGeom>
-        </p:spPr>
-      </p:pic>
-      <p:pic>
-        <p:nvPicPr>
-          <p:cNvPr id="5" name="Picture 4">
-            <a:extLst>
-              <a:ext uri="{FF2B5EF4-FFF2-40B4-BE49-F238E27FC236}">
-                <a16:creationId xmlns:a16="http://schemas.microsoft.com/office/drawing/2014/main" id="{FC16AAEB-2477-E708-AC4E-CE5C90E0D7B9}"/>
-              </a:ext>
-            </a:extLst>
-          </p:cNvPr>
-          <p:cNvPicPr>
-            <a:picLocks noChangeAspect="1"/>
-          </p:cNvPicPr>
-          <p:nvPr/>
-        </p:nvPicPr>
-        <p:blipFill>
-          <a:blip r:embed="rId3"/>
-          <a:stretch>
-            <a:fillRect/>
-          </a:stretch>
-        </p:blipFill>
-        <p:spPr>
-          <a:xfrm>
-            <a:off x="11274046" y="-15129"/>
-            <a:ext cx="917954" cy="1087660"/>
-          </a:xfrm>
-          <a:prstGeom prst="rect">
-            <a:avLst/>
-          </a:prstGeom>
-        </p:spPr>
-      </p:pic>
-    </p:spTree>
-    <p:extLst>
-      <p:ext uri="{BB962C8B-B14F-4D97-AF65-F5344CB8AC3E}">
-        <p14:creationId xmlns:p14="http://schemas.microsoft.com/office/powerpoint/2010/main" val="1071287766"/>
-      </p:ext>
-    </p:extLst>
-  </p:cSld>
-  <p:clrMapOvr>
-    <a:masterClrMapping/>
-  </p:clrMapOvr>
-</p:sld>
-</file>
-
-<file path=ppt/slides/slide13.xml><?xml version="1.0" encoding="utf-8"?>
-<p:sld xmlns:a="http://schemas.openxmlformats.org/drawingml/2006/main" xmlns:r="http://schemas.openxmlformats.org/officeDocument/2006/relationships" xmlns:p="http://schemas.openxmlformats.org/presentationml/2006/main">
-  <p:cSld>
-    <p:spTree>
-      <p:nvGrpSpPr>
-        <p:cNvPr id="1" name=""/>
-        <p:cNvGrpSpPr/>
-        <p:nvPr/>
-      </p:nvGrpSpPr>
-      <p:grpSpPr>
-        <a:xfrm>
-          <a:off x="0" y="0"/>
-          <a:ext cx="0" cy="0"/>
-          <a:chOff x="0" y="0"/>
-          <a:chExt cx="0" cy="0"/>
-        </a:xfrm>
-      </p:grpSpPr>
-      <p:sp>
-        <p:nvSpPr>
-          <p:cNvPr id="2" name="Title 1">
-            <a:extLst>
-              <a:ext uri="{FF2B5EF4-FFF2-40B4-BE49-F238E27FC236}">
-                <a16:creationId xmlns:a16="http://schemas.microsoft.com/office/drawing/2014/main" id="{D2988A09-C47C-3FF3-3C7C-2BE9BAC01E77}"/>
-              </a:ext>
-            </a:extLst>
-          </p:cNvPr>
-          <p:cNvSpPr>
-            <a:spLocks noGrp="1"/>
-          </p:cNvSpPr>
-          <p:nvPr>
-            <p:ph type="title"/>
-          </p:nvPr>
-        </p:nvSpPr>
-        <p:spPr>
-          <a:xfrm>
-            <a:off x="838200" y="-183810"/>
-            <a:ext cx="10515600" cy="1325563"/>
-          </a:xfrm>
-        </p:spPr>
-        <p:txBody>
-          <a:bodyPr/>
-          <a:lstStyle/>
-          <a:p>
-            <a:pPr algn="ctr"/>
-            <a:r>
-              <a:rPr lang="en-IN" b="1" dirty="0">
-                <a:latin typeface="Times New Roman" panose="02020603050405020304" pitchFamily="18" charset="0"/>
-                <a:cs typeface="Times New Roman" panose="02020603050405020304" pitchFamily="18" charset="0"/>
-              </a:rPr>
-              <a:t>FUTURE SCOPE</a:t>
-            </a:r>
-          </a:p>
-        </p:txBody>
-      </p:sp>
-      <p:sp>
-        <p:nvSpPr>
-          <p:cNvPr id="3" name="Content Placeholder 2">
-            <a:extLst>
-              <a:ext uri="{FF2B5EF4-FFF2-40B4-BE49-F238E27FC236}">
-                <a16:creationId xmlns:a16="http://schemas.microsoft.com/office/drawing/2014/main" id="{8C5D3AB6-4085-1ACA-58D1-ABDC7B00011B}"/>
-              </a:ext>
-            </a:extLst>
-          </p:cNvPr>
-          <p:cNvSpPr>
-            <a:spLocks noGrp="1"/>
-          </p:cNvSpPr>
-          <p:nvPr>
-            <p:ph idx="1"/>
-          </p:nvPr>
-        </p:nvSpPr>
-        <p:spPr>
-          <a:xfrm>
-            <a:off x="183990" y="1542596"/>
-            <a:ext cx="11256896" cy="4836432"/>
+            <a:off x="1816100" y="0"/>
+            <a:ext cx="9410700" cy="1325563"/>
           </a:xfrm>
         </p:spPr>
         <p:txBody>
@@ -4358,510 +3717,41 @@
           </a:bodyPr>
           <a:lstStyle/>
           <a:p>
-            <a:pPr algn="just">
-              <a:lnSpc>
-                <a:spcPct val="150000"/>
-              </a:lnSpc>
-            </a:pPr>
-            <a:r>
-              <a:rPr lang="en-US" sz="2400" dirty="0">
-                <a:latin typeface="Times New Roman" panose="02020603050405020304" pitchFamily="18" charset="0"/>
-                <a:cs typeface="Times New Roman" panose="02020603050405020304" pitchFamily="18" charset="0"/>
-              </a:rPr>
-              <a:t>In the future, the system can be enhanced by adding user login authentication.</a:t>
-            </a:r>
-          </a:p>
-          <a:p>
-            <a:pPr algn="just">
-              <a:lnSpc>
-                <a:spcPct val="150000"/>
-              </a:lnSpc>
-            </a:pPr>
-            <a:r>
-              <a:rPr lang="en-US" sz="2400" dirty="0">
-                <a:latin typeface="Times New Roman" panose="02020603050405020304" pitchFamily="18" charset="0"/>
-                <a:cs typeface="Times New Roman" panose="02020603050405020304" pitchFamily="18" charset="0"/>
-              </a:rPr>
-              <a:t>Cloud storage integration can be implemented for remote access.</a:t>
-            </a:r>
-          </a:p>
-          <a:p>
-            <a:pPr algn="just">
-              <a:lnSpc>
-                <a:spcPct val="150000"/>
-              </a:lnSpc>
-            </a:pPr>
-            <a:r>
-              <a:rPr lang="en-US" sz="2400" dirty="0">
-                <a:latin typeface="Times New Roman" panose="02020603050405020304" pitchFamily="18" charset="0"/>
-                <a:cs typeface="Times New Roman" panose="02020603050405020304" pitchFamily="18" charset="0"/>
-              </a:rPr>
-              <a:t>Search and filter options can be added for easy retrieval.</a:t>
-            </a:r>
-          </a:p>
-          <a:p>
-            <a:pPr algn="just">
-              <a:lnSpc>
-                <a:spcPct val="150000"/>
-              </a:lnSpc>
-            </a:pPr>
-            <a:r>
-              <a:rPr lang="en-US" sz="2400" dirty="0">
-                <a:latin typeface="Times New Roman" panose="02020603050405020304" pitchFamily="18" charset="0"/>
-                <a:cs typeface="Times New Roman" panose="02020603050405020304" pitchFamily="18" charset="0"/>
-              </a:rPr>
-              <a:t>A mobile application version can also be developed.</a:t>
-            </a:r>
-          </a:p>
-          <a:p>
-            <a:pPr algn="just">
-              <a:lnSpc>
-                <a:spcPct val="150000"/>
-              </a:lnSpc>
-            </a:pPr>
-            <a:r>
-              <a:rPr lang="en-US" sz="2400" dirty="0">
-                <a:latin typeface="Times New Roman" panose="02020603050405020304" pitchFamily="18" charset="0"/>
-                <a:cs typeface="Times New Roman" panose="02020603050405020304" pitchFamily="18" charset="0"/>
-              </a:rPr>
-              <a:t>Advanced features like reminders and AI-based analysis can be introduced</a:t>
-            </a:r>
-            <a:r>
-              <a:rPr lang="en-US" sz="2000" dirty="0">
-                <a:latin typeface="Times New Roman" panose="02020603050405020304" pitchFamily="18" charset="0"/>
-                <a:cs typeface="Times New Roman" panose="02020603050405020304" pitchFamily="18" charset="0"/>
-              </a:rPr>
-              <a:t>.</a:t>
-            </a:r>
-            <a:endParaRPr lang="en-IN" sz="2000" b="1" dirty="0">
+            <a:pPr algn="ctr"/>
+            <a:r>
+              <a:rPr lang="en-US" sz="3600" b="1" dirty="0">
+                <a:latin typeface="Times New Roman" panose="02020603050405020304" pitchFamily="18" charset="0"/>
+                <a:cs typeface="Times New Roman" panose="02020603050405020304" pitchFamily="18" charset="0"/>
+              </a:rPr>
+              <a:t>MODULE 2 – FILE HANDLING AND DATE-TIME MANAGEMENT</a:t>
+            </a:r>
+            <a:endParaRPr lang="en-IN" sz="3600" b="1" dirty="0">
               <a:latin typeface="Times New Roman" panose="02020603050405020304" pitchFamily="18" charset="0"/>
               <a:cs typeface="Times New Roman" panose="02020603050405020304" pitchFamily="18" charset="0"/>
             </a:endParaRPr>
           </a:p>
         </p:txBody>
       </p:sp>
-      <p:pic>
-        <p:nvPicPr>
-          <p:cNvPr id="4" name="Picture 3">
-            <a:extLst>
-              <a:ext uri="{FF2B5EF4-FFF2-40B4-BE49-F238E27FC236}">
-                <a16:creationId xmlns:a16="http://schemas.microsoft.com/office/drawing/2014/main" id="{AB88422F-3D96-AF7B-7DF3-6965BA784C26}"/>
-              </a:ext>
-            </a:extLst>
-          </p:cNvPr>
-          <p:cNvPicPr>
-            <a:picLocks noChangeAspect="1"/>
-          </p:cNvPicPr>
-          <p:nvPr/>
-        </p:nvPicPr>
-        <p:blipFill>
-          <a:blip r:embed="rId2"/>
-          <a:stretch>
-            <a:fillRect/>
-          </a:stretch>
-        </p:blipFill>
-        <p:spPr>
-          <a:xfrm>
-            <a:off x="0" y="-8783"/>
-            <a:ext cx="1219354" cy="1081314"/>
-          </a:xfrm>
-          <a:prstGeom prst="rect">
-            <a:avLst/>
-          </a:prstGeom>
-        </p:spPr>
-      </p:pic>
-      <p:pic>
-        <p:nvPicPr>
-          <p:cNvPr id="5" name="Picture 4">
-            <a:extLst>
-              <a:ext uri="{FF2B5EF4-FFF2-40B4-BE49-F238E27FC236}">
-                <a16:creationId xmlns:a16="http://schemas.microsoft.com/office/drawing/2014/main" id="{FE381739-A951-51FB-E9D4-F289278978B8}"/>
-              </a:ext>
-            </a:extLst>
-          </p:cNvPr>
-          <p:cNvPicPr>
-            <a:picLocks noChangeAspect="1"/>
-          </p:cNvPicPr>
-          <p:nvPr/>
-        </p:nvPicPr>
-        <p:blipFill>
-          <a:blip r:embed="rId3"/>
-          <a:stretch>
-            <a:fillRect/>
-          </a:stretch>
-        </p:blipFill>
-        <p:spPr>
-          <a:xfrm>
-            <a:off x="11274046" y="-15129"/>
-            <a:ext cx="917954" cy="1087660"/>
-          </a:xfrm>
-          <a:prstGeom prst="rect">
-            <a:avLst/>
-          </a:prstGeom>
-        </p:spPr>
-      </p:pic>
-    </p:spTree>
-    <p:extLst>
-      <p:ext uri="{BB962C8B-B14F-4D97-AF65-F5344CB8AC3E}">
-        <p14:creationId xmlns:p14="http://schemas.microsoft.com/office/powerpoint/2010/main" val="1918262855"/>
-      </p:ext>
-    </p:extLst>
-  </p:cSld>
-  <p:clrMapOvr>
-    <a:masterClrMapping/>
-  </p:clrMapOvr>
-</p:sld>
-</file>
-
-<file path=ppt/slides/slide14.xml><?xml version="1.0" encoding="utf-8"?>
-<p:sld xmlns:a="http://schemas.openxmlformats.org/drawingml/2006/main" xmlns:r="http://schemas.openxmlformats.org/officeDocument/2006/relationships" xmlns:p="http://schemas.openxmlformats.org/presentationml/2006/main">
-  <p:cSld>
-    <p:spTree>
-      <p:nvGrpSpPr>
-        <p:cNvPr id="1" name=""/>
-        <p:cNvGrpSpPr/>
-        <p:nvPr/>
-      </p:nvGrpSpPr>
-      <p:grpSpPr>
-        <a:xfrm>
-          <a:off x="0" y="0"/>
-          <a:ext cx="0" cy="0"/>
-          <a:chOff x="0" y="0"/>
-          <a:chExt cx="0" cy="0"/>
-        </a:xfrm>
-      </p:grpSpPr>
-      <p:sp>
-        <p:nvSpPr>
-          <p:cNvPr id="2" name="Title 1">
-            <a:extLst>
-              <a:ext uri="{FF2B5EF4-FFF2-40B4-BE49-F238E27FC236}">
-                <a16:creationId xmlns:a16="http://schemas.microsoft.com/office/drawing/2014/main" id="{725AB784-2D3E-7A4A-9659-02E7F8EBB3F1}"/>
-              </a:ext>
-            </a:extLst>
-          </p:cNvPr>
-          <p:cNvSpPr>
-            <a:spLocks noGrp="1"/>
-          </p:cNvSpPr>
-          <p:nvPr>
-            <p:ph type="title"/>
-          </p:nvPr>
-        </p:nvSpPr>
-        <p:spPr>
-          <a:xfrm>
-            <a:off x="838200" y="365126"/>
-            <a:ext cx="10515600" cy="832304"/>
-          </a:xfrm>
-        </p:spPr>
-        <p:txBody>
-          <a:bodyPr/>
-          <a:lstStyle/>
-          <a:p>
-            <a:pPr algn="ctr"/>
-            <a:r>
-              <a:rPr lang="en-IN" b="1" dirty="0">
-                <a:latin typeface="Times New Roman" panose="02020603050405020304" pitchFamily="18" charset="0"/>
-                <a:cs typeface="Times New Roman" panose="02020603050405020304" pitchFamily="18" charset="0"/>
-              </a:rPr>
-              <a:t>CONCLUSION</a:t>
-            </a:r>
-          </a:p>
-        </p:txBody>
-      </p:sp>
-      <p:sp>
-        <p:nvSpPr>
-          <p:cNvPr id="3" name="Content Placeholder 2">
-            <a:extLst>
-              <a:ext uri="{FF2B5EF4-FFF2-40B4-BE49-F238E27FC236}">
-                <a16:creationId xmlns:a16="http://schemas.microsoft.com/office/drawing/2014/main" id="{124F1B1C-20C3-023F-CD83-6467FFAA8EA0}"/>
-              </a:ext>
-            </a:extLst>
-          </p:cNvPr>
-          <p:cNvSpPr>
-            <a:spLocks noGrp="1"/>
+      <p:sp>
+        <p:nvSpPr>
+          <p:cNvPr id="4" name="Rectangle 1">
+            <a:extLst>
+              <a:ext uri="{FF2B5EF4-FFF2-40B4-BE49-F238E27FC236}">
+                <a16:creationId xmlns:a16="http://schemas.microsoft.com/office/drawing/2014/main" id="{D5E795FF-B27F-966F-AB88-7167E9D357F0}"/>
+              </a:ext>
+            </a:extLst>
+          </p:cNvPr>
+          <p:cNvSpPr>
+            <a:spLocks noGrp="1" noChangeArrowheads="1"/>
           </p:cNvSpPr>
           <p:nvPr>
             <p:ph idx="1"/>
           </p:nvPr>
         </p:nvSpPr>
-        <p:spPr>
-          <a:xfrm>
-            <a:off x="399212" y="1839686"/>
-            <a:ext cx="10954587" cy="4376057"/>
-          </a:xfrm>
-        </p:spPr>
-        <p:txBody>
-          <a:bodyPr>
-            <a:normAutofit fontScale="62500" lnSpcReduction="20000"/>
-          </a:bodyPr>
-          <a:lstStyle/>
-          <a:p>
-            <a:pPr>
-              <a:lnSpc>
-                <a:spcPct val="150000"/>
-              </a:lnSpc>
-            </a:pPr>
-            <a:r>
-              <a:rPr lang="en-US" sz="4500" dirty="0">
-                <a:latin typeface="Times New Roman" panose="02020603050405020304" pitchFamily="18" charset="0"/>
-                <a:cs typeface="Times New Roman" panose="02020603050405020304" pitchFamily="18" charset="0"/>
-              </a:rPr>
-              <a:t>The Daily Digital Diary with Date-Time and File Input is a simple yet effective digital record management system.</a:t>
-            </a:r>
-          </a:p>
-          <a:p>
-            <a:pPr>
-              <a:lnSpc>
-                <a:spcPct val="150000"/>
-              </a:lnSpc>
-            </a:pPr>
-            <a:r>
-              <a:rPr lang="en-US" sz="4500" dirty="0">
-                <a:latin typeface="Times New Roman" panose="02020603050405020304" pitchFamily="18" charset="0"/>
-                <a:cs typeface="Times New Roman" panose="02020603050405020304" pitchFamily="18" charset="0"/>
-              </a:rPr>
-              <a:t>It ensures easy entry capture, automatic timestamp storage, and secure file management.</a:t>
-            </a:r>
-          </a:p>
-          <a:p>
-            <a:pPr>
-              <a:lnSpc>
-                <a:spcPct val="150000"/>
-              </a:lnSpc>
-            </a:pPr>
-            <a:r>
-              <a:rPr lang="en-US" sz="4500" dirty="0">
-                <a:latin typeface="Times New Roman" panose="02020603050405020304" pitchFamily="18" charset="0"/>
-                <a:cs typeface="Times New Roman" panose="02020603050405020304" pitchFamily="18" charset="0"/>
-              </a:rPr>
-              <a:t>The system improves organization, accessibility, and efficiency.</a:t>
-            </a:r>
-            <a:br>
-              <a:rPr lang="en-US" sz="4500" dirty="0">
-                <a:latin typeface="Times New Roman" panose="02020603050405020304" pitchFamily="18" charset="0"/>
-                <a:cs typeface="Times New Roman" panose="02020603050405020304" pitchFamily="18" charset="0"/>
-              </a:rPr>
-            </a:br>
-            <a:r>
-              <a:rPr lang="en-US" sz="4500" dirty="0">
-                <a:latin typeface="Times New Roman" panose="02020603050405020304" pitchFamily="18" charset="0"/>
-                <a:cs typeface="Times New Roman" panose="02020603050405020304" pitchFamily="18" charset="0"/>
-              </a:rPr>
-              <a:t>With further enhancements, it can be developed into a complete smart diary application.</a:t>
-            </a:r>
-          </a:p>
-          <a:p>
-            <a:endParaRPr lang="en-IN" dirty="0"/>
-          </a:p>
-        </p:txBody>
-      </p:sp>
-      <p:pic>
-        <p:nvPicPr>
-          <p:cNvPr id="4" name="Picture 3">
-            <a:extLst>
-              <a:ext uri="{FF2B5EF4-FFF2-40B4-BE49-F238E27FC236}">
-                <a16:creationId xmlns:a16="http://schemas.microsoft.com/office/drawing/2014/main" id="{D6020478-388A-9FB6-2F7A-33658341F155}"/>
-              </a:ext>
-            </a:extLst>
-          </p:cNvPr>
-          <p:cNvPicPr>
-            <a:picLocks noChangeAspect="1"/>
-          </p:cNvPicPr>
-          <p:nvPr/>
-        </p:nvPicPr>
-        <p:blipFill>
-          <a:blip r:embed="rId2"/>
-          <a:stretch>
-            <a:fillRect/>
-          </a:stretch>
-        </p:blipFill>
-        <p:spPr>
-          <a:xfrm>
-            <a:off x="0" y="-21483"/>
-            <a:ext cx="1219354" cy="1081314"/>
-          </a:xfrm>
-          <a:prstGeom prst="rect">
-            <a:avLst/>
-          </a:prstGeom>
-        </p:spPr>
-      </p:pic>
-      <p:pic>
-        <p:nvPicPr>
-          <p:cNvPr id="5" name="Picture 4">
-            <a:extLst>
-              <a:ext uri="{FF2B5EF4-FFF2-40B4-BE49-F238E27FC236}">
-                <a16:creationId xmlns:a16="http://schemas.microsoft.com/office/drawing/2014/main" id="{5B20B464-6DB5-1DB0-5873-5BC06BE658EC}"/>
-              </a:ext>
-            </a:extLst>
-          </p:cNvPr>
-          <p:cNvPicPr>
-            <a:picLocks noChangeAspect="1"/>
-          </p:cNvPicPr>
-          <p:nvPr/>
-        </p:nvPicPr>
-        <p:blipFill>
-          <a:blip r:embed="rId3"/>
-          <a:stretch>
-            <a:fillRect/>
-          </a:stretch>
-        </p:blipFill>
-        <p:spPr>
-          <a:xfrm>
-            <a:off x="11274046" y="-15129"/>
-            <a:ext cx="917954" cy="1087660"/>
-          </a:xfrm>
-          <a:prstGeom prst="rect">
-            <a:avLst/>
-          </a:prstGeom>
-        </p:spPr>
-      </p:pic>
-    </p:spTree>
-    <p:extLst>
-      <p:ext uri="{BB962C8B-B14F-4D97-AF65-F5344CB8AC3E}">
-        <p14:creationId xmlns:p14="http://schemas.microsoft.com/office/powerpoint/2010/main" val="4195444650"/>
-      </p:ext>
-    </p:extLst>
-  </p:cSld>
-  <p:clrMapOvr>
-    <a:masterClrMapping/>
-  </p:clrMapOvr>
-</p:sld>
-</file>
-
-<file path=ppt/slides/slide15.xml><?xml version="1.0" encoding="utf-8"?>
-<p:sld xmlns:a="http://schemas.openxmlformats.org/drawingml/2006/main" xmlns:r="http://schemas.openxmlformats.org/officeDocument/2006/relationships" xmlns:p="http://schemas.openxmlformats.org/presentationml/2006/main">
-  <p:cSld>
-    <p:spTree>
-      <p:nvGrpSpPr>
-        <p:cNvPr id="1" name=""/>
-        <p:cNvGrpSpPr/>
-        <p:nvPr/>
-      </p:nvGrpSpPr>
-      <p:grpSpPr>
-        <a:xfrm>
-          <a:off x="0" y="0"/>
-          <a:ext cx="0" cy="0"/>
-          <a:chOff x="0" y="0"/>
-          <a:chExt cx="0" cy="0"/>
-        </a:xfrm>
-      </p:grpSpPr>
-      <p:pic>
-        <p:nvPicPr>
-          <p:cNvPr id="2" name="Picture 1">
-            <a:extLst>
-              <a:ext uri="{FF2B5EF4-FFF2-40B4-BE49-F238E27FC236}">
-                <a16:creationId xmlns:a16="http://schemas.microsoft.com/office/drawing/2014/main" id="{917891B9-53E6-D93E-FE8D-009BFFD5D90E}"/>
-              </a:ext>
-            </a:extLst>
-          </p:cNvPr>
-          <p:cNvPicPr>
-            <a:picLocks noChangeAspect="1"/>
-          </p:cNvPicPr>
-          <p:nvPr/>
-        </p:nvPicPr>
-        <p:blipFill>
-          <a:blip r:embed="rId2">
-            <a:extLst>
-              <a:ext uri="{28A0092B-C50C-407E-A947-70E740481C1C}">
-                <a14:useLocalDpi xmlns:a14="http://schemas.microsoft.com/office/drawing/2010/main" val="0"/>
-              </a:ext>
-            </a:extLst>
-          </a:blip>
-          <a:stretch>
-            <a:fillRect/>
-          </a:stretch>
-        </p:blipFill>
-        <p:spPr>
-          <a:xfrm>
-            <a:off x="2801185" y="711070"/>
-            <a:ext cx="7355301" cy="5057459"/>
-          </a:xfrm>
-          <a:prstGeom prst="rect">
-            <a:avLst/>
-          </a:prstGeom>
-        </p:spPr>
-      </p:pic>
-    </p:spTree>
-    <p:extLst>
-      <p:ext uri="{BB962C8B-B14F-4D97-AF65-F5344CB8AC3E}">
-        <p14:creationId xmlns:p14="http://schemas.microsoft.com/office/powerpoint/2010/main" val="2750597893"/>
-      </p:ext>
-    </p:extLst>
-  </p:cSld>
-  <p:clrMapOvr>
-    <a:masterClrMapping/>
-  </p:clrMapOvr>
-</p:sld>
-</file>
-
-<file path=ppt/slides/slide2.xml><?xml version="1.0" encoding="utf-8"?>
-<p:sld xmlns:a="http://schemas.openxmlformats.org/drawingml/2006/main" xmlns:r="http://schemas.openxmlformats.org/officeDocument/2006/relationships" xmlns:p="http://schemas.openxmlformats.org/presentationml/2006/main">
-  <p:cSld>
-    <p:spTree>
-      <p:nvGrpSpPr>
-        <p:cNvPr id="1" name=""/>
-        <p:cNvGrpSpPr/>
-        <p:nvPr/>
-      </p:nvGrpSpPr>
-      <p:grpSpPr>
-        <a:xfrm>
-          <a:off x="0" y="0"/>
-          <a:ext cx="0" cy="0"/>
-          <a:chOff x="0" y="0"/>
-          <a:chExt cx="0" cy="0"/>
-        </a:xfrm>
-      </p:grpSpPr>
-      <p:sp>
-        <p:nvSpPr>
-          <p:cNvPr id="2" name="Title 1">
-            <a:extLst>
-              <a:ext uri="{FF2B5EF4-FFF2-40B4-BE49-F238E27FC236}">
-                <a16:creationId xmlns:a16="http://schemas.microsoft.com/office/drawing/2014/main" id="{E44D1ABD-264E-0167-967B-652AA10684E0}"/>
-              </a:ext>
-            </a:extLst>
-          </p:cNvPr>
-          <p:cNvSpPr>
-            <a:spLocks noGrp="1"/>
-          </p:cNvSpPr>
-          <p:nvPr>
-            <p:ph type="title"/>
-          </p:nvPr>
-        </p:nvSpPr>
-        <p:spPr/>
-        <p:txBody>
-          <a:bodyPr/>
-          <a:lstStyle/>
-          <a:p>
-            <a:pPr algn="ctr"/>
-            <a:r>
-              <a:rPr lang="en-IN" b="1" dirty="0">
-                <a:latin typeface="Times New Roman" panose="02020603050405020304" pitchFamily="18" charset="0"/>
-                <a:cs typeface="Times New Roman" panose="02020603050405020304" pitchFamily="18" charset="0"/>
-              </a:rPr>
-              <a:t>Table of Contents</a:t>
-            </a:r>
-          </a:p>
-        </p:txBody>
-      </p:sp>
-      <p:sp>
-        <p:nvSpPr>
-          <p:cNvPr id="4" name="Rectangle 1">
-            <a:extLst>
-              <a:ext uri="{FF2B5EF4-FFF2-40B4-BE49-F238E27FC236}">
-                <a16:creationId xmlns:a16="http://schemas.microsoft.com/office/drawing/2014/main" id="{B2BF9E21-33FC-7575-81D8-655BE89669CA}"/>
-              </a:ext>
-            </a:extLst>
-          </p:cNvPr>
-          <p:cNvSpPr>
-            <a:spLocks noGrp="1" noChangeArrowheads="1"/>
-          </p:cNvSpPr>
-          <p:nvPr>
-            <p:ph idx="1"/>
-          </p:nvPr>
-        </p:nvSpPr>
         <p:spPr bwMode="auto">
           <a:xfrm>
-            <a:off x="838200" y="1408533"/>
-            <a:ext cx="2214068" cy="5185522"/>
+            <a:off x="304801" y="1236112"/>
+            <a:ext cx="11800114" cy="5185522"/>
           </a:xfrm>
           <a:prstGeom prst="rect">
             <a:avLst/>
@@ -4901,7 +3791,7 @@
           </a:extLst>
         </p:spPr>
         <p:txBody>
-          <a:bodyPr vert="horz" wrap="none" lIns="91440" tIns="45720" rIns="91440" bIns="45720" numCol="1" anchor="ctr" anchorCtr="0" compatLnSpc="1">
+          <a:bodyPr vert="horz" wrap="square" lIns="91440" tIns="45720" rIns="91440" bIns="45720" numCol="1" anchor="ctr" anchorCtr="0" compatLnSpc="1">
             <a:prstTxWarp prst="textNoShape">
               <a:avLst/>
             </a:prstTxWarp>
@@ -4909,7 +3799,7 @@
           </a:bodyPr>
           <a:lstStyle/>
           <a:p>
-            <a:pPr marL="0" marR="0" lvl="0" indent="0" algn="l" defTabSz="914400" rtl="0" eaLnBrk="0" fontAlgn="base" latinLnBrk="0" hangingPunct="0">
+            <a:pPr algn="just" eaLnBrk="0" fontAlgn="base" hangingPunct="0">
               <a:lnSpc>
                 <a:spcPct val="150000"/>
               </a:lnSpc>
@@ -4919,29 +3809,17 @@
               <a:spcAft>
                 <a:spcPct val="0"/>
               </a:spcAft>
-              <a:buClrTx/>
-              <a:buSzTx/>
-              <a:buFontTx/>
-              <a:buChar char="•"/>
-              <a:tabLst/>
             </a:pPr>
             <a:r>
-              <a:rPr kumimoji="0" lang="en-US" altLang="en-US" b="0" i="0" u="none" strike="noStrike" cap="none" normalizeH="0" baseline="0" dirty="0">
-                <a:ln>
-                  <a:noFill/>
-                </a:ln>
-                <a:solidFill>
-                  <a:schemeClr val="tx1"/>
-                </a:solidFill>
-                <a:effectLst/>
-                <a:latin typeface="Times New Roman" panose="02020603050405020304" pitchFamily="18" charset="0"/>
-                <a:cs typeface="Times New Roman" panose="02020603050405020304" pitchFamily="18" charset="0"/>
-              </a:rPr>
-              <a:t>Introduction</a:t>
-            </a:r>
-          </a:p>
-          <a:p>
-            <a:pPr marL="0" marR="0" lvl="0" indent="0" algn="l" defTabSz="914400" rtl="0" eaLnBrk="0" fontAlgn="base" latinLnBrk="0" hangingPunct="0">
+              <a:rPr lang="en-US" dirty="0">
+                <a:latin typeface="Times New Roman" panose="02020603050405020304" pitchFamily="18" charset="0"/>
+                <a:cs typeface="Times New Roman" panose="02020603050405020304" pitchFamily="18" charset="0"/>
+              </a:rPr>
+              <a:t>This module manages backend operations of the system.</a:t>
+            </a:r>
+          </a:p>
+          <a:p>
+            <a:pPr algn="just" eaLnBrk="0" fontAlgn="base" hangingPunct="0">
               <a:lnSpc>
                 <a:spcPct val="150000"/>
               </a:lnSpc>
@@ -4951,29 +3829,17 @@
               <a:spcAft>
                 <a:spcPct val="0"/>
               </a:spcAft>
-              <a:buClrTx/>
-              <a:buSzTx/>
-              <a:buFontTx/>
-              <a:buChar char="•"/>
-              <a:tabLst/>
             </a:pPr>
             <a:r>
-              <a:rPr kumimoji="0" lang="en-US" altLang="en-US" b="0" i="0" u="none" strike="noStrike" cap="none" normalizeH="0" baseline="0" dirty="0">
-                <a:ln>
-                  <a:noFill/>
-                </a:ln>
-                <a:solidFill>
-                  <a:schemeClr val="tx1"/>
-                </a:solidFill>
-                <a:effectLst/>
-                <a:latin typeface="Times New Roman" panose="02020603050405020304" pitchFamily="18" charset="0"/>
-                <a:cs typeface="Times New Roman" panose="02020603050405020304" pitchFamily="18" charset="0"/>
-              </a:rPr>
-              <a:t>Objectives</a:t>
-            </a:r>
-          </a:p>
-          <a:p>
-            <a:pPr marL="0" marR="0" lvl="0" indent="0" algn="l" defTabSz="914400" rtl="0" eaLnBrk="0" fontAlgn="base" latinLnBrk="0" hangingPunct="0">
+              <a:rPr lang="en-US" dirty="0">
+                <a:latin typeface="Times New Roman" panose="02020603050405020304" pitchFamily="18" charset="0"/>
+                <a:cs typeface="Times New Roman" panose="02020603050405020304" pitchFamily="18" charset="0"/>
+              </a:rPr>
+              <a:t>Whenever a user saves an entry, the system automatically captures the current date and time.</a:t>
+            </a:r>
+          </a:p>
+          <a:p>
+            <a:pPr algn="just" eaLnBrk="0" fontAlgn="base" hangingPunct="0">
               <a:lnSpc>
                 <a:spcPct val="150000"/>
               </a:lnSpc>
@@ -4983,29 +3849,17 @@
               <a:spcAft>
                 <a:spcPct val="0"/>
               </a:spcAft>
-              <a:buClrTx/>
-              <a:buSzTx/>
-              <a:buFontTx/>
-              <a:buChar char="•"/>
-              <a:tabLst/>
             </a:pPr>
             <a:r>
-              <a:rPr kumimoji="0" lang="en-US" altLang="en-US" b="0" i="0" u="none" strike="noStrike" cap="none" normalizeH="0" baseline="0" dirty="0">
-                <a:ln>
-                  <a:noFill/>
-                </a:ln>
-                <a:solidFill>
-                  <a:schemeClr val="tx1"/>
-                </a:solidFill>
-                <a:effectLst/>
-                <a:latin typeface="Times New Roman" panose="02020603050405020304" pitchFamily="18" charset="0"/>
-                <a:cs typeface="Times New Roman" panose="02020603050405020304" pitchFamily="18" charset="0"/>
-              </a:rPr>
-              <a:t>Module 1</a:t>
-            </a:r>
-          </a:p>
-          <a:p>
-            <a:pPr marL="0" marR="0" lvl="0" indent="0" algn="l" defTabSz="914400" rtl="0" eaLnBrk="0" fontAlgn="base" latinLnBrk="0" hangingPunct="0">
+              <a:rPr lang="en-US" dirty="0">
+                <a:latin typeface="Times New Roman" panose="02020603050405020304" pitchFamily="18" charset="0"/>
+                <a:cs typeface="Times New Roman" panose="02020603050405020304" pitchFamily="18" charset="0"/>
+              </a:rPr>
+              <a:t>This ensures that each entry is stored with a proper timestamp.</a:t>
+            </a:r>
+          </a:p>
+          <a:p>
+            <a:pPr algn="just" eaLnBrk="0" fontAlgn="base" hangingPunct="0">
               <a:lnSpc>
                 <a:spcPct val="150000"/>
               </a:lnSpc>
@@ -5015,29 +3869,17 @@
               <a:spcAft>
                 <a:spcPct val="0"/>
               </a:spcAft>
-              <a:buClrTx/>
-              <a:buSzTx/>
-              <a:buFontTx/>
-              <a:buChar char="•"/>
-              <a:tabLst/>
             </a:pPr>
             <a:r>
-              <a:rPr kumimoji="0" lang="en-US" altLang="en-US" b="0" i="0" u="none" strike="noStrike" cap="none" normalizeH="0" baseline="0" dirty="0">
-                <a:ln>
-                  <a:noFill/>
-                </a:ln>
-                <a:solidFill>
-                  <a:schemeClr val="tx1"/>
-                </a:solidFill>
-                <a:effectLst/>
-                <a:latin typeface="Times New Roman" panose="02020603050405020304" pitchFamily="18" charset="0"/>
-                <a:cs typeface="Times New Roman" panose="02020603050405020304" pitchFamily="18" charset="0"/>
-              </a:rPr>
-              <a:t>Module 2</a:t>
-            </a:r>
-          </a:p>
-          <a:p>
-            <a:pPr marL="0" marR="0" lvl="0" indent="0" algn="l" defTabSz="914400" rtl="0" eaLnBrk="0" fontAlgn="base" latinLnBrk="0" hangingPunct="0">
+              <a:rPr lang="en-US" dirty="0">
+                <a:latin typeface="Times New Roman" panose="02020603050405020304" pitchFamily="18" charset="0"/>
+                <a:cs typeface="Times New Roman" panose="02020603050405020304" pitchFamily="18" charset="0"/>
+              </a:rPr>
+              <a:t>The module also allows users to upload files such as images, PDFs, or documents.</a:t>
+            </a:r>
+          </a:p>
+          <a:p>
+            <a:pPr algn="just" eaLnBrk="0" fontAlgn="base" hangingPunct="0">
               <a:lnSpc>
                 <a:spcPct val="150000"/>
               </a:lnSpc>
@@ -5047,29 +3889,17 @@
               <a:spcAft>
                 <a:spcPct val="0"/>
               </a:spcAft>
-              <a:buClrTx/>
-              <a:buSzTx/>
-              <a:buFontTx/>
-              <a:buChar char="•"/>
-              <a:tabLst/>
             </a:pPr>
             <a:r>
-              <a:rPr kumimoji="0" lang="en-US" altLang="en-US" b="0" i="0" u="none" strike="noStrike" cap="none" normalizeH="0" baseline="0" dirty="0">
-                <a:ln>
-                  <a:noFill/>
-                </a:ln>
-                <a:solidFill>
-                  <a:schemeClr val="tx1"/>
-                </a:solidFill>
-                <a:effectLst/>
-                <a:latin typeface="Times New Roman" panose="02020603050405020304" pitchFamily="18" charset="0"/>
-                <a:cs typeface="Times New Roman" panose="02020603050405020304" pitchFamily="18" charset="0"/>
-              </a:rPr>
-              <a:t>Advantages</a:t>
-            </a:r>
-          </a:p>
-          <a:p>
-            <a:pPr marL="0" marR="0" lvl="0" indent="0" algn="l" defTabSz="914400" rtl="0" eaLnBrk="0" fontAlgn="base" latinLnBrk="0" hangingPunct="0">
+              <a:rPr lang="en-US" dirty="0">
+                <a:latin typeface="Times New Roman" panose="02020603050405020304" pitchFamily="18" charset="0"/>
+                <a:cs typeface="Times New Roman" panose="02020603050405020304" pitchFamily="18" charset="0"/>
+              </a:rPr>
+              <a:t>These files are stored securely and linked with the respective diary entry.</a:t>
+            </a:r>
+          </a:p>
+          <a:p>
+            <a:pPr algn="just" eaLnBrk="0" fontAlgn="base" hangingPunct="0">
               <a:lnSpc>
                 <a:spcPct val="150000"/>
               </a:lnSpc>
@@ -5079,90 +3909,25 @@
               <a:spcAft>
                 <a:spcPct val="0"/>
               </a:spcAft>
-              <a:buClrTx/>
-              <a:buSzTx/>
-              <a:buFontTx/>
-              <a:buChar char="•"/>
-              <a:tabLst/>
             </a:pPr>
             <a:r>
-              <a:rPr kumimoji="0" lang="en-US" altLang="en-US" b="0" i="0" u="none" strike="noStrike" cap="none" normalizeH="0" baseline="0" dirty="0">
-                <a:ln>
-                  <a:noFill/>
-                </a:ln>
-                <a:solidFill>
-                  <a:schemeClr val="tx1"/>
-                </a:solidFill>
-                <a:effectLst/>
-                <a:latin typeface="Times New Roman" panose="02020603050405020304" pitchFamily="18" charset="0"/>
-                <a:cs typeface="Times New Roman" panose="02020603050405020304" pitchFamily="18" charset="0"/>
-              </a:rPr>
-              <a:t>Applications</a:t>
-            </a:r>
-          </a:p>
-          <a:p>
-            <a:pPr marL="0" marR="0" lvl="0" indent="0" algn="l" defTabSz="914400" rtl="0" eaLnBrk="0" fontAlgn="base" latinLnBrk="0" hangingPunct="0">
-              <a:lnSpc>
-                <a:spcPct val="150000"/>
-              </a:lnSpc>
-              <a:spcBef>
-                <a:spcPct val="0"/>
-              </a:spcBef>
-              <a:spcAft>
-                <a:spcPct val="0"/>
-              </a:spcAft>
-              <a:buClrTx/>
-              <a:buSzTx/>
-              <a:buFontTx/>
-              <a:buChar char="•"/>
-              <a:tabLst/>
-            </a:pPr>
-            <a:r>
-              <a:rPr kumimoji="0" lang="en-US" altLang="en-US" b="0" i="0" u="none" strike="noStrike" cap="none" normalizeH="0" baseline="0" dirty="0">
-                <a:ln>
-                  <a:noFill/>
-                </a:ln>
-                <a:solidFill>
-                  <a:schemeClr val="tx1"/>
-                </a:solidFill>
-                <a:effectLst/>
-                <a:latin typeface="Times New Roman" panose="02020603050405020304" pitchFamily="18" charset="0"/>
-                <a:cs typeface="Times New Roman" panose="02020603050405020304" pitchFamily="18" charset="0"/>
-              </a:rPr>
-              <a:t>Future Scope</a:t>
-            </a:r>
-          </a:p>
-          <a:p>
-            <a:pPr marL="0" marR="0" lvl="0" indent="0" algn="l" defTabSz="914400" rtl="0" eaLnBrk="0" fontAlgn="base" latinLnBrk="0" hangingPunct="0">
-              <a:lnSpc>
-                <a:spcPct val="150000"/>
-              </a:lnSpc>
-              <a:spcBef>
-                <a:spcPct val="0"/>
-              </a:spcBef>
-              <a:spcAft>
-                <a:spcPct val="0"/>
-              </a:spcAft>
-              <a:buClrTx/>
-              <a:buSzTx/>
-              <a:buFontTx/>
-              <a:buChar char="•"/>
-              <a:tabLst/>
-            </a:pPr>
-            <a:r>
-              <a:rPr kumimoji="0" lang="en-US" altLang="en-US" b="0" i="0" u="none" strike="noStrike" cap="none" normalizeH="0" baseline="0" dirty="0">
-                <a:ln>
-                  <a:noFill/>
-                </a:ln>
-                <a:solidFill>
-                  <a:schemeClr val="tx1"/>
-                </a:solidFill>
-                <a:effectLst/>
-                <a:latin typeface="Times New Roman" panose="02020603050405020304" pitchFamily="18" charset="0"/>
-                <a:cs typeface="Times New Roman" panose="02020603050405020304" pitchFamily="18" charset="0"/>
-              </a:rPr>
-              <a:t>Conclusion</a:t>
-            </a:r>
+              <a:rPr lang="en-US" dirty="0">
+                <a:latin typeface="Times New Roman" panose="02020603050405020304" pitchFamily="18" charset="0"/>
+                <a:cs typeface="Times New Roman" panose="02020603050405020304" pitchFamily="18" charset="0"/>
+              </a:rPr>
+              <a:t>This helps in maintaining structured and organized records.</a:t>
+            </a:r>
+            <a:endParaRPr kumimoji="0" lang="en-US" altLang="en-US" i="0" u="none" strike="noStrike" cap="none" normalizeH="0" baseline="0" dirty="0">
+              <a:ln>
+                <a:noFill/>
+              </a:ln>
+              <a:solidFill>
+                <a:schemeClr val="tx1"/>
+              </a:solidFill>
+              <a:effectLst/>
+              <a:latin typeface="Times New Roman" panose="02020603050405020304" pitchFamily="18" charset="0"/>
+              <a:cs typeface="Times New Roman" panose="02020603050405020304" pitchFamily="18" charset="0"/>
+            </a:endParaRPr>
           </a:p>
         </p:txBody>
       </p:sp>
@@ -5171,7 +3936,7 @@
           <p:cNvPr id="5" name="Picture 4">
             <a:extLst>
               <a:ext uri="{FF2B5EF4-FFF2-40B4-BE49-F238E27FC236}">
-                <a16:creationId xmlns:a16="http://schemas.microsoft.com/office/drawing/2014/main" id="{086EE6B4-49D1-411D-3A29-F0CF5E50A9E7}"/>
+                <a16:creationId xmlns:a16="http://schemas.microsoft.com/office/drawing/2014/main" id="{0D89BEF3-E50A-B63A-E7D6-416CA55A09B7}"/>
               </a:ext>
             </a:extLst>
           </p:cNvPr>
@@ -5201,7 +3966,7 @@
           <p:cNvPr id="6" name="Picture 5">
             <a:extLst>
               <a:ext uri="{FF2B5EF4-FFF2-40B4-BE49-F238E27FC236}">
-                <a16:creationId xmlns:a16="http://schemas.microsoft.com/office/drawing/2014/main" id="{60E22D39-FE5F-6832-0110-51E57278413F}"/>
+                <a16:creationId xmlns:a16="http://schemas.microsoft.com/office/drawing/2014/main" id="{C2506793-7B93-7571-97D2-EF28D2BFEECE}"/>
               </a:ext>
             </a:extLst>
           </p:cNvPr>
@@ -5218,7 +3983,7 @@
         </p:blipFill>
         <p:spPr>
           <a:xfrm>
-            <a:off x="11274046" y="-2429"/>
+            <a:off x="11274046" y="-15129"/>
             <a:ext cx="917954" cy="1087660"/>
           </a:xfrm>
           <a:prstGeom prst="rect">
@@ -5229,7 +3994,7 @@
     </p:spTree>
     <p:extLst>
       <p:ext uri="{BB962C8B-B14F-4D97-AF65-F5344CB8AC3E}">
-        <p14:creationId xmlns:p14="http://schemas.microsoft.com/office/powerpoint/2010/main" val="1670785058"/>
+        <p14:creationId xmlns:p14="http://schemas.microsoft.com/office/powerpoint/2010/main" val="418418201"/>
       </p:ext>
     </p:extLst>
   </p:cSld>
@@ -5239,7 +4004,7 @@
 </p:sld>
 </file>
 
-<file path=ppt/slides/slide3.xml><?xml version="1.0" encoding="utf-8"?>
+<file path=ppt/slides/slide11.xml><?xml version="1.0" encoding="utf-8"?>
 <p:sld xmlns:a="http://schemas.openxmlformats.org/drawingml/2006/main" xmlns:r="http://schemas.openxmlformats.org/officeDocument/2006/relationships" xmlns:p="http://schemas.openxmlformats.org/presentationml/2006/main">
   <p:cSld>
     <p:spTree>
@@ -5261,7 +4026,7 @@
           <p:cNvPr id="2" name="Title 1">
             <a:extLst>
               <a:ext uri="{FF2B5EF4-FFF2-40B4-BE49-F238E27FC236}">
-                <a16:creationId xmlns:a16="http://schemas.microsoft.com/office/drawing/2014/main" id="{B69258A8-DA1D-63B7-98CC-9978A9122682}"/>
+                <a16:creationId xmlns:a16="http://schemas.microsoft.com/office/drawing/2014/main" id="{D83F80DC-4AC5-313C-BDA3-201C9E13DFE7}"/>
               </a:ext>
             </a:extLst>
           </p:cNvPr>
@@ -5274,8 +4039,8 @@
         </p:nvSpPr>
         <p:spPr>
           <a:xfrm>
-            <a:off x="838200" y="16670"/>
-            <a:ext cx="10515600" cy="696912"/>
+            <a:off x="838200" y="0"/>
+            <a:ext cx="10515600" cy="841375"/>
           </a:xfrm>
         </p:spPr>
         <p:txBody>
@@ -5288,97 +4053,8 @@
                 <a:latin typeface="Times New Roman" panose="02020603050405020304" pitchFamily="18" charset="0"/>
                 <a:cs typeface="Times New Roman" panose="02020603050405020304" pitchFamily="18" charset="0"/>
               </a:rPr>
-              <a:t>INTRODUCTION</a:t>
-            </a:r>
-          </a:p>
-        </p:txBody>
-      </p:sp>
-      <p:sp>
-        <p:nvSpPr>
-          <p:cNvPr id="3" name="Content Placeholder 2">
-            <a:extLst>
-              <a:ext uri="{FF2B5EF4-FFF2-40B4-BE49-F238E27FC236}">
-                <a16:creationId xmlns:a16="http://schemas.microsoft.com/office/drawing/2014/main" id="{0C8D17BB-6739-8368-1367-67E61EFE59EE}"/>
-              </a:ext>
-            </a:extLst>
-          </p:cNvPr>
-          <p:cNvSpPr>
-            <a:spLocks noGrp="1"/>
-          </p:cNvSpPr>
-          <p:nvPr>
-            <p:ph idx="1"/>
-          </p:nvPr>
-        </p:nvSpPr>
-        <p:spPr>
-          <a:xfrm>
-            <a:off x="229720" y="1278000"/>
-            <a:ext cx="10949909" cy="4545858"/>
-          </a:xfrm>
-        </p:spPr>
-        <p:txBody>
-          <a:bodyPr>
-            <a:noAutofit/>
-          </a:bodyPr>
-          <a:lstStyle/>
-          <a:p>
-            <a:pPr algn="just">
-              <a:lnSpc>
-                <a:spcPct val="150000"/>
-              </a:lnSpc>
-            </a:pPr>
-            <a:r>
-              <a:rPr lang="en-US" dirty="0">
-                <a:latin typeface="Times New Roman" panose="02020603050405020304" pitchFamily="18" charset="0"/>
-                <a:cs typeface="Times New Roman" panose="02020603050405020304" pitchFamily="18" charset="0"/>
-              </a:rPr>
-              <a:t>The Daily Digital Diary with Date-Time and File Input is a digital application designed to record daily activities in an organized and secure manner.</a:t>
-            </a:r>
-          </a:p>
-          <a:p>
-            <a:pPr algn="just">
-              <a:lnSpc>
-                <a:spcPct val="150000"/>
-              </a:lnSpc>
-            </a:pPr>
-            <a:r>
-              <a:rPr lang="en-US" dirty="0">
-                <a:latin typeface="Times New Roman" panose="02020603050405020304" pitchFamily="18" charset="0"/>
-                <a:cs typeface="Times New Roman" panose="02020603050405020304" pitchFamily="18" charset="0"/>
-              </a:rPr>
-              <a:t>It replaces the traditional handwritten diary with a modern digital solution.</a:t>
-            </a:r>
-          </a:p>
-          <a:p>
-            <a:pPr algn="just">
-              <a:lnSpc>
-                <a:spcPct val="150000"/>
-              </a:lnSpc>
-            </a:pPr>
-            <a:r>
-              <a:rPr lang="en-US" dirty="0">
-                <a:latin typeface="Times New Roman" panose="02020603050405020304" pitchFamily="18" charset="0"/>
-                <a:cs typeface="Times New Roman" panose="02020603050405020304" pitchFamily="18" charset="0"/>
-              </a:rPr>
-              <a:t>The system allows users to write daily entries, automatically captures the current date and time, and supports uploading files such as images and documents.</a:t>
-            </a:r>
-          </a:p>
-          <a:p>
-            <a:pPr algn="just">
-              <a:lnSpc>
-                <a:spcPct val="150000"/>
-              </a:lnSpc>
-            </a:pPr>
-            <a:r>
-              <a:rPr lang="en-US" dirty="0">
-                <a:latin typeface="Times New Roman" panose="02020603050405020304" pitchFamily="18" charset="0"/>
-                <a:cs typeface="Times New Roman" panose="02020603050405020304" pitchFamily="18" charset="0"/>
-              </a:rPr>
-              <a:t>This makes daily record management more efficient, structured, and easily accessible.</a:t>
-            </a:r>
-            <a:endParaRPr lang="en-IN" dirty="0">
-              <a:latin typeface="Times New Roman" panose="02020603050405020304" pitchFamily="18" charset="0"/>
-              <a:cs typeface="Times New Roman" panose="02020603050405020304" pitchFamily="18" charset="0"/>
-            </a:endParaRPr>
+              <a:t>MODULE 2 OUTPUT</a:t>
+            </a:r>
           </a:p>
         </p:txBody>
       </p:sp>
@@ -5387,7 +4063,7 @@
           <p:cNvPr id="4" name="Picture 3">
             <a:extLst>
               <a:ext uri="{FF2B5EF4-FFF2-40B4-BE49-F238E27FC236}">
-                <a16:creationId xmlns:a16="http://schemas.microsoft.com/office/drawing/2014/main" id="{CF9FCBFD-44B7-32F6-7082-F81258E29732}"/>
+                <a16:creationId xmlns:a16="http://schemas.microsoft.com/office/drawing/2014/main" id="{909922BA-BA5C-816B-0070-B419FBF5A07D}"/>
               </a:ext>
             </a:extLst>
           </p:cNvPr>
@@ -5404,8 +4080,8 @@
         </p:blipFill>
         <p:spPr>
           <a:xfrm>
-            <a:off x="-44450" y="34519"/>
-            <a:ext cx="927100" cy="822145"/>
+            <a:off x="0" y="-8783"/>
+            <a:ext cx="1219354" cy="1081314"/>
           </a:xfrm>
           <a:prstGeom prst="rect">
             <a:avLst/>
@@ -5417,7 +4093,7 @@
           <p:cNvPr id="5" name="Picture 4">
             <a:extLst>
               <a:ext uri="{FF2B5EF4-FFF2-40B4-BE49-F238E27FC236}">
-                <a16:creationId xmlns:a16="http://schemas.microsoft.com/office/drawing/2014/main" id="{45E21D29-D977-112F-FF2C-C975D042EBFD}"/>
+                <a16:creationId xmlns:a16="http://schemas.microsoft.com/office/drawing/2014/main" id="{6FC04F42-1E4B-6F46-101D-BBD972EFAB8D}"/>
               </a:ext>
             </a:extLst>
           </p:cNvPr>
@@ -5434,8 +4110,40 @@
         </p:blipFill>
         <p:spPr>
           <a:xfrm>
-            <a:off x="11493500" y="-15129"/>
-            <a:ext cx="698500" cy="827635"/>
+            <a:off x="11274046" y="-15129"/>
+            <a:ext cx="917954" cy="1087660"/>
+          </a:xfrm>
+          <a:prstGeom prst="rect">
+            <a:avLst/>
+          </a:prstGeom>
+        </p:spPr>
+      </p:pic>
+      <p:pic>
+        <p:nvPicPr>
+          <p:cNvPr id="11" name="Content Placeholder 10">
+            <a:extLst>
+              <a:ext uri="{FF2B5EF4-FFF2-40B4-BE49-F238E27FC236}">
+                <a16:creationId xmlns:a16="http://schemas.microsoft.com/office/drawing/2014/main" id="{A080C221-3D51-0C9B-9D40-CC176B4907A2}"/>
+              </a:ext>
+            </a:extLst>
+          </p:cNvPr>
+          <p:cNvPicPr>
+            <a:picLocks noGrp="1" noChangeAspect="1"/>
+          </p:cNvPicPr>
+          <p:nvPr>
+            <p:ph idx="1"/>
+          </p:nvPr>
+        </p:nvPicPr>
+        <p:blipFill>
+          <a:blip r:embed="rId4"/>
+          <a:stretch>
+            <a:fillRect/>
+          </a:stretch>
+        </p:blipFill>
+        <p:spPr>
+          <a:xfrm>
+            <a:off x="1127270" y="1850571"/>
+            <a:ext cx="10332976" cy="3461599"/>
           </a:xfrm>
           <a:prstGeom prst="rect">
             <a:avLst/>
@@ -5445,7 +4153,7 @@
     </p:spTree>
     <p:extLst>
       <p:ext uri="{BB962C8B-B14F-4D97-AF65-F5344CB8AC3E}">
-        <p14:creationId xmlns:p14="http://schemas.microsoft.com/office/powerpoint/2010/main" val="3901005640"/>
+        <p14:creationId xmlns:p14="http://schemas.microsoft.com/office/powerpoint/2010/main" val="1439752788"/>
       </p:ext>
     </p:extLst>
   </p:cSld>
@@ -5455,7 +4163,7 @@
 </p:sld>
 </file>
 
-<file path=ppt/slides/slide4.xml><?xml version="1.0" encoding="utf-8"?>
+<file path=ppt/slides/slide12.xml><?xml version="1.0" encoding="utf-8"?>
 <p:sld xmlns:a="http://schemas.openxmlformats.org/drawingml/2006/main" xmlns:r="http://schemas.openxmlformats.org/officeDocument/2006/relationships" xmlns:p="http://schemas.openxmlformats.org/presentationml/2006/main">
   <p:cSld>
     <p:spTree>
@@ -5477,7 +4185,7 @@
           <p:cNvPr id="2" name="Title 1">
             <a:extLst>
               <a:ext uri="{FF2B5EF4-FFF2-40B4-BE49-F238E27FC236}">
-                <a16:creationId xmlns:a16="http://schemas.microsoft.com/office/drawing/2014/main" id="{3A8439A7-7A65-555F-D5D0-751AF9B8A23B}"/>
+                <a16:creationId xmlns:a16="http://schemas.microsoft.com/office/drawing/2014/main" id="{4275D722-9924-8059-649B-BD3A02DCA22F}"/>
               </a:ext>
             </a:extLst>
           </p:cNvPr>
@@ -5490,8 +4198,8 @@
         </p:nvSpPr>
         <p:spPr>
           <a:xfrm>
-            <a:off x="838200" y="147411"/>
-            <a:ext cx="10515600" cy="798302"/>
+            <a:off x="838200" y="-255361"/>
+            <a:ext cx="10515600" cy="1325563"/>
           </a:xfrm>
         </p:spPr>
         <p:txBody>
@@ -5504,8 +4212,1204 @@
                 <a:latin typeface="Times New Roman" panose="02020603050405020304" pitchFamily="18" charset="0"/>
                 <a:cs typeface="Times New Roman" panose="02020603050405020304" pitchFamily="18" charset="0"/>
               </a:rPr>
-              <a:t>OBJECTIVES</a:t>
-            </a:r>
+              <a:t>ADVANTAGES</a:t>
+            </a:r>
+          </a:p>
+        </p:txBody>
+      </p:sp>
+      <p:sp>
+        <p:nvSpPr>
+          <p:cNvPr id="3" name="Content Placeholder 2">
+            <a:extLst>
+              <a:ext uri="{FF2B5EF4-FFF2-40B4-BE49-F238E27FC236}">
+                <a16:creationId xmlns:a16="http://schemas.microsoft.com/office/drawing/2014/main" id="{76ABEA54-B407-FC50-796E-DE417999785B}"/>
+              </a:ext>
+            </a:extLst>
+          </p:cNvPr>
+          <p:cNvSpPr>
+            <a:spLocks noGrp="1"/>
+          </p:cNvSpPr>
+          <p:nvPr>
+            <p:ph idx="1"/>
+          </p:nvPr>
+        </p:nvSpPr>
+        <p:spPr>
+          <a:xfrm>
+            <a:off x="359228" y="1477283"/>
+            <a:ext cx="10765972" cy="4351338"/>
+          </a:xfrm>
+        </p:spPr>
+        <p:txBody>
+          <a:bodyPr>
+            <a:noAutofit/>
+          </a:bodyPr>
+          <a:lstStyle/>
+          <a:p>
+            <a:pPr algn="just">
+              <a:lnSpc>
+                <a:spcPct val="150000"/>
+              </a:lnSpc>
+            </a:pPr>
+            <a:r>
+              <a:rPr lang="en-US" dirty="0">
+                <a:latin typeface="Times New Roman" panose="02020603050405020304" pitchFamily="18" charset="0"/>
+                <a:cs typeface="Times New Roman" panose="02020603050405020304" pitchFamily="18" charset="0"/>
+              </a:rPr>
+              <a:t>The system reduces the use of paper and supports eco-friendly record keeping.</a:t>
+            </a:r>
+          </a:p>
+          <a:p>
+            <a:pPr algn="just">
+              <a:lnSpc>
+                <a:spcPct val="150000"/>
+              </a:lnSpc>
+            </a:pPr>
+            <a:r>
+              <a:rPr lang="en-US" dirty="0">
+                <a:latin typeface="Times New Roman" panose="02020603050405020304" pitchFamily="18" charset="0"/>
+                <a:cs typeface="Times New Roman" panose="02020603050405020304" pitchFamily="18" charset="0"/>
+              </a:rPr>
+              <a:t>It provides automatic date and time tracking for better organization.</a:t>
+            </a:r>
+          </a:p>
+          <a:p>
+            <a:pPr algn="just">
+              <a:lnSpc>
+                <a:spcPct val="150000"/>
+              </a:lnSpc>
+            </a:pPr>
+            <a:r>
+              <a:rPr lang="en-US" dirty="0">
+                <a:latin typeface="Times New Roman" panose="02020603050405020304" pitchFamily="18" charset="0"/>
+                <a:cs typeface="Times New Roman" panose="02020603050405020304" pitchFamily="18" charset="0"/>
+              </a:rPr>
+              <a:t>File attachment support makes documentation more complete.</a:t>
+            </a:r>
+          </a:p>
+          <a:p>
+            <a:pPr algn="just">
+              <a:lnSpc>
+                <a:spcPct val="150000"/>
+              </a:lnSpc>
+            </a:pPr>
+            <a:r>
+              <a:rPr lang="en-US" dirty="0">
+                <a:latin typeface="Times New Roman" panose="02020603050405020304" pitchFamily="18" charset="0"/>
+                <a:cs typeface="Times New Roman" panose="02020603050405020304" pitchFamily="18" charset="0"/>
+              </a:rPr>
+              <a:t>Data is stored securely and can be accessed easily.</a:t>
+            </a:r>
+          </a:p>
+          <a:p>
+            <a:pPr algn="just">
+              <a:lnSpc>
+                <a:spcPct val="150000"/>
+              </a:lnSpc>
+            </a:pPr>
+            <a:r>
+              <a:rPr lang="en-US" dirty="0">
+                <a:latin typeface="Times New Roman" panose="02020603050405020304" pitchFamily="18" charset="0"/>
+                <a:cs typeface="Times New Roman" panose="02020603050405020304" pitchFamily="18" charset="0"/>
+              </a:rPr>
+              <a:t>Overall, it improves efficiency compared to traditional diaries.</a:t>
+            </a:r>
+            <a:endParaRPr lang="en-IN" dirty="0">
+              <a:latin typeface="Times New Roman" panose="02020603050405020304" pitchFamily="18" charset="0"/>
+              <a:cs typeface="Times New Roman" panose="02020603050405020304" pitchFamily="18" charset="0"/>
+            </a:endParaRPr>
+          </a:p>
+        </p:txBody>
+      </p:sp>
+      <p:pic>
+        <p:nvPicPr>
+          <p:cNvPr id="4" name="Picture 3">
+            <a:extLst>
+              <a:ext uri="{FF2B5EF4-FFF2-40B4-BE49-F238E27FC236}">
+                <a16:creationId xmlns:a16="http://schemas.microsoft.com/office/drawing/2014/main" id="{7B9849E3-7F49-6E41-04FA-CC27B9EC4F5C}"/>
+              </a:ext>
+            </a:extLst>
+          </p:cNvPr>
+          <p:cNvPicPr>
+            <a:picLocks noChangeAspect="1"/>
+          </p:cNvPicPr>
+          <p:nvPr/>
+        </p:nvPicPr>
+        <p:blipFill>
+          <a:blip r:embed="rId2"/>
+          <a:stretch>
+            <a:fillRect/>
+          </a:stretch>
+        </p:blipFill>
+        <p:spPr>
+          <a:xfrm>
+            <a:off x="0" y="-8783"/>
+            <a:ext cx="1219354" cy="1081314"/>
+          </a:xfrm>
+          <a:prstGeom prst="rect">
+            <a:avLst/>
+          </a:prstGeom>
+        </p:spPr>
+      </p:pic>
+      <p:pic>
+        <p:nvPicPr>
+          <p:cNvPr id="5" name="Picture 4">
+            <a:extLst>
+              <a:ext uri="{FF2B5EF4-FFF2-40B4-BE49-F238E27FC236}">
+                <a16:creationId xmlns:a16="http://schemas.microsoft.com/office/drawing/2014/main" id="{97BAA0C5-E925-218F-79B2-1DB31DF64322}"/>
+              </a:ext>
+            </a:extLst>
+          </p:cNvPr>
+          <p:cNvPicPr>
+            <a:picLocks noChangeAspect="1"/>
+          </p:cNvPicPr>
+          <p:nvPr/>
+        </p:nvPicPr>
+        <p:blipFill>
+          <a:blip r:embed="rId3"/>
+          <a:stretch>
+            <a:fillRect/>
+          </a:stretch>
+        </p:blipFill>
+        <p:spPr>
+          <a:xfrm>
+            <a:off x="11274046" y="-15129"/>
+            <a:ext cx="917954" cy="1087660"/>
+          </a:xfrm>
+          <a:prstGeom prst="rect">
+            <a:avLst/>
+          </a:prstGeom>
+        </p:spPr>
+      </p:pic>
+    </p:spTree>
+    <p:extLst>
+      <p:ext uri="{BB962C8B-B14F-4D97-AF65-F5344CB8AC3E}">
+        <p14:creationId xmlns:p14="http://schemas.microsoft.com/office/powerpoint/2010/main" val="659824688"/>
+      </p:ext>
+    </p:extLst>
+  </p:cSld>
+  <p:clrMapOvr>
+    <a:masterClrMapping/>
+  </p:clrMapOvr>
+</p:sld>
+</file>
+
+<file path=ppt/slides/slide13.xml><?xml version="1.0" encoding="utf-8"?>
+<p:sld xmlns:a="http://schemas.openxmlformats.org/drawingml/2006/main" xmlns:r="http://schemas.openxmlformats.org/officeDocument/2006/relationships" xmlns:p="http://schemas.openxmlformats.org/presentationml/2006/main">
+  <p:cSld>
+    <p:spTree>
+      <p:nvGrpSpPr>
+        <p:cNvPr id="1" name=""/>
+        <p:cNvGrpSpPr/>
+        <p:nvPr/>
+      </p:nvGrpSpPr>
+      <p:grpSpPr>
+        <a:xfrm>
+          <a:off x="0" y="0"/>
+          <a:ext cx="0" cy="0"/>
+          <a:chOff x="0" y="0"/>
+          <a:chExt cx="0" cy="0"/>
+        </a:xfrm>
+      </p:grpSpPr>
+      <p:sp>
+        <p:nvSpPr>
+          <p:cNvPr id="2" name="Title 1">
+            <a:extLst>
+              <a:ext uri="{FF2B5EF4-FFF2-40B4-BE49-F238E27FC236}">
+                <a16:creationId xmlns:a16="http://schemas.microsoft.com/office/drawing/2014/main" id="{A05BB167-7A9A-0868-95B6-05AF027D03AD}"/>
+              </a:ext>
+            </a:extLst>
+          </p:cNvPr>
+          <p:cNvSpPr>
+            <a:spLocks noGrp="1"/>
+          </p:cNvSpPr>
+          <p:nvPr>
+            <p:ph type="title"/>
+          </p:nvPr>
+        </p:nvSpPr>
+        <p:spPr>
+          <a:xfrm>
+            <a:off x="838200" y="365125"/>
+            <a:ext cx="10515600" cy="407761"/>
+          </a:xfrm>
+        </p:spPr>
+        <p:txBody>
+          <a:bodyPr>
+            <a:normAutofit fontScale="90000"/>
+          </a:bodyPr>
+          <a:lstStyle/>
+          <a:p>
+            <a:pPr algn="ctr"/>
+            <a:r>
+              <a:rPr lang="en-IN" b="1" dirty="0">
+                <a:latin typeface="Times New Roman" panose="02020603050405020304" pitchFamily="18" charset="0"/>
+                <a:cs typeface="Times New Roman" panose="02020603050405020304" pitchFamily="18" charset="0"/>
+              </a:rPr>
+              <a:t>APPLICATIONS</a:t>
+            </a:r>
+          </a:p>
+        </p:txBody>
+      </p:sp>
+      <p:sp>
+        <p:nvSpPr>
+          <p:cNvPr id="3" name="Content Placeholder 2">
+            <a:extLst>
+              <a:ext uri="{FF2B5EF4-FFF2-40B4-BE49-F238E27FC236}">
+                <a16:creationId xmlns:a16="http://schemas.microsoft.com/office/drawing/2014/main" id="{786DADCC-A73A-67CF-688C-B2941830FEFD}"/>
+              </a:ext>
+            </a:extLst>
+          </p:cNvPr>
+          <p:cNvSpPr>
+            <a:spLocks noGrp="1"/>
+          </p:cNvSpPr>
+          <p:nvPr>
+            <p:ph idx="1"/>
+          </p:nvPr>
+        </p:nvSpPr>
+        <p:spPr>
+          <a:xfrm>
+            <a:off x="1219354" y="1785256"/>
+            <a:ext cx="9710272" cy="3559629"/>
+          </a:xfrm>
+        </p:spPr>
+        <p:txBody>
+          <a:bodyPr>
+            <a:normAutofit lnSpcReduction="10000"/>
+          </a:bodyPr>
+          <a:lstStyle/>
+          <a:p>
+            <a:pPr>
+              <a:lnSpc>
+                <a:spcPct val="150000"/>
+              </a:lnSpc>
+            </a:pPr>
+            <a:r>
+              <a:rPr lang="en-US" dirty="0">
+                <a:latin typeface="Times New Roman" panose="02020603050405020304" pitchFamily="18" charset="0"/>
+                <a:cs typeface="Times New Roman" panose="02020603050405020304" pitchFamily="18" charset="0"/>
+              </a:rPr>
+              <a:t>This system can be used as a personal daily journal.</a:t>
+            </a:r>
+          </a:p>
+          <a:p>
+            <a:pPr>
+              <a:lnSpc>
+                <a:spcPct val="150000"/>
+              </a:lnSpc>
+            </a:pPr>
+            <a:r>
+              <a:rPr lang="en-US" dirty="0">
+                <a:latin typeface="Times New Roman" panose="02020603050405020304" pitchFamily="18" charset="0"/>
+                <a:cs typeface="Times New Roman" panose="02020603050405020304" pitchFamily="18" charset="0"/>
+              </a:rPr>
+              <a:t>It can be used by students to record academic activities.</a:t>
+            </a:r>
+          </a:p>
+          <a:p>
+            <a:pPr>
+              <a:lnSpc>
+                <a:spcPct val="150000"/>
+              </a:lnSpc>
+            </a:pPr>
+            <a:r>
+              <a:rPr lang="en-US" dirty="0">
+                <a:latin typeface="Times New Roman" panose="02020603050405020304" pitchFamily="18" charset="0"/>
+                <a:cs typeface="Times New Roman" panose="02020603050405020304" pitchFamily="18" charset="0"/>
+              </a:rPr>
+              <a:t>It is useful in offices for maintaining daily work logs.</a:t>
+            </a:r>
+          </a:p>
+          <a:p>
+            <a:pPr>
+              <a:lnSpc>
+                <a:spcPct val="150000"/>
+              </a:lnSpc>
+            </a:pPr>
+            <a:r>
+              <a:rPr lang="en-US" dirty="0">
+                <a:latin typeface="Times New Roman" panose="02020603050405020304" pitchFamily="18" charset="0"/>
+                <a:cs typeface="Times New Roman" panose="02020603050405020304" pitchFamily="18" charset="0"/>
+              </a:rPr>
+              <a:t>It can also be used for project documentation and record keeping.</a:t>
+            </a:r>
+          </a:p>
+          <a:p>
+            <a:endParaRPr lang="en-IN" dirty="0"/>
+          </a:p>
+        </p:txBody>
+      </p:sp>
+      <p:pic>
+        <p:nvPicPr>
+          <p:cNvPr id="4" name="Picture 3">
+            <a:extLst>
+              <a:ext uri="{FF2B5EF4-FFF2-40B4-BE49-F238E27FC236}">
+                <a16:creationId xmlns:a16="http://schemas.microsoft.com/office/drawing/2014/main" id="{C4E5B6F8-9BD0-91F8-08DA-F21DB7FDF54F}"/>
+              </a:ext>
+            </a:extLst>
+          </p:cNvPr>
+          <p:cNvPicPr>
+            <a:picLocks noChangeAspect="1"/>
+          </p:cNvPicPr>
+          <p:nvPr/>
+        </p:nvPicPr>
+        <p:blipFill>
+          <a:blip r:embed="rId2"/>
+          <a:stretch>
+            <a:fillRect/>
+          </a:stretch>
+        </p:blipFill>
+        <p:spPr>
+          <a:xfrm>
+            <a:off x="0" y="-8783"/>
+            <a:ext cx="1219354" cy="1081314"/>
+          </a:xfrm>
+          <a:prstGeom prst="rect">
+            <a:avLst/>
+          </a:prstGeom>
+        </p:spPr>
+      </p:pic>
+      <p:pic>
+        <p:nvPicPr>
+          <p:cNvPr id="5" name="Picture 4">
+            <a:extLst>
+              <a:ext uri="{FF2B5EF4-FFF2-40B4-BE49-F238E27FC236}">
+                <a16:creationId xmlns:a16="http://schemas.microsoft.com/office/drawing/2014/main" id="{FC16AAEB-2477-E708-AC4E-CE5C90E0D7B9}"/>
+              </a:ext>
+            </a:extLst>
+          </p:cNvPr>
+          <p:cNvPicPr>
+            <a:picLocks noChangeAspect="1"/>
+          </p:cNvPicPr>
+          <p:nvPr/>
+        </p:nvPicPr>
+        <p:blipFill>
+          <a:blip r:embed="rId3"/>
+          <a:stretch>
+            <a:fillRect/>
+          </a:stretch>
+        </p:blipFill>
+        <p:spPr>
+          <a:xfrm>
+            <a:off x="11274046" y="-15129"/>
+            <a:ext cx="917954" cy="1087660"/>
+          </a:xfrm>
+          <a:prstGeom prst="rect">
+            <a:avLst/>
+          </a:prstGeom>
+        </p:spPr>
+      </p:pic>
+    </p:spTree>
+    <p:extLst>
+      <p:ext uri="{BB962C8B-B14F-4D97-AF65-F5344CB8AC3E}">
+        <p14:creationId xmlns:p14="http://schemas.microsoft.com/office/powerpoint/2010/main" val="1071287766"/>
+      </p:ext>
+    </p:extLst>
+  </p:cSld>
+  <p:clrMapOvr>
+    <a:masterClrMapping/>
+  </p:clrMapOvr>
+</p:sld>
+</file>
+
+<file path=ppt/slides/slide14.xml><?xml version="1.0" encoding="utf-8"?>
+<p:sld xmlns:a="http://schemas.openxmlformats.org/drawingml/2006/main" xmlns:r="http://schemas.openxmlformats.org/officeDocument/2006/relationships" xmlns:p="http://schemas.openxmlformats.org/presentationml/2006/main">
+  <p:cSld>
+    <p:spTree>
+      <p:nvGrpSpPr>
+        <p:cNvPr id="1" name=""/>
+        <p:cNvGrpSpPr/>
+        <p:nvPr/>
+      </p:nvGrpSpPr>
+      <p:grpSpPr>
+        <a:xfrm>
+          <a:off x="0" y="0"/>
+          <a:ext cx="0" cy="0"/>
+          <a:chOff x="0" y="0"/>
+          <a:chExt cx="0" cy="0"/>
+        </a:xfrm>
+      </p:grpSpPr>
+      <p:sp>
+        <p:nvSpPr>
+          <p:cNvPr id="2" name="Title 1">
+            <a:extLst>
+              <a:ext uri="{FF2B5EF4-FFF2-40B4-BE49-F238E27FC236}">
+                <a16:creationId xmlns:a16="http://schemas.microsoft.com/office/drawing/2014/main" id="{D2988A09-C47C-3FF3-3C7C-2BE9BAC01E77}"/>
+              </a:ext>
+            </a:extLst>
+          </p:cNvPr>
+          <p:cNvSpPr>
+            <a:spLocks noGrp="1"/>
+          </p:cNvSpPr>
+          <p:nvPr>
+            <p:ph type="title"/>
+          </p:nvPr>
+        </p:nvSpPr>
+        <p:spPr>
+          <a:xfrm>
+            <a:off x="838200" y="-183810"/>
+            <a:ext cx="10515600" cy="1325563"/>
+          </a:xfrm>
+        </p:spPr>
+        <p:txBody>
+          <a:bodyPr/>
+          <a:lstStyle/>
+          <a:p>
+            <a:pPr algn="ctr"/>
+            <a:r>
+              <a:rPr lang="en-IN" b="1" dirty="0">
+                <a:latin typeface="Times New Roman" panose="02020603050405020304" pitchFamily="18" charset="0"/>
+                <a:cs typeface="Times New Roman" panose="02020603050405020304" pitchFamily="18" charset="0"/>
+              </a:rPr>
+              <a:t>FUTURE SCOPE</a:t>
+            </a:r>
+          </a:p>
+        </p:txBody>
+      </p:sp>
+      <p:sp>
+        <p:nvSpPr>
+          <p:cNvPr id="3" name="Content Placeholder 2">
+            <a:extLst>
+              <a:ext uri="{FF2B5EF4-FFF2-40B4-BE49-F238E27FC236}">
+                <a16:creationId xmlns:a16="http://schemas.microsoft.com/office/drawing/2014/main" id="{8C5D3AB6-4085-1ACA-58D1-ABDC7B00011B}"/>
+              </a:ext>
+            </a:extLst>
+          </p:cNvPr>
+          <p:cNvSpPr>
+            <a:spLocks noGrp="1"/>
+          </p:cNvSpPr>
+          <p:nvPr>
+            <p:ph idx="1"/>
+          </p:nvPr>
+        </p:nvSpPr>
+        <p:spPr>
+          <a:xfrm>
+            <a:off x="183990" y="1542596"/>
+            <a:ext cx="11256896" cy="4836432"/>
+          </a:xfrm>
+        </p:spPr>
+        <p:txBody>
+          <a:bodyPr>
+            <a:normAutofit/>
+          </a:bodyPr>
+          <a:lstStyle/>
+          <a:p>
+            <a:pPr algn="just">
+              <a:lnSpc>
+                <a:spcPct val="150000"/>
+              </a:lnSpc>
+            </a:pPr>
+            <a:r>
+              <a:rPr lang="en-US" sz="2400" dirty="0">
+                <a:latin typeface="Times New Roman" panose="02020603050405020304" pitchFamily="18" charset="0"/>
+                <a:cs typeface="Times New Roman" panose="02020603050405020304" pitchFamily="18" charset="0"/>
+              </a:rPr>
+              <a:t>In the future, the system can be enhanced by adding user login authentication.</a:t>
+            </a:r>
+          </a:p>
+          <a:p>
+            <a:pPr algn="just">
+              <a:lnSpc>
+                <a:spcPct val="150000"/>
+              </a:lnSpc>
+            </a:pPr>
+            <a:r>
+              <a:rPr lang="en-US" sz="2400" dirty="0">
+                <a:latin typeface="Times New Roman" panose="02020603050405020304" pitchFamily="18" charset="0"/>
+                <a:cs typeface="Times New Roman" panose="02020603050405020304" pitchFamily="18" charset="0"/>
+              </a:rPr>
+              <a:t>Cloud storage integration can be implemented for remote access.</a:t>
+            </a:r>
+          </a:p>
+          <a:p>
+            <a:pPr algn="just">
+              <a:lnSpc>
+                <a:spcPct val="150000"/>
+              </a:lnSpc>
+            </a:pPr>
+            <a:r>
+              <a:rPr lang="en-US" sz="2400" dirty="0">
+                <a:latin typeface="Times New Roman" panose="02020603050405020304" pitchFamily="18" charset="0"/>
+                <a:cs typeface="Times New Roman" panose="02020603050405020304" pitchFamily="18" charset="0"/>
+              </a:rPr>
+              <a:t>Search and filter options can be added for easy retrieval.</a:t>
+            </a:r>
+          </a:p>
+          <a:p>
+            <a:pPr algn="just">
+              <a:lnSpc>
+                <a:spcPct val="150000"/>
+              </a:lnSpc>
+            </a:pPr>
+            <a:r>
+              <a:rPr lang="en-US" sz="2400" dirty="0">
+                <a:latin typeface="Times New Roman" panose="02020603050405020304" pitchFamily="18" charset="0"/>
+                <a:cs typeface="Times New Roman" panose="02020603050405020304" pitchFamily="18" charset="0"/>
+              </a:rPr>
+              <a:t>A mobile application version can also be developed.</a:t>
+            </a:r>
+          </a:p>
+          <a:p>
+            <a:pPr algn="just">
+              <a:lnSpc>
+                <a:spcPct val="150000"/>
+              </a:lnSpc>
+            </a:pPr>
+            <a:r>
+              <a:rPr lang="en-US" sz="2400" dirty="0">
+                <a:latin typeface="Times New Roman" panose="02020603050405020304" pitchFamily="18" charset="0"/>
+                <a:cs typeface="Times New Roman" panose="02020603050405020304" pitchFamily="18" charset="0"/>
+              </a:rPr>
+              <a:t>Advanced features like reminders and AI-based analysis can be introduced</a:t>
+            </a:r>
+            <a:r>
+              <a:rPr lang="en-US" sz="2000" dirty="0">
+                <a:latin typeface="Times New Roman" panose="02020603050405020304" pitchFamily="18" charset="0"/>
+                <a:cs typeface="Times New Roman" panose="02020603050405020304" pitchFamily="18" charset="0"/>
+              </a:rPr>
+              <a:t>.</a:t>
+            </a:r>
+            <a:endParaRPr lang="en-IN" sz="2000" b="1" dirty="0">
+              <a:latin typeface="Times New Roman" panose="02020603050405020304" pitchFamily="18" charset="0"/>
+              <a:cs typeface="Times New Roman" panose="02020603050405020304" pitchFamily="18" charset="0"/>
+            </a:endParaRPr>
+          </a:p>
+        </p:txBody>
+      </p:sp>
+      <p:pic>
+        <p:nvPicPr>
+          <p:cNvPr id="4" name="Picture 3">
+            <a:extLst>
+              <a:ext uri="{FF2B5EF4-FFF2-40B4-BE49-F238E27FC236}">
+                <a16:creationId xmlns:a16="http://schemas.microsoft.com/office/drawing/2014/main" id="{AB88422F-3D96-AF7B-7DF3-6965BA784C26}"/>
+              </a:ext>
+            </a:extLst>
+          </p:cNvPr>
+          <p:cNvPicPr>
+            <a:picLocks noChangeAspect="1"/>
+          </p:cNvPicPr>
+          <p:nvPr/>
+        </p:nvPicPr>
+        <p:blipFill>
+          <a:blip r:embed="rId2"/>
+          <a:stretch>
+            <a:fillRect/>
+          </a:stretch>
+        </p:blipFill>
+        <p:spPr>
+          <a:xfrm>
+            <a:off x="0" y="-8783"/>
+            <a:ext cx="1219354" cy="1081314"/>
+          </a:xfrm>
+          <a:prstGeom prst="rect">
+            <a:avLst/>
+          </a:prstGeom>
+        </p:spPr>
+      </p:pic>
+      <p:pic>
+        <p:nvPicPr>
+          <p:cNvPr id="5" name="Picture 4">
+            <a:extLst>
+              <a:ext uri="{FF2B5EF4-FFF2-40B4-BE49-F238E27FC236}">
+                <a16:creationId xmlns:a16="http://schemas.microsoft.com/office/drawing/2014/main" id="{FE381739-A951-51FB-E9D4-F289278978B8}"/>
+              </a:ext>
+            </a:extLst>
+          </p:cNvPr>
+          <p:cNvPicPr>
+            <a:picLocks noChangeAspect="1"/>
+          </p:cNvPicPr>
+          <p:nvPr/>
+        </p:nvPicPr>
+        <p:blipFill>
+          <a:blip r:embed="rId3"/>
+          <a:stretch>
+            <a:fillRect/>
+          </a:stretch>
+        </p:blipFill>
+        <p:spPr>
+          <a:xfrm>
+            <a:off x="11274046" y="-15129"/>
+            <a:ext cx="917954" cy="1087660"/>
+          </a:xfrm>
+          <a:prstGeom prst="rect">
+            <a:avLst/>
+          </a:prstGeom>
+        </p:spPr>
+      </p:pic>
+    </p:spTree>
+    <p:extLst>
+      <p:ext uri="{BB962C8B-B14F-4D97-AF65-F5344CB8AC3E}">
+        <p14:creationId xmlns:p14="http://schemas.microsoft.com/office/powerpoint/2010/main" val="1918262855"/>
+      </p:ext>
+    </p:extLst>
+  </p:cSld>
+  <p:clrMapOvr>
+    <a:masterClrMapping/>
+  </p:clrMapOvr>
+</p:sld>
+</file>
+
+<file path=ppt/slides/slide15.xml><?xml version="1.0" encoding="utf-8"?>
+<p:sld xmlns:a="http://schemas.openxmlformats.org/drawingml/2006/main" xmlns:r="http://schemas.openxmlformats.org/officeDocument/2006/relationships" xmlns:p="http://schemas.openxmlformats.org/presentationml/2006/main">
+  <p:cSld>
+    <p:spTree>
+      <p:nvGrpSpPr>
+        <p:cNvPr id="1" name=""/>
+        <p:cNvGrpSpPr/>
+        <p:nvPr/>
+      </p:nvGrpSpPr>
+      <p:grpSpPr>
+        <a:xfrm>
+          <a:off x="0" y="0"/>
+          <a:ext cx="0" cy="0"/>
+          <a:chOff x="0" y="0"/>
+          <a:chExt cx="0" cy="0"/>
+        </a:xfrm>
+      </p:grpSpPr>
+      <p:sp>
+        <p:nvSpPr>
+          <p:cNvPr id="2" name="Title 1">
+            <a:extLst>
+              <a:ext uri="{FF2B5EF4-FFF2-40B4-BE49-F238E27FC236}">
+                <a16:creationId xmlns:a16="http://schemas.microsoft.com/office/drawing/2014/main" id="{725AB784-2D3E-7A4A-9659-02E7F8EBB3F1}"/>
+              </a:ext>
+            </a:extLst>
+          </p:cNvPr>
+          <p:cNvSpPr>
+            <a:spLocks noGrp="1"/>
+          </p:cNvSpPr>
+          <p:nvPr>
+            <p:ph type="title"/>
+          </p:nvPr>
+        </p:nvSpPr>
+        <p:spPr>
+          <a:xfrm>
+            <a:off x="838200" y="365126"/>
+            <a:ext cx="10515600" cy="832304"/>
+          </a:xfrm>
+        </p:spPr>
+        <p:txBody>
+          <a:bodyPr/>
+          <a:lstStyle/>
+          <a:p>
+            <a:pPr algn="ctr"/>
+            <a:r>
+              <a:rPr lang="en-IN" b="1" dirty="0">
+                <a:latin typeface="Times New Roman" panose="02020603050405020304" pitchFamily="18" charset="0"/>
+                <a:cs typeface="Times New Roman" panose="02020603050405020304" pitchFamily="18" charset="0"/>
+              </a:rPr>
+              <a:t>CONCLUSION</a:t>
+            </a:r>
+          </a:p>
+        </p:txBody>
+      </p:sp>
+      <p:sp>
+        <p:nvSpPr>
+          <p:cNvPr id="3" name="Content Placeholder 2">
+            <a:extLst>
+              <a:ext uri="{FF2B5EF4-FFF2-40B4-BE49-F238E27FC236}">
+                <a16:creationId xmlns:a16="http://schemas.microsoft.com/office/drawing/2014/main" id="{124F1B1C-20C3-023F-CD83-6467FFAA8EA0}"/>
+              </a:ext>
+            </a:extLst>
+          </p:cNvPr>
+          <p:cNvSpPr>
+            <a:spLocks noGrp="1"/>
+          </p:cNvSpPr>
+          <p:nvPr>
+            <p:ph idx="1"/>
+          </p:nvPr>
+        </p:nvSpPr>
+        <p:spPr>
+          <a:xfrm>
+            <a:off x="399212" y="1839686"/>
+            <a:ext cx="10954587" cy="4376057"/>
+          </a:xfrm>
+        </p:spPr>
+        <p:txBody>
+          <a:bodyPr>
+            <a:normAutofit fontScale="62500" lnSpcReduction="20000"/>
+          </a:bodyPr>
+          <a:lstStyle/>
+          <a:p>
+            <a:pPr>
+              <a:lnSpc>
+                <a:spcPct val="150000"/>
+              </a:lnSpc>
+            </a:pPr>
+            <a:r>
+              <a:rPr lang="en-US" sz="4500" dirty="0">
+                <a:latin typeface="Times New Roman" panose="02020603050405020304" pitchFamily="18" charset="0"/>
+                <a:cs typeface="Times New Roman" panose="02020603050405020304" pitchFamily="18" charset="0"/>
+              </a:rPr>
+              <a:t>The Daily Digital Diary with Date-Time and File Input is a simple yet effective digital record management system.</a:t>
+            </a:r>
+          </a:p>
+          <a:p>
+            <a:pPr>
+              <a:lnSpc>
+                <a:spcPct val="150000"/>
+              </a:lnSpc>
+            </a:pPr>
+            <a:r>
+              <a:rPr lang="en-US" sz="4500" dirty="0">
+                <a:latin typeface="Times New Roman" panose="02020603050405020304" pitchFamily="18" charset="0"/>
+                <a:cs typeface="Times New Roman" panose="02020603050405020304" pitchFamily="18" charset="0"/>
+              </a:rPr>
+              <a:t>It ensures easy entry capture, automatic timestamp storage, and secure file management.</a:t>
+            </a:r>
+          </a:p>
+          <a:p>
+            <a:pPr>
+              <a:lnSpc>
+                <a:spcPct val="150000"/>
+              </a:lnSpc>
+            </a:pPr>
+            <a:r>
+              <a:rPr lang="en-US" sz="4500" dirty="0">
+                <a:latin typeface="Times New Roman" panose="02020603050405020304" pitchFamily="18" charset="0"/>
+                <a:cs typeface="Times New Roman" panose="02020603050405020304" pitchFamily="18" charset="0"/>
+              </a:rPr>
+              <a:t>The system improves organization, accessibility, and efficiency.</a:t>
+            </a:r>
+            <a:br>
+              <a:rPr lang="en-US" sz="4500" dirty="0">
+                <a:latin typeface="Times New Roman" panose="02020603050405020304" pitchFamily="18" charset="0"/>
+                <a:cs typeface="Times New Roman" panose="02020603050405020304" pitchFamily="18" charset="0"/>
+              </a:rPr>
+            </a:br>
+            <a:r>
+              <a:rPr lang="en-US" sz="4500" dirty="0">
+                <a:latin typeface="Times New Roman" panose="02020603050405020304" pitchFamily="18" charset="0"/>
+                <a:cs typeface="Times New Roman" panose="02020603050405020304" pitchFamily="18" charset="0"/>
+              </a:rPr>
+              <a:t>With further enhancements, it can be developed into a complete smart diary application.</a:t>
+            </a:r>
+          </a:p>
+          <a:p>
+            <a:endParaRPr lang="en-IN" dirty="0"/>
+          </a:p>
+        </p:txBody>
+      </p:sp>
+      <p:pic>
+        <p:nvPicPr>
+          <p:cNvPr id="4" name="Picture 3">
+            <a:extLst>
+              <a:ext uri="{FF2B5EF4-FFF2-40B4-BE49-F238E27FC236}">
+                <a16:creationId xmlns:a16="http://schemas.microsoft.com/office/drawing/2014/main" id="{D6020478-388A-9FB6-2F7A-33658341F155}"/>
+              </a:ext>
+            </a:extLst>
+          </p:cNvPr>
+          <p:cNvPicPr>
+            <a:picLocks noChangeAspect="1"/>
+          </p:cNvPicPr>
+          <p:nvPr/>
+        </p:nvPicPr>
+        <p:blipFill>
+          <a:blip r:embed="rId2"/>
+          <a:stretch>
+            <a:fillRect/>
+          </a:stretch>
+        </p:blipFill>
+        <p:spPr>
+          <a:xfrm>
+            <a:off x="0" y="-21483"/>
+            <a:ext cx="1219354" cy="1081314"/>
+          </a:xfrm>
+          <a:prstGeom prst="rect">
+            <a:avLst/>
+          </a:prstGeom>
+        </p:spPr>
+      </p:pic>
+      <p:pic>
+        <p:nvPicPr>
+          <p:cNvPr id="5" name="Picture 4">
+            <a:extLst>
+              <a:ext uri="{FF2B5EF4-FFF2-40B4-BE49-F238E27FC236}">
+                <a16:creationId xmlns:a16="http://schemas.microsoft.com/office/drawing/2014/main" id="{5B20B464-6DB5-1DB0-5873-5BC06BE658EC}"/>
+              </a:ext>
+            </a:extLst>
+          </p:cNvPr>
+          <p:cNvPicPr>
+            <a:picLocks noChangeAspect="1"/>
+          </p:cNvPicPr>
+          <p:nvPr/>
+        </p:nvPicPr>
+        <p:blipFill>
+          <a:blip r:embed="rId3"/>
+          <a:stretch>
+            <a:fillRect/>
+          </a:stretch>
+        </p:blipFill>
+        <p:spPr>
+          <a:xfrm>
+            <a:off x="11274046" y="-15129"/>
+            <a:ext cx="917954" cy="1087660"/>
+          </a:xfrm>
+          <a:prstGeom prst="rect">
+            <a:avLst/>
+          </a:prstGeom>
+        </p:spPr>
+      </p:pic>
+    </p:spTree>
+    <p:extLst>
+      <p:ext uri="{BB962C8B-B14F-4D97-AF65-F5344CB8AC3E}">
+        <p14:creationId xmlns:p14="http://schemas.microsoft.com/office/powerpoint/2010/main" val="4195444650"/>
+      </p:ext>
+    </p:extLst>
+  </p:cSld>
+  <p:clrMapOvr>
+    <a:masterClrMapping/>
+  </p:clrMapOvr>
+</p:sld>
+</file>
+
+<file path=ppt/slides/slide16.xml><?xml version="1.0" encoding="utf-8"?>
+<p:sld xmlns:a="http://schemas.openxmlformats.org/drawingml/2006/main" xmlns:r="http://schemas.openxmlformats.org/officeDocument/2006/relationships" xmlns:p="http://schemas.openxmlformats.org/presentationml/2006/main">
+  <p:cSld>
+    <p:spTree>
+      <p:nvGrpSpPr>
+        <p:cNvPr id="1" name=""/>
+        <p:cNvGrpSpPr/>
+        <p:nvPr/>
+      </p:nvGrpSpPr>
+      <p:grpSpPr>
+        <a:xfrm>
+          <a:off x="0" y="0"/>
+          <a:ext cx="0" cy="0"/>
+          <a:chOff x="0" y="0"/>
+          <a:chExt cx="0" cy="0"/>
+        </a:xfrm>
+      </p:grpSpPr>
+      <p:sp>
+        <p:nvSpPr>
+          <p:cNvPr id="2" name="Title 1">
+            <a:extLst>
+              <a:ext uri="{FF2B5EF4-FFF2-40B4-BE49-F238E27FC236}">
+                <a16:creationId xmlns:a16="http://schemas.microsoft.com/office/drawing/2014/main" id="{9FE30869-7AB1-64A0-582A-55B6B2FD6F33}"/>
+              </a:ext>
+            </a:extLst>
+          </p:cNvPr>
+          <p:cNvSpPr>
+            <a:spLocks noGrp="1"/>
+          </p:cNvSpPr>
+          <p:nvPr>
+            <p:ph type="title"/>
+          </p:nvPr>
+        </p:nvSpPr>
+        <p:spPr/>
+        <p:txBody>
+          <a:bodyPr/>
+          <a:lstStyle/>
+          <a:p>
+            <a:pPr algn="ctr"/>
+            <a:r>
+              <a:rPr lang="en-IN" b="1" dirty="0">
+                <a:latin typeface="Times New Roman" panose="02020603050405020304" pitchFamily="18" charset="0"/>
+                <a:cs typeface="Times New Roman" panose="02020603050405020304" pitchFamily="18" charset="0"/>
+              </a:rPr>
+              <a:t>REFERENCES</a:t>
+            </a:r>
+          </a:p>
+        </p:txBody>
+      </p:sp>
+      <p:sp>
+        <p:nvSpPr>
+          <p:cNvPr id="3" name="Content Placeholder 2">
+            <a:extLst>
+              <a:ext uri="{FF2B5EF4-FFF2-40B4-BE49-F238E27FC236}">
+                <a16:creationId xmlns:a16="http://schemas.microsoft.com/office/drawing/2014/main" id="{115131C0-37D7-F234-1D72-C5102EE5DF36}"/>
+              </a:ext>
+            </a:extLst>
+          </p:cNvPr>
+          <p:cNvSpPr>
+            <a:spLocks noGrp="1"/>
+          </p:cNvSpPr>
+          <p:nvPr>
+            <p:ph idx="1"/>
+          </p:nvPr>
+        </p:nvSpPr>
+        <p:spPr/>
+        <p:txBody>
+          <a:bodyPr>
+            <a:normAutofit fontScale="77500" lnSpcReduction="20000"/>
+          </a:bodyPr>
+          <a:lstStyle/>
+          <a:p>
+            <a:r>
+              <a:rPr lang="en-IN" dirty="0">
+                <a:latin typeface="Times New Roman" panose="02020603050405020304" pitchFamily="18" charset="0"/>
+                <a:cs typeface="Times New Roman" panose="02020603050405020304" pitchFamily="18" charset="0"/>
+              </a:rPr>
+              <a:t>Shaffer, K.M., Daniel, K.E., Frederick, C., Buysse, D.J., Morin, C.M. and Ritterband, L.M., 2023. Online sleep diaries: considerations for system development and recommendations for data management. Sleep, 46(10), p.zsad199.</a:t>
+            </a:r>
+          </a:p>
+          <a:p>
+            <a:r>
+              <a:rPr lang="en-IN" dirty="0">
+                <a:latin typeface="Times New Roman" panose="02020603050405020304" pitchFamily="18" charset="0"/>
+                <a:cs typeface="Times New Roman" panose="02020603050405020304" pitchFamily="18" charset="0"/>
+              </a:rPr>
+              <a:t> Basir, Md Samiul, Dennis Buckmaster, Ankita </a:t>
+            </a:r>
+            <a:r>
+              <a:rPr lang="en-IN" dirty="0" err="1">
+                <a:latin typeface="Times New Roman" panose="02020603050405020304" pitchFamily="18" charset="0"/>
+                <a:cs typeface="Times New Roman" panose="02020603050405020304" pitchFamily="18" charset="0"/>
+              </a:rPr>
+              <a:t>Raturi</a:t>
+            </a:r>
+            <a:r>
+              <a:rPr lang="en-IN" dirty="0">
+                <a:latin typeface="Times New Roman" panose="02020603050405020304" pitchFamily="18" charset="0"/>
+                <a:cs typeface="Times New Roman" panose="02020603050405020304" pitchFamily="18" charset="0"/>
+              </a:rPr>
+              <a:t>, and </a:t>
+            </a:r>
+            <a:r>
+              <a:rPr lang="en-IN" dirty="0" err="1">
+                <a:latin typeface="Times New Roman" panose="02020603050405020304" pitchFamily="18" charset="0"/>
+                <a:cs typeface="Times New Roman" panose="02020603050405020304" pitchFamily="18" charset="0"/>
+              </a:rPr>
+              <a:t>Yaguang</a:t>
+            </a:r>
+            <a:r>
+              <a:rPr lang="en-IN" dirty="0">
+                <a:latin typeface="Times New Roman" panose="02020603050405020304" pitchFamily="18" charset="0"/>
+                <a:cs typeface="Times New Roman" panose="02020603050405020304" pitchFamily="18" charset="0"/>
+              </a:rPr>
+              <a:t> Zhang. "From pen and paper to digital precision: a comprehensive review of on-farm recordkeeping." Precision Agriculture 25, no. 5 (2024): 2643-2682. </a:t>
+            </a:r>
+          </a:p>
+          <a:p>
+            <a:r>
+              <a:rPr lang="en-IN" dirty="0">
+                <a:latin typeface="Times New Roman" panose="02020603050405020304" pitchFamily="18" charset="0"/>
+                <a:cs typeface="Times New Roman" panose="02020603050405020304" pitchFamily="18" charset="0"/>
+              </a:rPr>
+              <a:t>Tiwari, Shrey, Serena Chen, Alexander </a:t>
+            </a:r>
+            <a:r>
+              <a:rPr lang="en-IN" dirty="0" err="1">
+                <a:latin typeface="Times New Roman" panose="02020603050405020304" pitchFamily="18" charset="0"/>
+                <a:cs typeface="Times New Roman" panose="02020603050405020304" pitchFamily="18" charset="0"/>
+              </a:rPr>
+              <a:t>Joukov</a:t>
+            </a:r>
+            <a:r>
+              <a:rPr lang="en-IN" dirty="0">
+                <a:latin typeface="Times New Roman" panose="02020603050405020304" pitchFamily="18" charset="0"/>
+                <a:cs typeface="Times New Roman" panose="02020603050405020304" pitchFamily="18" charset="0"/>
+              </a:rPr>
+              <a:t>, Peter Vandervelde, Ao Li, and Rohan Padhye. "It’s about time: An empirical study of date and time bugs in open-source Python software." In 2025 IEEE/ACM 22nd International Conference on Mining Software Repositories (MSR), pp. 39-51. IEEE, 2025.</a:t>
+            </a:r>
+          </a:p>
+          <a:p>
+            <a:r>
+              <a:rPr lang="en-IN" dirty="0">
+                <a:latin typeface="Times New Roman" panose="02020603050405020304" pitchFamily="18" charset="0"/>
+                <a:cs typeface="Times New Roman" panose="02020603050405020304" pitchFamily="18" charset="0"/>
+              </a:rPr>
+              <a:t> Kamo et al. (2024) developed a wearable-based 24-hour digital diary to monitor physiological and activity data in Parkinson’s patients, showing how digital diaries can reliably collect continuous time-indexed information. </a:t>
+            </a:r>
+          </a:p>
+          <a:p>
+            <a:r>
+              <a:rPr lang="en-IN" dirty="0">
+                <a:latin typeface="Times New Roman" panose="02020603050405020304" pitchFamily="18" charset="0"/>
+                <a:cs typeface="Times New Roman" panose="02020603050405020304" pitchFamily="18" charset="0"/>
+              </a:rPr>
+              <a:t>Alcaire et al. (2024) examined how digital diary apps capture user experiences, focusing on app-based diary collection and the qualitative richness of digital entries.</a:t>
+            </a:r>
+          </a:p>
+        </p:txBody>
+      </p:sp>
+      <p:pic>
+        <p:nvPicPr>
+          <p:cNvPr id="4" name="Picture 3">
+            <a:extLst>
+              <a:ext uri="{FF2B5EF4-FFF2-40B4-BE49-F238E27FC236}">
+                <a16:creationId xmlns:a16="http://schemas.microsoft.com/office/drawing/2014/main" id="{A4685FC4-39F6-D398-FE79-6A57AB83B31D}"/>
+              </a:ext>
+            </a:extLst>
+          </p:cNvPr>
+          <p:cNvPicPr>
+            <a:picLocks noChangeAspect="1"/>
+          </p:cNvPicPr>
+          <p:nvPr/>
+        </p:nvPicPr>
+        <p:blipFill>
+          <a:blip r:embed="rId2"/>
+          <a:stretch>
+            <a:fillRect/>
+          </a:stretch>
+        </p:blipFill>
+        <p:spPr>
+          <a:xfrm>
+            <a:off x="0" y="-21483"/>
+            <a:ext cx="1219354" cy="1081314"/>
+          </a:xfrm>
+          <a:prstGeom prst="rect">
+            <a:avLst/>
+          </a:prstGeom>
+        </p:spPr>
+      </p:pic>
+      <p:pic>
+        <p:nvPicPr>
+          <p:cNvPr id="5" name="Picture 4">
+            <a:extLst>
+              <a:ext uri="{FF2B5EF4-FFF2-40B4-BE49-F238E27FC236}">
+                <a16:creationId xmlns:a16="http://schemas.microsoft.com/office/drawing/2014/main" id="{595ACD8B-5E6E-087E-91DD-F649389B6510}"/>
+              </a:ext>
+            </a:extLst>
+          </p:cNvPr>
+          <p:cNvPicPr>
+            <a:picLocks noChangeAspect="1"/>
+          </p:cNvPicPr>
+          <p:nvPr/>
+        </p:nvPicPr>
+        <p:blipFill>
+          <a:blip r:embed="rId3"/>
+          <a:stretch>
+            <a:fillRect/>
+          </a:stretch>
+        </p:blipFill>
+        <p:spPr>
+          <a:xfrm>
+            <a:off x="11274046" y="-15129"/>
+            <a:ext cx="917954" cy="1087660"/>
+          </a:xfrm>
+          <a:prstGeom prst="rect">
+            <a:avLst/>
+          </a:prstGeom>
+        </p:spPr>
+      </p:pic>
+    </p:spTree>
+    <p:extLst>
+      <p:ext uri="{BB962C8B-B14F-4D97-AF65-F5344CB8AC3E}">
+        <p14:creationId xmlns:p14="http://schemas.microsoft.com/office/powerpoint/2010/main" val="2665715278"/>
+      </p:ext>
+    </p:extLst>
+  </p:cSld>
+  <p:clrMapOvr>
+    <a:masterClrMapping/>
+  </p:clrMapOvr>
+</p:sld>
+</file>
+
+<file path=ppt/slides/slide17.xml><?xml version="1.0" encoding="utf-8"?>
+<p:sld xmlns:a="http://schemas.openxmlformats.org/drawingml/2006/main" xmlns:r="http://schemas.openxmlformats.org/officeDocument/2006/relationships" xmlns:p="http://schemas.openxmlformats.org/presentationml/2006/main">
+  <p:cSld>
+    <p:spTree>
+      <p:nvGrpSpPr>
+        <p:cNvPr id="1" name=""/>
+        <p:cNvGrpSpPr/>
+        <p:nvPr/>
+      </p:nvGrpSpPr>
+      <p:grpSpPr>
+        <a:xfrm>
+          <a:off x="0" y="0"/>
+          <a:ext cx="0" cy="0"/>
+          <a:chOff x="0" y="0"/>
+          <a:chExt cx="0" cy="0"/>
+        </a:xfrm>
+      </p:grpSpPr>
+      <p:pic>
+        <p:nvPicPr>
+          <p:cNvPr id="2" name="Picture 1">
+            <a:extLst>
+              <a:ext uri="{FF2B5EF4-FFF2-40B4-BE49-F238E27FC236}">
+                <a16:creationId xmlns:a16="http://schemas.microsoft.com/office/drawing/2014/main" id="{917891B9-53E6-D93E-FE8D-009BFFD5D90E}"/>
+              </a:ext>
+            </a:extLst>
+          </p:cNvPr>
+          <p:cNvPicPr>
+            <a:picLocks noChangeAspect="1"/>
+          </p:cNvPicPr>
+          <p:nvPr/>
+        </p:nvPicPr>
+        <p:blipFill>
+          <a:blip r:embed="rId2">
+            <a:extLst>
+              <a:ext uri="{28A0092B-C50C-407E-A947-70E740481C1C}">
+                <a14:useLocalDpi xmlns:a14="http://schemas.microsoft.com/office/drawing/2010/main" val="0"/>
+              </a:ext>
+            </a:extLst>
+          </a:blip>
+          <a:stretch>
+            <a:fillRect/>
+          </a:stretch>
+        </p:blipFill>
+        <p:spPr>
+          <a:xfrm>
+            <a:off x="2801185" y="711070"/>
+            <a:ext cx="7355301" cy="5057459"/>
+          </a:xfrm>
+          <a:prstGeom prst="rect">
+            <a:avLst/>
+          </a:prstGeom>
+        </p:spPr>
+      </p:pic>
+    </p:spTree>
+    <p:extLst>
+      <p:ext uri="{BB962C8B-B14F-4D97-AF65-F5344CB8AC3E}">
+        <p14:creationId xmlns:p14="http://schemas.microsoft.com/office/powerpoint/2010/main" val="2750597893"/>
+      </p:ext>
+    </p:extLst>
+  </p:cSld>
+  <p:clrMapOvr>
+    <a:masterClrMapping/>
+  </p:clrMapOvr>
+</p:sld>
+</file>
+
+<file path=ppt/slides/slide2.xml><?xml version="1.0" encoding="utf-8"?>
+<p:sld xmlns:a="http://schemas.openxmlformats.org/drawingml/2006/main" xmlns:r="http://schemas.openxmlformats.org/officeDocument/2006/relationships" xmlns:p="http://schemas.openxmlformats.org/presentationml/2006/main">
+  <p:cSld>
+    <p:spTree>
+      <p:nvGrpSpPr>
+        <p:cNvPr id="1" name=""/>
+        <p:cNvGrpSpPr/>
+        <p:nvPr/>
+      </p:nvGrpSpPr>
+      <p:grpSpPr>
+        <a:xfrm>
+          <a:off x="0" y="0"/>
+          <a:ext cx="0" cy="0"/>
+          <a:chOff x="0" y="0"/>
+          <a:chExt cx="0" cy="0"/>
+        </a:xfrm>
+      </p:grpSpPr>
+      <p:sp>
+        <p:nvSpPr>
+          <p:cNvPr id="2" name="Title 1">
+            <a:extLst>
+              <a:ext uri="{FF2B5EF4-FFF2-40B4-BE49-F238E27FC236}">
+                <a16:creationId xmlns:a16="http://schemas.microsoft.com/office/drawing/2014/main" id="{E44D1ABD-264E-0167-967B-652AA10684E0}"/>
+              </a:ext>
+            </a:extLst>
+          </p:cNvPr>
+          <p:cNvSpPr>
+            <a:spLocks noGrp="1"/>
+          </p:cNvSpPr>
+          <p:nvPr>
+            <p:ph type="title"/>
+          </p:nvPr>
+        </p:nvSpPr>
+        <p:spPr/>
+        <p:txBody>
+          <a:bodyPr/>
+          <a:lstStyle/>
+          <a:p>
+            <a:pPr algn="ctr"/>
+            <a:r>
+              <a:rPr lang="en-IN" b="1">
+                <a:latin typeface="Times New Roman" panose="02020603050405020304" pitchFamily="18" charset="0"/>
+                <a:cs typeface="Times New Roman" panose="02020603050405020304" pitchFamily="18" charset="0"/>
+              </a:rPr>
+              <a:t>AGENDA</a:t>
+            </a:r>
+            <a:endParaRPr lang="en-IN" b="1" dirty="0">
+              <a:latin typeface="Times New Roman" panose="02020603050405020304" pitchFamily="18" charset="0"/>
+              <a:cs typeface="Times New Roman" panose="02020603050405020304" pitchFamily="18" charset="0"/>
+            </a:endParaRPr>
           </a:p>
         </p:txBody>
       </p:sp>
@@ -5514,7 +5418,7 @@
           <p:cNvPr id="4" name="Rectangle 1">
             <a:extLst>
               <a:ext uri="{FF2B5EF4-FFF2-40B4-BE49-F238E27FC236}">
-                <a16:creationId xmlns:a16="http://schemas.microsoft.com/office/drawing/2014/main" id="{B22A8145-D998-1654-CD47-E7DFFDD3F10B}"/>
+                <a16:creationId xmlns:a16="http://schemas.microsoft.com/office/drawing/2014/main" id="{B2BF9E21-33FC-7575-81D8-655BE89669CA}"/>
               </a:ext>
             </a:extLst>
           </p:cNvPr>
@@ -5527,8 +5431,8 @@
         </p:nvSpPr>
         <p:spPr bwMode="auto">
           <a:xfrm>
-            <a:off x="304800" y="1324858"/>
-            <a:ext cx="11734800" cy="5185522"/>
+            <a:off x="838200" y="1800692"/>
+            <a:ext cx="2908168" cy="4401205"/>
           </a:xfrm>
           <a:prstGeom prst="rect">
             <a:avLst/>
@@ -5568,7 +5472,7 @@
           </a:extLst>
         </p:spPr>
         <p:txBody>
-          <a:bodyPr vert="horz" wrap="square" lIns="91440" tIns="45720" rIns="91440" bIns="45720" numCol="1" anchor="ctr" anchorCtr="0" compatLnSpc="1">
+          <a:bodyPr vert="horz" wrap="none" lIns="91440" tIns="45720" rIns="91440" bIns="45720" numCol="1" anchor="ctr" anchorCtr="0" compatLnSpc="1">
             <a:prstTxWarp prst="textNoShape">
               <a:avLst/>
             </a:prstTxWarp>
@@ -5576,9 +5480,9 @@
           </a:bodyPr>
           <a:lstStyle/>
           <a:p>
-            <a:pPr marL="0" lvl="0" indent="0" eaLnBrk="0" fontAlgn="base" hangingPunct="0">
+            <a:pPr marL="0" marR="0" lvl="0" indent="0" algn="l" defTabSz="914400" rtl="0" eaLnBrk="0" fontAlgn="base" latinLnBrk="0" hangingPunct="0">
               <a:lnSpc>
-                <a:spcPct val="150000"/>
+                <a:spcPct val="100000"/>
               </a:lnSpc>
               <a:spcBef>
                 <a:spcPct val="0"/>
@@ -5586,105 +5490,20 @@
               <a:spcAft>
                 <a:spcPct val="0"/>
               </a:spcAft>
+              <a:buClrTx/>
+              <a:buSzTx/>
               <a:buFontTx/>
               <a:buChar char="•"/>
+              <a:tabLst/>
             </a:pPr>
             <a:r>
-              <a:rPr lang="en-US" dirty="0">
-                <a:latin typeface="Times New Roman" panose="02020603050405020304" pitchFamily="18" charset="0"/>
-                <a:cs typeface="Times New Roman" panose="02020603050405020304" pitchFamily="18" charset="0"/>
-              </a:rPr>
-              <a:t>The main objective of this project is to develop a simple and user-friendly digital diary system.</a:t>
-            </a:r>
-          </a:p>
-          <a:p>
-            <a:pPr marL="0" lvl="0" indent="0" eaLnBrk="0" fontAlgn="base" hangingPunct="0">
-              <a:lnSpc>
-                <a:spcPct val="150000"/>
-              </a:lnSpc>
-              <a:spcBef>
-                <a:spcPct val="0"/>
-              </a:spcBef>
-              <a:spcAft>
-                <a:spcPct val="0"/>
-              </a:spcAft>
-              <a:buFontTx/>
-              <a:buChar char="•"/>
-            </a:pPr>
-            <a:r>
-              <a:rPr lang="en-US" dirty="0">
-                <a:latin typeface="Times New Roman" panose="02020603050405020304" pitchFamily="18" charset="0"/>
-                <a:cs typeface="Times New Roman" panose="02020603050405020304" pitchFamily="18" charset="0"/>
-              </a:rPr>
-              <a:t>It aims to enable users to write and store daily entries digitally.</a:t>
-            </a:r>
-          </a:p>
-          <a:p>
-            <a:pPr marL="0" lvl="0" indent="0" eaLnBrk="0" fontAlgn="base" hangingPunct="0">
-              <a:lnSpc>
-                <a:spcPct val="150000"/>
-              </a:lnSpc>
-              <a:spcBef>
-                <a:spcPct val="0"/>
-              </a:spcBef>
-              <a:spcAft>
-                <a:spcPct val="0"/>
-              </a:spcAft>
-              <a:buFontTx/>
-              <a:buChar char="•"/>
-            </a:pPr>
-            <a:r>
-              <a:rPr lang="en-US" dirty="0">
-                <a:latin typeface="Times New Roman" panose="02020603050405020304" pitchFamily="18" charset="0"/>
-                <a:cs typeface="Times New Roman" panose="02020603050405020304" pitchFamily="18" charset="0"/>
-              </a:rPr>
-              <a:t>The system automatically records date and time to maintain chronological order.</a:t>
-            </a:r>
-          </a:p>
-          <a:p>
-            <a:pPr marL="0" lvl="0" indent="0" eaLnBrk="0" fontAlgn="base" hangingPunct="0">
-              <a:lnSpc>
-                <a:spcPct val="150000"/>
-              </a:lnSpc>
-              <a:spcBef>
-                <a:spcPct val="0"/>
-              </a:spcBef>
-              <a:spcAft>
-                <a:spcPct val="0"/>
-              </a:spcAft>
-              <a:buFontTx/>
-              <a:buChar char="•"/>
-            </a:pPr>
-            <a:r>
-              <a:rPr lang="en-US" dirty="0">
-                <a:latin typeface="Times New Roman" panose="02020603050405020304" pitchFamily="18" charset="0"/>
-                <a:cs typeface="Times New Roman" panose="02020603050405020304" pitchFamily="18" charset="0"/>
-              </a:rPr>
-              <a:t>It also allows file attachments for better documentation.</a:t>
-            </a:r>
-          </a:p>
-          <a:p>
-            <a:pPr marL="0" lvl="0" indent="0" eaLnBrk="0" fontAlgn="base" hangingPunct="0">
-              <a:lnSpc>
-                <a:spcPct val="150000"/>
-              </a:lnSpc>
-              <a:spcBef>
-                <a:spcPct val="0"/>
-              </a:spcBef>
-              <a:spcAft>
-                <a:spcPct val="0"/>
-              </a:spcAft>
-              <a:buFontTx/>
-              <a:buChar char="•"/>
-            </a:pPr>
-            <a:r>
-              <a:rPr lang="en-US" dirty="0">
-                <a:latin typeface="Times New Roman" panose="02020603050405020304" pitchFamily="18" charset="0"/>
-                <a:cs typeface="Times New Roman" panose="02020603050405020304" pitchFamily="18" charset="0"/>
-              </a:rPr>
-              <a:t>Overall, the goal is to provide secure, organized, and efficient record management.</a:t>
-            </a:r>
-            <a:endParaRPr kumimoji="0" lang="en-US" altLang="en-US" i="0" u="none" strike="noStrike" cap="none" normalizeH="0" baseline="0" dirty="0">
+              <a:rPr lang="en-US" altLang="en-US" dirty="0">
+                <a:latin typeface="Times New Roman" panose="02020603050405020304" pitchFamily="18" charset="0"/>
+                <a:cs typeface="Times New Roman" panose="02020603050405020304" pitchFamily="18" charset="0"/>
+              </a:rPr>
+              <a:t>Literature Review</a:t>
+            </a:r>
+            <a:endParaRPr kumimoji="0" lang="en-US" altLang="en-US" b="0" i="0" u="none" strike="noStrike" cap="none" normalizeH="0" baseline="0" dirty="0">
               <a:ln>
                 <a:noFill/>
               </a:ln>
@@ -5696,6 +5515,298 @@
               <a:cs typeface="Times New Roman" panose="02020603050405020304" pitchFamily="18" charset="0"/>
             </a:endParaRPr>
           </a:p>
+          <a:p>
+            <a:pPr marL="0" marR="0" lvl="0" indent="0" algn="l" defTabSz="914400" rtl="0" eaLnBrk="0" fontAlgn="base" latinLnBrk="0" hangingPunct="0">
+              <a:lnSpc>
+                <a:spcPct val="100000"/>
+              </a:lnSpc>
+              <a:spcBef>
+                <a:spcPct val="0"/>
+              </a:spcBef>
+              <a:spcAft>
+                <a:spcPct val="0"/>
+              </a:spcAft>
+              <a:buClrTx/>
+              <a:buSzTx/>
+              <a:buFontTx/>
+              <a:buChar char="•"/>
+              <a:tabLst/>
+            </a:pPr>
+            <a:r>
+              <a:rPr kumimoji="0" lang="en-US" altLang="en-US" b="0" i="0" u="none" strike="noStrike" cap="none" normalizeH="0" baseline="0" dirty="0">
+                <a:ln>
+                  <a:noFill/>
+                </a:ln>
+                <a:solidFill>
+                  <a:schemeClr val="tx1"/>
+                </a:solidFill>
+                <a:effectLst/>
+                <a:latin typeface="Times New Roman" panose="02020603050405020304" pitchFamily="18" charset="0"/>
+                <a:cs typeface="Times New Roman" panose="02020603050405020304" pitchFamily="18" charset="0"/>
+              </a:rPr>
+              <a:t>Introduction</a:t>
+            </a:r>
+          </a:p>
+          <a:p>
+            <a:pPr marL="0" marR="0" lvl="0" indent="0" algn="l" defTabSz="914400" rtl="0" eaLnBrk="0" fontAlgn="base" latinLnBrk="0" hangingPunct="0">
+              <a:lnSpc>
+                <a:spcPct val="100000"/>
+              </a:lnSpc>
+              <a:spcBef>
+                <a:spcPct val="0"/>
+              </a:spcBef>
+              <a:spcAft>
+                <a:spcPct val="0"/>
+              </a:spcAft>
+              <a:buClrTx/>
+              <a:buSzTx/>
+              <a:buFontTx/>
+              <a:buChar char="•"/>
+              <a:tabLst/>
+            </a:pPr>
+            <a:r>
+              <a:rPr kumimoji="0" lang="en-US" altLang="en-US" b="0" i="0" u="none" strike="noStrike" cap="none" normalizeH="0" baseline="0" dirty="0">
+                <a:ln>
+                  <a:noFill/>
+                </a:ln>
+                <a:solidFill>
+                  <a:schemeClr val="tx1"/>
+                </a:solidFill>
+                <a:effectLst/>
+                <a:latin typeface="Times New Roman" panose="02020603050405020304" pitchFamily="18" charset="0"/>
+                <a:cs typeface="Times New Roman" panose="02020603050405020304" pitchFamily="18" charset="0"/>
+              </a:rPr>
+              <a:t>Objectives</a:t>
+            </a:r>
+          </a:p>
+          <a:p>
+            <a:pPr marL="0" marR="0" lvl="0" indent="0" algn="l" defTabSz="914400" rtl="0" eaLnBrk="0" fontAlgn="base" latinLnBrk="0" hangingPunct="0">
+              <a:lnSpc>
+                <a:spcPct val="100000"/>
+              </a:lnSpc>
+              <a:spcBef>
+                <a:spcPct val="0"/>
+              </a:spcBef>
+              <a:spcAft>
+                <a:spcPct val="0"/>
+              </a:spcAft>
+              <a:buClrTx/>
+              <a:buSzTx/>
+              <a:buFontTx/>
+              <a:buChar char="•"/>
+              <a:tabLst/>
+            </a:pPr>
+            <a:r>
+              <a:rPr kumimoji="0" lang="en-US" altLang="en-US" b="0" i="0" u="none" strike="noStrike" cap="none" normalizeH="0" baseline="0" dirty="0">
+                <a:ln>
+                  <a:noFill/>
+                </a:ln>
+                <a:solidFill>
+                  <a:schemeClr val="tx1"/>
+                </a:solidFill>
+                <a:effectLst/>
+                <a:latin typeface="Times New Roman" panose="02020603050405020304" pitchFamily="18" charset="0"/>
+                <a:cs typeface="Times New Roman" panose="02020603050405020304" pitchFamily="18" charset="0"/>
+              </a:rPr>
+              <a:t>Module 1</a:t>
+            </a:r>
+          </a:p>
+          <a:p>
+            <a:pPr marL="0" marR="0" lvl="0" indent="0" algn="l" defTabSz="914400" rtl="0" eaLnBrk="0" fontAlgn="base" latinLnBrk="0" hangingPunct="0">
+              <a:lnSpc>
+                <a:spcPct val="100000"/>
+              </a:lnSpc>
+              <a:spcBef>
+                <a:spcPct val="0"/>
+              </a:spcBef>
+              <a:spcAft>
+                <a:spcPct val="0"/>
+              </a:spcAft>
+              <a:buClrTx/>
+              <a:buSzTx/>
+              <a:buFontTx/>
+              <a:buChar char="•"/>
+              <a:tabLst/>
+            </a:pPr>
+            <a:r>
+              <a:rPr kumimoji="0" lang="en-US" altLang="en-US" b="0" i="0" u="none" strike="noStrike" cap="none" normalizeH="0" baseline="0" dirty="0">
+                <a:ln>
+                  <a:noFill/>
+                </a:ln>
+                <a:solidFill>
+                  <a:schemeClr val="tx1"/>
+                </a:solidFill>
+                <a:effectLst/>
+                <a:latin typeface="Times New Roman" panose="02020603050405020304" pitchFamily="18" charset="0"/>
+                <a:cs typeface="Times New Roman" panose="02020603050405020304" pitchFamily="18" charset="0"/>
+              </a:rPr>
+              <a:t>Module 2</a:t>
+            </a:r>
+          </a:p>
+          <a:p>
+            <a:pPr marL="0" marR="0" lvl="0" indent="0" algn="l" defTabSz="914400" rtl="0" eaLnBrk="0" fontAlgn="base" latinLnBrk="0" hangingPunct="0">
+              <a:lnSpc>
+                <a:spcPct val="100000"/>
+              </a:lnSpc>
+              <a:spcBef>
+                <a:spcPct val="0"/>
+              </a:spcBef>
+              <a:spcAft>
+                <a:spcPct val="0"/>
+              </a:spcAft>
+              <a:buClrTx/>
+              <a:buSzTx/>
+              <a:buFontTx/>
+              <a:buChar char="•"/>
+              <a:tabLst/>
+            </a:pPr>
+            <a:r>
+              <a:rPr kumimoji="0" lang="en-US" altLang="en-US" b="0" i="0" u="none" strike="noStrike" cap="none" normalizeH="0" baseline="0" dirty="0">
+                <a:ln>
+                  <a:noFill/>
+                </a:ln>
+                <a:solidFill>
+                  <a:schemeClr val="tx1"/>
+                </a:solidFill>
+                <a:effectLst/>
+                <a:latin typeface="Times New Roman" panose="02020603050405020304" pitchFamily="18" charset="0"/>
+                <a:cs typeface="Times New Roman" panose="02020603050405020304" pitchFamily="18" charset="0"/>
+              </a:rPr>
+              <a:t>Advantages</a:t>
+            </a:r>
+          </a:p>
+          <a:p>
+            <a:pPr marL="0" marR="0" lvl="0" indent="0" algn="l" defTabSz="914400" rtl="0" eaLnBrk="0" fontAlgn="base" latinLnBrk="0" hangingPunct="0">
+              <a:lnSpc>
+                <a:spcPct val="100000"/>
+              </a:lnSpc>
+              <a:spcBef>
+                <a:spcPct val="0"/>
+              </a:spcBef>
+              <a:spcAft>
+                <a:spcPct val="0"/>
+              </a:spcAft>
+              <a:buClrTx/>
+              <a:buSzTx/>
+              <a:buFontTx/>
+              <a:buChar char="•"/>
+              <a:tabLst/>
+            </a:pPr>
+            <a:r>
+              <a:rPr kumimoji="0" lang="en-US" altLang="en-US" b="0" i="0" u="none" strike="noStrike" cap="none" normalizeH="0" baseline="0" dirty="0">
+                <a:ln>
+                  <a:noFill/>
+                </a:ln>
+                <a:solidFill>
+                  <a:schemeClr val="tx1"/>
+                </a:solidFill>
+                <a:effectLst/>
+                <a:latin typeface="Times New Roman" panose="02020603050405020304" pitchFamily="18" charset="0"/>
+                <a:cs typeface="Times New Roman" panose="02020603050405020304" pitchFamily="18" charset="0"/>
+              </a:rPr>
+              <a:t>Applications</a:t>
+            </a:r>
+          </a:p>
+          <a:p>
+            <a:pPr marL="0" marR="0" lvl="0" indent="0" algn="l" defTabSz="914400" rtl="0" eaLnBrk="0" fontAlgn="base" latinLnBrk="0" hangingPunct="0">
+              <a:lnSpc>
+                <a:spcPct val="100000"/>
+              </a:lnSpc>
+              <a:spcBef>
+                <a:spcPct val="0"/>
+              </a:spcBef>
+              <a:spcAft>
+                <a:spcPct val="0"/>
+              </a:spcAft>
+              <a:buClrTx/>
+              <a:buSzTx/>
+              <a:buFontTx/>
+              <a:buChar char="•"/>
+              <a:tabLst/>
+            </a:pPr>
+            <a:r>
+              <a:rPr kumimoji="0" lang="en-US" altLang="en-US" b="0" i="0" u="none" strike="noStrike" cap="none" normalizeH="0" baseline="0" dirty="0">
+                <a:ln>
+                  <a:noFill/>
+                </a:ln>
+                <a:solidFill>
+                  <a:schemeClr val="tx1"/>
+                </a:solidFill>
+                <a:effectLst/>
+                <a:latin typeface="Times New Roman" panose="02020603050405020304" pitchFamily="18" charset="0"/>
+                <a:cs typeface="Times New Roman" panose="02020603050405020304" pitchFamily="18" charset="0"/>
+              </a:rPr>
+              <a:t>Future Scope</a:t>
+            </a:r>
+          </a:p>
+          <a:p>
+            <a:pPr marL="0" marR="0" lvl="0" indent="0" algn="l" defTabSz="914400" rtl="0" eaLnBrk="0" fontAlgn="base" latinLnBrk="0" hangingPunct="0">
+              <a:lnSpc>
+                <a:spcPct val="100000"/>
+              </a:lnSpc>
+              <a:spcBef>
+                <a:spcPct val="0"/>
+              </a:spcBef>
+              <a:spcAft>
+                <a:spcPct val="0"/>
+              </a:spcAft>
+              <a:buClrTx/>
+              <a:buSzTx/>
+              <a:buFontTx/>
+              <a:buChar char="•"/>
+              <a:tabLst/>
+            </a:pPr>
+            <a:r>
+              <a:rPr kumimoji="0" lang="en-US" altLang="en-US" b="0" i="0" u="none" strike="noStrike" cap="none" normalizeH="0" baseline="0" dirty="0">
+                <a:ln>
+                  <a:noFill/>
+                </a:ln>
+                <a:solidFill>
+                  <a:schemeClr val="tx1"/>
+                </a:solidFill>
+                <a:effectLst/>
+                <a:latin typeface="Times New Roman" panose="02020603050405020304" pitchFamily="18" charset="0"/>
+                <a:cs typeface="Times New Roman" panose="02020603050405020304" pitchFamily="18" charset="0"/>
+              </a:rPr>
+              <a:t>Conclusion</a:t>
+            </a:r>
+          </a:p>
+          <a:p>
+            <a:pPr marL="0" marR="0" lvl="0" indent="0" algn="l" defTabSz="914400" rtl="0" eaLnBrk="0" fontAlgn="base" latinLnBrk="0" hangingPunct="0">
+              <a:lnSpc>
+                <a:spcPct val="100000"/>
+              </a:lnSpc>
+              <a:spcBef>
+                <a:spcPct val="0"/>
+              </a:spcBef>
+              <a:spcAft>
+                <a:spcPct val="0"/>
+              </a:spcAft>
+              <a:buClrTx/>
+              <a:buSzTx/>
+              <a:buFontTx/>
+              <a:buChar char="•"/>
+              <a:tabLst/>
+            </a:pPr>
+            <a:r>
+              <a:rPr lang="en-US" altLang="en-US" dirty="0">
+                <a:latin typeface="Times New Roman" panose="02020603050405020304" pitchFamily="18" charset="0"/>
+                <a:cs typeface="Times New Roman" panose="02020603050405020304" pitchFamily="18" charset="0"/>
+              </a:rPr>
+              <a:t>References</a:t>
+            </a:r>
+            <a:endParaRPr kumimoji="0" lang="en-US" altLang="en-US" b="0" i="0" u="none" strike="noStrike" cap="none" normalizeH="0" baseline="0" dirty="0">
+              <a:ln>
+                <a:noFill/>
+              </a:ln>
+              <a:solidFill>
+                <a:schemeClr val="tx1"/>
+              </a:solidFill>
+              <a:effectLst/>
+              <a:latin typeface="Times New Roman" panose="02020603050405020304" pitchFamily="18" charset="0"/>
+              <a:cs typeface="Times New Roman" panose="02020603050405020304" pitchFamily="18" charset="0"/>
+            </a:endParaRPr>
+          </a:p>
         </p:txBody>
       </p:sp>
       <p:pic>
@@ -5703,7 +5814,7 @@
           <p:cNvPr id="5" name="Picture 4">
             <a:extLst>
               <a:ext uri="{FF2B5EF4-FFF2-40B4-BE49-F238E27FC236}">
-                <a16:creationId xmlns:a16="http://schemas.microsoft.com/office/drawing/2014/main" id="{BA6CA8E1-F61A-78A6-4400-6FA60F0B3F75}"/>
+                <a16:creationId xmlns:a16="http://schemas.microsoft.com/office/drawing/2014/main" id="{086EE6B4-49D1-411D-3A29-F0CF5E50A9E7}"/>
               </a:ext>
             </a:extLst>
           </p:cNvPr>
@@ -5733,7 +5844,7 @@
           <p:cNvPr id="6" name="Picture 5">
             <a:extLst>
               <a:ext uri="{FF2B5EF4-FFF2-40B4-BE49-F238E27FC236}">
-                <a16:creationId xmlns:a16="http://schemas.microsoft.com/office/drawing/2014/main" id="{8D69BB45-4548-9C42-679C-3CCCCCF139FE}"/>
+                <a16:creationId xmlns:a16="http://schemas.microsoft.com/office/drawing/2014/main" id="{60E22D39-FE5F-6832-0110-51E57278413F}"/>
               </a:ext>
             </a:extLst>
           </p:cNvPr>
@@ -5761,7 +5872,940 @@
     </p:spTree>
     <p:extLst>
       <p:ext uri="{BB962C8B-B14F-4D97-AF65-F5344CB8AC3E}">
-        <p14:creationId xmlns:p14="http://schemas.microsoft.com/office/powerpoint/2010/main" val="1852918126"/>
+        <p14:creationId xmlns:p14="http://schemas.microsoft.com/office/powerpoint/2010/main" val="1670785058"/>
+      </p:ext>
+    </p:extLst>
+  </p:cSld>
+  <p:clrMapOvr>
+    <a:masterClrMapping/>
+  </p:clrMapOvr>
+</p:sld>
+</file>
+
+<file path=ppt/slides/slide3.xml><?xml version="1.0" encoding="utf-8"?>
+<p:sld xmlns:a="http://schemas.openxmlformats.org/drawingml/2006/main" xmlns:r="http://schemas.openxmlformats.org/officeDocument/2006/relationships" xmlns:p="http://schemas.openxmlformats.org/presentationml/2006/main">
+  <p:cSld>
+    <p:spTree>
+      <p:nvGrpSpPr>
+        <p:cNvPr id="1" name=""/>
+        <p:cNvGrpSpPr/>
+        <p:nvPr/>
+      </p:nvGrpSpPr>
+      <p:grpSpPr>
+        <a:xfrm>
+          <a:off x="0" y="0"/>
+          <a:ext cx="0" cy="0"/>
+          <a:chOff x="0" y="0"/>
+          <a:chExt cx="0" cy="0"/>
+        </a:xfrm>
+      </p:grpSpPr>
+      <p:sp>
+        <p:nvSpPr>
+          <p:cNvPr id="2" name="Title 1">
+            <a:extLst>
+              <a:ext uri="{FF2B5EF4-FFF2-40B4-BE49-F238E27FC236}">
+                <a16:creationId xmlns:a16="http://schemas.microsoft.com/office/drawing/2014/main" id="{9A4F5C4B-676D-5C2C-82D3-C71991F55BB3}"/>
+              </a:ext>
+            </a:extLst>
+          </p:cNvPr>
+          <p:cNvSpPr>
+            <a:spLocks noGrp="1"/>
+          </p:cNvSpPr>
+          <p:nvPr>
+            <p:ph type="title"/>
+          </p:nvPr>
+        </p:nvSpPr>
+        <p:spPr/>
+        <p:txBody>
+          <a:bodyPr/>
+          <a:lstStyle/>
+          <a:p>
+            <a:pPr algn="ctr"/>
+            <a:r>
+              <a:rPr lang="en-IN" b="1" dirty="0">
+                <a:latin typeface="Times New Roman" panose="02020603050405020304" pitchFamily="18" charset="0"/>
+                <a:cs typeface="Times New Roman" panose="02020603050405020304" pitchFamily="18" charset="0"/>
+              </a:rPr>
+              <a:t>LITERATURE REVEIW</a:t>
+            </a:r>
+          </a:p>
+        </p:txBody>
+      </p:sp>
+      <p:graphicFrame>
+        <p:nvGraphicFramePr>
+          <p:cNvPr id="4" name="Content Placeholder 3">
+            <a:extLst>
+              <a:ext uri="{FF2B5EF4-FFF2-40B4-BE49-F238E27FC236}">
+                <a16:creationId xmlns:a16="http://schemas.microsoft.com/office/drawing/2014/main" id="{4E2FEE00-2407-BC07-8BB7-6BD1EA9059A2}"/>
+              </a:ext>
+            </a:extLst>
+          </p:cNvPr>
+          <p:cNvGraphicFramePr>
+            <a:graphicFrameLocks noGrp="1"/>
+          </p:cNvGraphicFramePr>
+          <p:nvPr>
+            <p:ph idx="1"/>
+            <p:extLst>
+              <p:ext uri="{D42A27DB-BD31-4B8C-83A1-F6EECF244321}">
+                <p14:modId xmlns:p14="http://schemas.microsoft.com/office/powerpoint/2010/main" val="3415690495"/>
+              </p:ext>
+            </p:extLst>
+          </p:nvPr>
+        </p:nvGraphicFramePr>
+        <p:xfrm>
+          <a:off x="0" y="1825625"/>
+          <a:ext cx="12192000" cy="5141231"/>
+        </p:xfrm>
+        <a:graphic>
+          <a:graphicData uri="http://schemas.openxmlformats.org/drawingml/2006/table">
+            <a:tbl>
+              <a:tblPr firstRow="1" bandRow="1">
+                <a:tableStyleId>{5C22544A-7EE6-4342-B048-85BDC9FD1C3A}</a:tableStyleId>
+              </a:tblPr>
+              <a:tblGrid>
+                <a:gridCol w="2438400">
+                  <a:extLst>
+                    <a:ext uri="{9D8B030D-6E8A-4147-A177-3AD203B41FA5}">
+                      <a16:colId xmlns:a16="http://schemas.microsoft.com/office/drawing/2014/main" val="2508771654"/>
+                    </a:ext>
+                  </a:extLst>
+                </a:gridCol>
+                <a:gridCol w="2438400">
+                  <a:extLst>
+                    <a:ext uri="{9D8B030D-6E8A-4147-A177-3AD203B41FA5}">
+                      <a16:colId xmlns:a16="http://schemas.microsoft.com/office/drawing/2014/main" val="3046836296"/>
+                    </a:ext>
+                  </a:extLst>
+                </a:gridCol>
+                <a:gridCol w="2438400">
+                  <a:extLst>
+                    <a:ext uri="{9D8B030D-6E8A-4147-A177-3AD203B41FA5}">
+                      <a16:colId xmlns:a16="http://schemas.microsoft.com/office/drawing/2014/main" val="3615215681"/>
+                    </a:ext>
+                  </a:extLst>
+                </a:gridCol>
+                <a:gridCol w="2438400">
+                  <a:extLst>
+                    <a:ext uri="{9D8B030D-6E8A-4147-A177-3AD203B41FA5}">
+                      <a16:colId xmlns:a16="http://schemas.microsoft.com/office/drawing/2014/main" val="1590310872"/>
+                    </a:ext>
+                  </a:extLst>
+                </a:gridCol>
+                <a:gridCol w="2438400">
+                  <a:extLst>
+                    <a:ext uri="{9D8B030D-6E8A-4147-A177-3AD203B41FA5}">
+                      <a16:colId xmlns:a16="http://schemas.microsoft.com/office/drawing/2014/main" val="111967514"/>
+                    </a:ext>
+                  </a:extLst>
+                </a:gridCol>
+              </a:tblGrid>
+              <a:tr h="462774">
+                <a:tc>
+                  <a:txBody>
+                    <a:bodyPr/>
+                    <a:lstStyle/>
+                    <a:p>
+                      <a:pPr>
+                        <a:buNone/>
+                      </a:pPr>
+                      <a:r>
+                        <a:rPr lang="en-IN" dirty="0" err="1"/>
+                        <a:t>S.No</a:t>
+                      </a:r>
+                      <a:endParaRPr lang="en-IN" dirty="0"/>
+                    </a:p>
+                  </a:txBody>
+                  <a:tcPr anchor="ctr"/>
+                </a:tc>
+                <a:tc>
+                  <a:txBody>
+                    <a:bodyPr/>
+                    <a:lstStyle/>
+                    <a:p>
+                      <a:pPr>
+                        <a:buNone/>
+                      </a:pPr>
+                      <a:r>
+                        <a:rPr lang="en-IN"/>
+                        <a:t>Author &amp; Year</a:t>
+                      </a:r>
+                    </a:p>
+                  </a:txBody>
+                  <a:tcPr anchor="ctr"/>
+                </a:tc>
+                <a:tc>
+                  <a:txBody>
+                    <a:bodyPr/>
+                    <a:lstStyle/>
+                    <a:p>
+                      <a:pPr>
+                        <a:buNone/>
+                      </a:pPr>
+                      <a:r>
+                        <a:rPr lang="en-IN"/>
+                        <a:t>Study Focus</a:t>
+                      </a:r>
+                    </a:p>
+                  </a:txBody>
+                  <a:tcPr anchor="ctr"/>
+                </a:tc>
+                <a:tc>
+                  <a:txBody>
+                    <a:bodyPr/>
+                    <a:lstStyle/>
+                    <a:p>
+                      <a:pPr>
+                        <a:buNone/>
+                      </a:pPr>
+                      <a:r>
+                        <a:rPr lang="en-IN"/>
+                        <a:t>Key Finding</a:t>
+                      </a:r>
+                    </a:p>
+                  </a:txBody>
+                  <a:tcPr anchor="ctr"/>
+                </a:tc>
+                <a:tc>
+                  <a:txBody>
+                    <a:bodyPr/>
+                    <a:lstStyle/>
+                    <a:p>
+                      <a:pPr>
+                        <a:buNone/>
+                      </a:pPr>
+                      <a:r>
+                        <a:rPr lang="en-IN"/>
+                        <a:t>Relevance to Project</a:t>
+                      </a:r>
+                    </a:p>
+                  </a:txBody>
+                  <a:tcPr anchor="ctr"/>
+                </a:tc>
+                <a:extLst>
+                  <a:ext uri="{0D108BD9-81ED-4DB2-BD59-A6C34878D82A}">
+                    <a16:rowId xmlns:a16="http://schemas.microsoft.com/office/drawing/2014/main" val="3377409819"/>
+                  </a:ext>
+                </a:extLst>
+              </a:tr>
+              <a:tr h="1141087">
+                <a:tc>
+                  <a:txBody>
+                    <a:bodyPr/>
+                    <a:lstStyle/>
+                    <a:p>
+                      <a:pPr>
+                        <a:buNone/>
+                      </a:pPr>
+                      <a:r>
+                        <a:rPr lang="en-IN"/>
+                        <a:t>1</a:t>
+                      </a:r>
+                    </a:p>
+                  </a:txBody>
+                  <a:tcPr anchor="ctr"/>
+                </a:tc>
+                <a:tc>
+                  <a:txBody>
+                    <a:bodyPr/>
+                    <a:lstStyle/>
+                    <a:p>
+                      <a:pPr>
+                        <a:buNone/>
+                      </a:pPr>
+                      <a:r>
+                        <a:rPr lang="en-IN"/>
+                        <a:t>Shaffer et al., 2023</a:t>
+                      </a:r>
+                    </a:p>
+                  </a:txBody>
+                  <a:tcPr anchor="ctr"/>
+                </a:tc>
+                <a:tc>
+                  <a:txBody>
+                    <a:bodyPr/>
+                    <a:lstStyle/>
+                    <a:p>
+                      <a:pPr>
+                        <a:buNone/>
+                      </a:pPr>
+                      <a:r>
+                        <a:rPr lang="en-IN"/>
+                        <a:t>Online Sleep Diaries</a:t>
+                      </a:r>
+                    </a:p>
+                  </a:txBody>
+                  <a:tcPr anchor="ctr"/>
+                </a:tc>
+                <a:tc>
+                  <a:txBody>
+                    <a:bodyPr/>
+                    <a:lstStyle/>
+                    <a:p>
+                      <a:pPr>
+                        <a:buNone/>
+                      </a:pPr>
+                      <a:r>
+                        <a:rPr lang="en-IN"/>
+                        <a:t>Proper system design &amp; data management important</a:t>
+                      </a:r>
+                    </a:p>
+                  </a:txBody>
+                  <a:tcPr anchor="ctr"/>
+                </a:tc>
+                <a:tc>
+                  <a:txBody>
+                    <a:bodyPr/>
+                    <a:lstStyle/>
+                    <a:p>
+                      <a:pPr>
+                        <a:buNone/>
+                      </a:pPr>
+                      <a:r>
+                        <a:rPr lang="en-US"/>
+                        <a:t>Supports structured digital diary system</a:t>
+                      </a:r>
+                    </a:p>
+                  </a:txBody>
+                  <a:tcPr anchor="ctr"/>
+                </a:tc>
+                <a:extLst>
+                  <a:ext uri="{0D108BD9-81ED-4DB2-BD59-A6C34878D82A}">
+                    <a16:rowId xmlns:a16="http://schemas.microsoft.com/office/drawing/2014/main" val="2769582891"/>
+                  </a:ext>
+                </a:extLst>
+              </a:tr>
+              <a:tr h="798761">
+                <a:tc>
+                  <a:txBody>
+                    <a:bodyPr/>
+                    <a:lstStyle/>
+                    <a:p>
+                      <a:pPr>
+                        <a:buNone/>
+                      </a:pPr>
+                      <a:r>
+                        <a:rPr lang="en-IN"/>
+                        <a:t>2</a:t>
+                      </a:r>
+                    </a:p>
+                  </a:txBody>
+                  <a:tcPr anchor="ctr"/>
+                </a:tc>
+                <a:tc>
+                  <a:txBody>
+                    <a:bodyPr/>
+                    <a:lstStyle/>
+                    <a:p>
+                      <a:pPr>
+                        <a:buNone/>
+                      </a:pPr>
+                      <a:r>
+                        <a:rPr lang="en-IN"/>
+                        <a:t>Basir et al., 2024</a:t>
+                      </a:r>
+                    </a:p>
+                  </a:txBody>
+                  <a:tcPr anchor="ctr"/>
+                </a:tc>
+                <a:tc>
+                  <a:txBody>
+                    <a:bodyPr/>
+                    <a:lstStyle/>
+                    <a:p>
+                      <a:pPr>
+                        <a:buNone/>
+                      </a:pPr>
+                      <a:r>
+                        <a:rPr lang="en-IN"/>
+                        <a:t>Digital Recordkeeping</a:t>
+                      </a:r>
+                    </a:p>
+                  </a:txBody>
+                  <a:tcPr anchor="ctr"/>
+                </a:tc>
+                <a:tc>
+                  <a:txBody>
+                    <a:bodyPr/>
+                    <a:lstStyle/>
+                    <a:p>
+                      <a:pPr>
+                        <a:buNone/>
+                      </a:pPr>
+                      <a:r>
+                        <a:rPr lang="en-US"/>
+                        <a:t>Digital records more accurate than paper</a:t>
+                      </a:r>
+                    </a:p>
+                  </a:txBody>
+                  <a:tcPr anchor="ctr"/>
+                </a:tc>
+                <a:tc>
+                  <a:txBody>
+                    <a:bodyPr/>
+                    <a:lstStyle/>
+                    <a:p>
+                      <a:pPr>
+                        <a:buNone/>
+                      </a:pPr>
+                      <a:r>
+                        <a:rPr lang="en-US" dirty="0"/>
+                        <a:t>Justifies digital diary instead of manual diary</a:t>
+                      </a:r>
+                    </a:p>
+                  </a:txBody>
+                  <a:tcPr anchor="ctr"/>
+                </a:tc>
+                <a:extLst>
+                  <a:ext uri="{0D108BD9-81ED-4DB2-BD59-A6C34878D82A}">
+                    <a16:rowId xmlns:a16="http://schemas.microsoft.com/office/drawing/2014/main" val="4098730740"/>
+                  </a:ext>
+                </a:extLst>
+              </a:tr>
+              <a:tr h="1141087">
+                <a:tc>
+                  <a:txBody>
+                    <a:bodyPr/>
+                    <a:lstStyle/>
+                    <a:p>
+                      <a:pPr>
+                        <a:buNone/>
+                      </a:pPr>
+                      <a:r>
+                        <a:rPr lang="en-IN"/>
+                        <a:t>3</a:t>
+                      </a:r>
+                    </a:p>
+                  </a:txBody>
+                  <a:tcPr anchor="ctr"/>
+                </a:tc>
+                <a:tc>
+                  <a:txBody>
+                    <a:bodyPr/>
+                    <a:lstStyle/>
+                    <a:p>
+                      <a:pPr>
+                        <a:buNone/>
+                      </a:pPr>
+                      <a:r>
+                        <a:rPr lang="en-IN"/>
+                        <a:t>Tiwari et al., 2025</a:t>
+                      </a:r>
+                    </a:p>
+                  </a:txBody>
+                  <a:tcPr anchor="ctr"/>
+                </a:tc>
+                <a:tc>
+                  <a:txBody>
+                    <a:bodyPr/>
+                    <a:lstStyle/>
+                    <a:p>
+                      <a:pPr>
+                        <a:buNone/>
+                      </a:pPr>
+                      <a:r>
+                        <a:rPr lang="en-IN"/>
+                        <a:t>Date-Time Bugs in Python</a:t>
+                      </a:r>
+                    </a:p>
+                  </a:txBody>
+                  <a:tcPr anchor="ctr"/>
+                </a:tc>
+                <a:tc>
+                  <a:txBody>
+                    <a:bodyPr/>
+                    <a:lstStyle/>
+                    <a:p>
+                      <a:pPr>
+                        <a:buNone/>
+                      </a:pPr>
+                      <a:r>
+                        <a:rPr lang="en-US"/>
+                        <a:t>Time handling errors are common</a:t>
+                      </a:r>
+                    </a:p>
+                  </a:txBody>
+                  <a:tcPr anchor="ctr"/>
+                </a:tc>
+                <a:tc>
+                  <a:txBody>
+                    <a:bodyPr/>
+                    <a:lstStyle/>
+                    <a:p>
+                      <a:pPr>
+                        <a:buNone/>
+                      </a:pPr>
+                      <a:r>
+                        <a:rPr lang="en-US"/>
+                        <a:t>Shows importance of correct date-time logging</a:t>
+                      </a:r>
+                    </a:p>
+                  </a:txBody>
+                  <a:tcPr anchor="ctr"/>
+                </a:tc>
+                <a:extLst>
+                  <a:ext uri="{0D108BD9-81ED-4DB2-BD59-A6C34878D82A}">
+                    <a16:rowId xmlns:a16="http://schemas.microsoft.com/office/drawing/2014/main" val="3500624850"/>
+                  </a:ext>
+                </a:extLst>
+              </a:tr>
+              <a:tr h="798761">
+                <a:tc>
+                  <a:txBody>
+                    <a:bodyPr/>
+                    <a:lstStyle/>
+                    <a:p>
+                      <a:pPr>
+                        <a:buNone/>
+                      </a:pPr>
+                      <a:r>
+                        <a:rPr lang="en-IN"/>
+                        <a:t>4</a:t>
+                      </a:r>
+                    </a:p>
+                  </a:txBody>
+                  <a:tcPr anchor="ctr"/>
+                </a:tc>
+                <a:tc>
+                  <a:txBody>
+                    <a:bodyPr/>
+                    <a:lstStyle/>
+                    <a:p>
+                      <a:pPr>
+                        <a:buNone/>
+                      </a:pPr>
+                      <a:r>
+                        <a:rPr lang="en-IN"/>
+                        <a:t>Kamo et al., 2024</a:t>
+                      </a:r>
+                    </a:p>
+                  </a:txBody>
+                  <a:tcPr anchor="ctr"/>
+                </a:tc>
+                <a:tc>
+                  <a:txBody>
+                    <a:bodyPr/>
+                    <a:lstStyle/>
+                    <a:p>
+                      <a:pPr>
+                        <a:buNone/>
+                      </a:pPr>
+                      <a:r>
+                        <a:rPr lang="en-IN"/>
+                        <a:t>Wearable Digital Diary</a:t>
+                      </a:r>
+                    </a:p>
+                  </a:txBody>
+                  <a:tcPr anchor="ctr"/>
+                </a:tc>
+                <a:tc>
+                  <a:txBody>
+                    <a:bodyPr/>
+                    <a:lstStyle/>
+                    <a:p>
+                      <a:pPr>
+                        <a:buNone/>
+                      </a:pPr>
+                      <a:r>
+                        <a:rPr lang="en-IN"/>
+                        <a:t>Reliable time-based data collection</a:t>
+                      </a:r>
+                    </a:p>
+                  </a:txBody>
+                  <a:tcPr anchor="ctr"/>
+                </a:tc>
+                <a:tc>
+                  <a:txBody>
+                    <a:bodyPr/>
+                    <a:lstStyle/>
+                    <a:p>
+                      <a:pPr>
+                        <a:buNone/>
+                      </a:pPr>
+                      <a:r>
+                        <a:rPr lang="en-IN"/>
+                        <a:t>Supports automatic timestamp feature</a:t>
+                      </a:r>
+                    </a:p>
+                  </a:txBody>
+                  <a:tcPr anchor="ctr"/>
+                </a:tc>
+                <a:extLst>
+                  <a:ext uri="{0D108BD9-81ED-4DB2-BD59-A6C34878D82A}">
+                    <a16:rowId xmlns:a16="http://schemas.microsoft.com/office/drawing/2014/main" val="1473369131"/>
+                  </a:ext>
+                </a:extLst>
+              </a:tr>
+              <a:tr h="798761">
+                <a:tc>
+                  <a:txBody>
+                    <a:bodyPr/>
+                    <a:lstStyle/>
+                    <a:p>
+                      <a:pPr>
+                        <a:buNone/>
+                      </a:pPr>
+                      <a:r>
+                        <a:rPr lang="en-IN"/>
+                        <a:t>5</a:t>
+                      </a:r>
+                    </a:p>
+                  </a:txBody>
+                  <a:tcPr anchor="ctr"/>
+                </a:tc>
+                <a:tc>
+                  <a:txBody>
+                    <a:bodyPr/>
+                    <a:lstStyle/>
+                    <a:p>
+                      <a:pPr>
+                        <a:buNone/>
+                      </a:pPr>
+                      <a:r>
+                        <a:rPr lang="en-IN"/>
+                        <a:t>Alcaire et al., 2024</a:t>
+                      </a:r>
+                    </a:p>
+                  </a:txBody>
+                  <a:tcPr anchor="ctr"/>
+                </a:tc>
+                <a:tc>
+                  <a:txBody>
+                    <a:bodyPr/>
+                    <a:lstStyle/>
+                    <a:p>
+                      <a:pPr>
+                        <a:buNone/>
+                      </a:pPr>
+                      <a:r>
+                        <a:rPr lang="en-IN"/>
+                        <a:t>Digital Diary Apps</a:t>
+                      </a:r>
+                    </a:p>
+                  </a:txBody>
+                  <a:tcPr anchor="ctr"/>
+                </a:tc>
+                <a:tc>
+                  <a:txBody>
+                    <a:bodyPr/>
+                    <a:lstStyle/>
+                    <a:p>
+                      <a:pPr>
+                        <a:buNone/>
+                      </a:pPr>
+                      <a:r>
+                        <a:rPr lang="en-IN"/>
+                        <a:t>Real-time experience capture</a:t>
+                      </a:r>
+                    </a:p>
+                  </a:txBody>
+                  <a:tcPr anchor="ctr"/>
+                </a:tc>
+                <a:tc>
+                  <a:txBody>
+                    <a:bodyPr/>
+                    <a:lstStyle/>
+                    <a:p>
+                      <a:pPr>
+                        <a:buNone/>
+                      </a:pPr>
+                      <a:r>
+                        <a:rPr lang="en-US" dirty="0"/>
+                        <a:t>Validates usefulness of diary application</a:t>
+                      </a:r>
+                    </a:p>
+                  </a:txBody>
+                  <a:tcPr anchor="ctr"/>
+                </a:tc>
+                <a:extLst>
+                  <a:ext uri="{0D108BD9-81ED-4DB2-BD59-A6C34878D82A}">
+                    <a16:rowId xmlns:a16="http://schemas.microsoft.com/office/drawing/2014/main" val="1084511601"/>
+                  </a:ext>
+                </a:extLst>
+              </a:tr>
+            </a:tbl>
+          </a:graphicData>
+        </a:graphic>
+      </p:graphicFrame>
+      <p:pic>
+        <p:nvPicPr>
+          <p:cNvPr id="5" name="Picture 4">
+            <a:extLst>
+              <a:ext uri="{FF2B5EF4-FFF2-40B4-BE49-F238E27FC236}">
+                <a16:creationId xmlns:a16="http://schemas.microsoft.com/office/drawing/2014/main" id="{E9D92AEE-868E-5F66-C2A3-7B6E35C1C5AA}"/>
+              </a:ext>
+            </a:extLst>
+          </p:cNvPr>
+          <p:cNvPicPr>
+            <a:picLocks noChangeAspect="1"/>
+          </p:cNvPicPr>
+          <p:nvPr/>
+        </p:nvPicPr>
+        <p:blipFill>
+          <a:blip r:embed="rId2"/>
+          <a:stretch>
+            <a:fillRect/>
+          </a:stretch>
+        </p:blipFill>
+        <p:spPr>
+          <a:xfrm>
+            <a:off x="0" y="-8783"/>
+            <a:ext cx="1219354" cy="1081314"/>
+          </a:xfrm>
+          <a:prstGeom prst="rect">
+            <a:avLst/>
+          </a:prstGeom>
+        </p:spPr>
+      </p:pic>
+      <p:pic>
+        <p:nvPicPr>
+          <p:cNvPr id="6" name="Picture 5">
+            <a:extLst>
+              <a:ext uri="{FF2B5EF4-FFF2-40B4-BE49-F238E27FC236}">
+                <a16:creationId xmlns:a16="http://schemas.microsoft.com/office/drawing/2014/main" id="{D5778215-8FAF-B581-3D89-7B62CA4F6698}"/>
+              </a:ext>
+            </a:extLst>
+          </p:cNvPr>
+          <p:cNvPicPr>
+            <a:picLocks noChangeAspect="1"/>
+          </p:cNvPicPr>
+          <p:nvPr/>
+        </p:nvPicPr>
+        <p:blipFill>
+          <a:blip r:embed="rId3"/>
+          <a:stretch>
+            <a:fillRect/>
+          </a:stretch>
+        </p:blipFill>
+        <p:spPr>
+          <a:xfrm>
+            <a:off x="11274046" y="-2429"/>
+            <a:ext cx="917954" cy="1087660"/>
+          </a:xfrm>
+          <a:prstGeom prst="rect">
+            <a:avLst/>
+          </a:prstGeom>
+        </p:spPr>
+      </p:pic>
+    </p:spTree>
+    <p:extLst>
+      <p:ext uri="{BB962C8B-B14F-4D97-AF65-F5344CB8AC3E}">
+        <p14:creationId xmlns:p14="http://schemas.microsoft.com/office/powerpoint/2010/main" val="627416320"/>
+      </p:ext>
+    </p:extLst>
+  </p:cSld>
+  <p:clrMapOvr>
+    <a:masterClrMapping/>
+  </p:clrMapOvr>
+</p:sld>
+</file>
+
+<file path=ppt/slides/slide4.xml><?xml version="1.0" encoding="utf-8"?>
+<p:sld xmlns:a="http://schemas.openxmlformats.org/drawingml/2006/main" xmlns:r="http://schemas.openxmlformats.org/officeDocument/2006/relationships" xmlns:p="http://schemas.openxmlformats.org/presentationml/2006/main">
+  <p:cSld>
+    <p:spTree>
+      <p:nvGrpSpPr>
+        <p:cNvPr id="1" name=""/>
+        <p:cNvGrpSpPr/>
+        <p:nvPr/>
+      </p:nvGrpSpPr>
+      <p:grpSpPr>
+        <a:xfrm>
+          <a:off x="0" y="0"/>
+          <a:ext cx="0" cy="0"/>
+          <a:chOff x="0" y="0"/>
+          <a:chExt cx="0" cy="0"/>
+        </a:xfrm>
+      </p:grpSpPr>
+      <p:sp>
+        <p:nvSpPr>
+          <p:cNvPr id="2" name="Title 1">
+            <a:extLst>
+              <a:ext uri="{FF2B5EF4-FFF2-40B4-BE49-F238E27FC236}">
+                <a16:creationId xmlns:a16="http://schemas.microsoft.com/office/drawing/2014/main" id="{B69258A8-DA1D-63B7-98CC-9978A9122682}"/>
+              </a:ext>
+            </a:extLst>
+          </p:cNvPr>
+          <p:cNvSpPr>
+            <a:spLocks noGrp="1"/>
+          </p:cNvSpPr>
+          <p:nvPr>
+            <p:ph type="title"/>
+          </p:nvPr>
+        </p:nvSpPr>
+        <p:spPr>
+          <a:xfrm>
+            <a:off x="838200" y="16670"/>
+            <a:ext cx="10515600" cy="696912"/>
+          </a:xfrm>
+        </p:spPr>
+        <p:txBody>
+          <a:bodyPr/>
+          <a:lstStyle/>
+          <a:p>
+            <a:pPr algn="ctr"/>
+            <a:r>
+              <a:rPr lang="en-IN" b="1" dirty="0">
+                <a:latin typeface="Times New Roman" panose="02020603050405020304" pitchFamily="18" charset="0"/>
+                <a:cs typeface="Times New Roman" panose="02020603050405020304" pitchFamily="18" charset="0"/>
+              </a:rPr>
+              <a:t>INTRODUCTION</a:t>
+            </a:r>
+          </a:p>
+        </p:txBody>
+      </p:sp>
+      <p:sp>
+        <p:nvSpPr>
+          <p:cNvPr id="3" name="Content Placeholder 2">
+            <a:extLst>
+              <a:ext uri="{FF2B5EF4-FFF2-40B4-BE49-F238E27FC236}">
+                <a16:creationId xmlns:a16="http://schemas.microsoft.com/office/drawing/2014/main" id="{0C8D17BB-6739-8368-1367-67E61EFE59EE}"/>
+              </a:ext>
+            </a:extLst>
+          </p:cNvPr>
+          <p:cNvSpPr>
+            <a:spLocks noGrp="1"/>
+          </p:cNvSpPr>
+          <p:nvPr>
+            <p:ph idx="1"/>
+          </p:nvPr>
+        </p:nvSpPr>
+        <p:spPr>
+          <a:xfrm>
+            <a:off x="229720" y="1278000"/>
+            <a:ext cx="10949909" cy="4545858"/>
+          </a:xfrm>
+        </p:spPr>
+        <p:txBody>
+          <a:bodyPr>
+            <a:noAutofit/>
+          </a:bodyPr>
+          <a:lstStyle/>
+          <a:p>
+            <a:pPr algn="just">
+              <a:lnSpc>
+                <a:spcPct val="100000"/>
+              </a:lnSpc>
+            </a:pPr>
+            <a:r>
+              <a:rPr lang="en-US" dirty="0">
+                <a:latin typeface="Times New Roman" panose="02020603050405020304" pitchFamily="18" charset="0"/>
+                <a:cs typeface="Times New Roman" panose="02020603050405020304" pitchFamily="18" charset="0"/>
+              </a:rPr>
+              <a:t>The Daily Digital Diary with Date-Time and File Input is a digital application designed to record daily activities in an organized and secure manner.</a:t>
+            </a:r>
+          </a:p>
+          <a:p>
+            <a:pPr algn="just">
+              <a:lnSpc>
+                <a:spcPct val="100000"/>
+              </a:lnSpc>
+            </a:pPr>
+            <a:r>
+              <a:rPr lang="en-US" dirty="0">
+                <a:latin typeface="Times New Roman" panose="02020603050405020304" pitchFamily="18" charset="0"/>
+                <a:cs typeface="Times New Roman" panose="02020603050405020304" pitchFamily="18" charset="0"/>
+              </a:rPr>
+              <a:t>It replaces the traditional handwritten diary with a modern digital solution.</a:t>
+            </a:r>
+          </a:p>
+          <a:p>
+            <a:pPr algn="just">
+              <a:lnSpc>
+                <a:spcPct val="100000"/>
+              </a:lnSpc>
+            </a:pPr>
+            <a:r>
+              <a:rPr lang="en-US" dirty="0">
+                <a:latin typeface="Times New Roman" panose="02020603050405020304" pitchFamily="18" charset="0"/>
+                <a:cs typeface="Times New Roman" panose="02020603050405020304" pitchFamily="18" charset="0"/>
+              </a:rPr>
+              <a:t>The system allows users to write daily entries, automatically captures the current date and time, and supports uploading files such as images and documents.</a:t>
+            </a:r>
+          </a:p>
+          <a:p>
+            <a:pPr algn="just">
+              <a:lnSpc>
+                <a:spcPct val="100000"/>
+              </a:lnSpc>
+            </a:pPr>
+            <a:r>
+              <a:rPr lang="en-US" dirty="0">
+                <a:latin typeface="Times New Roman" panose="02020603050405020304" pitchFamily="18" charset="0"/>
+                <a:cs typeface="Times New Roman" panose="02020603050405020304" pitchFamily="18" charset="0"/>
+              </a:rPr>
+              <a:t>This makes daily record management more efficient, structured, and easily accessible.</a:t>
+            </a:r>
+            <a:endParaRPr lang="en-IN" dirty="0">
+              <a:latin typeface="Times New Roman" panose="02020603050405020304" pitchFamily="18" charset="0"/>
+              <a:cs typeface="Times New Roman" panose="02020603050405020304" pitchFamily="18" charset="0"/>
+            </a:endParaRPr>
+          </a:p>
+        </p:txBody>
+      </p:sp>
+      <p:pic>
+        <p:nvPicPr>
+          <p:cNvPr id="4" name="Picture 3">
+            <a:extLst>
+              <a:ext uri="{FF2B5EF4-FFF2-40B4-BE49-F238E27FC236}">
+                <a16:creationId xmlns:a16="http://schemas.microsoft.com/office/drawing/2014/main" id="{CF9FCBFD-44B7-32F6-7082-F81258E29732}"/>
+              </a:ext>
+            </a:extLst>
+          </p:cNvPr>
+          <p:cNvPicPr>
+            <a:picLocks noChangeAspect="1"/>
+          </p:cNvPicPr>
+          <p:nvPr/>
+        </p:nvPicPr>
+        <p:blipFill>
+          <a:blip r:embed="rId2"/>
+          <a:stretch>
+            <a:fillRect/>
+          </a:stretch>
+        </p:blipFill>
+        <p:spPr>
+          <a:xfrm>
+            <a:off x="-44450" y="34519"/>
+            <a:ext cx="927100" cy="822145"/>
+          </a:xfrm>
+          <a:prstGeom prst="rect">
+            <a:avLst/>
+          </a:prstGeom>
+        </p:spPr>
+      </p:pic>
+      <p:pic>
+        <p:nvPicPr>
+          <p:cNvPr id="5" name="Picture 4">
+            <a:extLst>
+              <a:ext uri="{FF2B5EF4-FFF2-40B4-BE49-F238E27FC236}">
+                <a16:creationId xmlns:a16="http://schemas.microsoft.com/office/drawing/2014/main" id="{45E21D29-D977-112F-FF2C-C975D042EBFD}"/>
+              </a:ext>
+            </a:extLst>
+          </p:cNvPr>
+          <p:cNvPicPr>
+            <a:picLocks noChangeAspect="1"/>
+          </p:cNvPicPr>
+          <p:nvPr/>
+        </p:nvPicPr>
+        <p:blipFill>
+          <a:blip r:embed="rId3"/>
+          <a:stretch>
+            <a:fillRect/>
+          </a:stretch>
+        </p:blipFill>
+        <p:spPr>
+          <a:xfrm>
+            <a:off x="11493500" y="-15129"/>
+            <a:ext cx="698500" cy="827635"/>
+          </a:xfrm>
+          <a:prstGeom prst="rect">
+            <a:avLst/>
+          </a:prstGeom>
+        </p:spPr>
+      </p:pic>
+    </p:spTree>
+    <p:extLst>
+      <p:ext uri="{BB962C8B-B14F-4D97-AF65-F5344CB8AC3E}">
+        <p14:creationId xmlns:p14="http://schemas.microsoft.com/office/powerpoint/2010/main" val="3901005640"/>
       </p:ext>
     </p:extLst>
   </p:cSld>
@@ -5793,7 +6837,7 @@
           <p:cNvPr id="2" name="Title 1">
             <a:extLst>
               <a:ext uri="{FF2B5EF4-FFF2-40B4-BE49-F238E27FC236}">
-                <a16:creationId xmlns:a16="http://schemas.microsoft.com/office/drawing/2014/main" id="{B9B2A7FF-2092-D1D7-8F35-AD6A289A09CE}"/>
+                <a16:creationId xmlns:a16="http://schemas.microsoft.com/office/drawing/2014/main" id="{3A8439A7-7A65-555F-D5D0-751AF9B8A23B}"/>
               </a:ext>
             </a:extLst>
           </p:cNvPr>
@@ -5806,8 +6850,8 @@
         </p:nvSpPr>
         <p:spPr>
           <a:xfrm>
-            <a:off x="838200" y="0"/>
-            <a:ext cx="10515600" cy="1325563"/>
+            <a:off x="838200" y="147411"/>
+            <a:ext cx="10515600" cy="798302"/>
           </a:xfrm>
         </p:spPr>
         <p:txBody>
@@ -5820,497 +6864,31 @@
                 <a:latin typeface="Times New Roman" panose="02020603050405020304" pitchFamily="18" charset="0"/>
                 <a:cs typeface="Times New Roman" panose="02020603050405020304" pitchFamily="18" charset="0"/>
               </a:rPr>
-              <a:t>ARCHITECTURE DIAGRAM</a:t>
-            </a:r>
-          </a:p>
-        </p:txBody>
-      </p:sp>
-      <p:pic>
-        <p:nvPicPr>
-          <p:cNvPr id="5" name="Picture 4">
-            <a:extLst>
-              <a:ext uri="{FF2B5EF4-FFF2-40B4-BE49-F238E27FC236}">
-                <a16:creationId xmlns:a16="http://schemas.microsoft.com/office/drawing/2014/main" id="{1D53C8B1-22C6-3B23-6998-02FEAACA1521}"/>
-              </a:ext>
-            </a:extLst>
-          </p:cNvPr>
-          <p:cNvPicPr>
-            <a:picLocks noChangeAspect="1"/>
-          </p:cNvPicPr>
-          <p:nvPr/>
-        </p:nvPicPr>
-        <p:blipFill>
-          <a:blip r:embed="rId2"/>
-          <a:stretch>
-            <a:fillRect/>
-          </a:stretch>
-        </p:blipFill>
-        <p:spPr>
-          <a:xfrm>
-            <a:off x="0" y="-8783"/>
-            <a:ext cx="1219354" cy="1081314"/>
-          </a:xfrm>
-          <a:prstGeom prst="rect">
-            <a:avLst/>
-          </a:prstGeom>
-        </p:spPr>
-      </p:pic>
-      <p:pic>
-        <p:nvPicPr>
-          <p:cNvPr id="6" name="Picture 5">
-            <a:extLst>
-              <a:ext uri="{FF2B5EF4-FFF2-40B4-BE49-F238E27FC236}">
-                <a16:creationId xmlns:a16="http://schemas.microsoft.com/office/drawing/2014/main" id="{FBA6CF7A-FC98-7608-CFA6-650AA839D494}"/>
-              </a:ext>
-            </a:extLst>
-          </p:cNvPr>
-          <p:cNvPicPr>
-            <a:picLocks noChangeAspect="1"/>
-          </p:cNvPicPr>
-          <p:nvPr/>
-        </p:nvPicPr>
-        <p:blipFill>
-          <a:blip r:embed="rId3"/>
-          <a:stretch>
-            <a:fillRect/>
-          </a:stretch>
-        </p:blipFill>
-        <p:spPr>
-          <a:xfrm>
-            <a:off x="11274046" y="-15129"/>
-            <a:ext cx="917954" cy="1087660"/>
-          </a:xfrm>
-          <a:prstGeom prst="rect">
-            <a:avLst/>
-          </a:prstGeom>
-        </p:spPr>
-      </p:pic>
-      <p:pic>
-        <p:nvPicPr>
-          <p:cNvPr id="7" name="Picture 6">
-            <a:extLst>
-              <a:ext uri="{FF2B5EF4-FFF2-40B4-BE49-F238E27FC236}">
-                <a16:creationId xmlns:a16="http://schemas.microsoft.com/office/drawing/2014/main" id="{14FC7595-A579-000D-0E57-407254C67384}"/>
-              </a:ext>
-            </a:extLst>
-          </p:cNvPr>
-          <p:cNvPicPr>
-            <a:picLocks noChangeAspect="1"/>
-          </p:cNvPicPr>
-          <p:nvPr/>
-        </p:nvPicPr>
-        <p:blipFill>
-          <a:blip r:embed="rId4"/>
-          <a:stretch>
-            <a:fillRect/>
-          </a:stretch>
-        </p:blipFill>
-        <p:spPr>
-          <a:xfrm>
-            <a:off x="3828217" y="1072531"/>
-            <a:ext cx="4093029" cy="5194979"/>
-          </a:xfrm>
-          <a:prstGeom prst="rect">
-            <a:avLst/>
-          </a:prstGeom>
-        </p:spPr>
-      </p:pic>
-      <p:sp>
-        <p:nvSpPr>
-          <p:cNvPr id="9" name="TextBox 8">
-            <a:extLst>
-              <a:ext uri="{FF2B5EF4-FFF2-40B4-BE49-F238E27FC236}">
-                <a16:creationId xmlns:a16="http://schemas.microsoft.com/office/drawing/2014/main" id="{7F506FBB-17E2-B932-95A2-AEDF172C96A3}"/>
-              </a:ext>
-            </a:extLst>
-          </p:cNvPr>
-          <p:cNvSpPr txBox="1"/>
-          <p:nvPr/>
-        </p:nvSpPr>
-        <p:spPr>
-          <a:xfrm>
-            <a:off x="838200" y="5660573"/>
-            <a:ext cx="11186960" cy="873572"/>
-          </a:xfrm>
-          <a:prstGeom prst="rect">
-            <a:avLst/>
-          </a:prstGeom>
-          <a:noFill/>
-        </p:spPr>
-        <p:txBody>
-          <a:bodyPr wrap="square">
-            <a:spAutoFit/>
-          </a:bodyPr>
-          <a:lstStyle/>
-          <a:p>
-            <a:pPr>
-              <a:lnSpc>
-                <a:spcPct val="150000"/>
-              </a:lnSpc>
-              <a:buNone/>
-            </a:pPr>
-            <a:r>
-              <a:rPr lang="en-US" dirty="0">
-                <a:latin typeface="Times New Roman" panose="02020603050405020304" pitchFamily="18" charset="0"/>
-                <a:cs typeface="Times New Roman" panose="02020603050405020304" pitchFamily="18" charset="0"/>
-              </a:rPr>
-              <a:t>The system follows a layered architecture where the user interacts with the frontend, the backend processes the data, and the information is stored securely with automatic date-time and file management.</a:t>
-            </a:r>
-          </a:p>
-        </p:txBody>
-      </p:sp>
-      <p:sp>
-        <p:nvSpPr>
-          <p:cNvPr id="10" name="Arrow: Right 9">
-            <a:extLst>
-              <a:ext uri="{FF2B5EF4-FFF2-40B4-BE49-F238E27FC236}">
-                <a16:creationId xmlns:a16="http://schemas.microsoft.com/office/drawing/2014/main" id="{A874CF47-4D32-0A9C-5665-D0C35B5322C5}"/>
-              </a:ext>
-            </a:extLst>
-          </p:cNvPr>
-          <p:cNvSpPr/>
-          <p:nvPr/>
-        </p:nvSpPr>
-        <p:spPr>
-          <a:xfrm>
-            <a:off x="395663" y="5811522"/>
-            <a:ext cx="499514" cy="204166"/>
-          </a:xfrm>
-          <a:prstGeom prst="rightArrow">
-            <a:avLst/>
-          </a:prstGeom>
-        </p:spPr>
-        <p:style>
-          <a:lnRef idx="2">
-            <a:schemeClr val="accent1">
-              <a:shade val="15000"/>
-            </a:schemeClr>
-          </a:lnRef>
-          <a:fillRef idx="1">
-            <a:schemeClr val="accent1"/>
-          </a:fillRef>
-          <a:effectRef idx="0">
-            <a:schemeClr val="accent1"/>
-          </a:effectRef>
-          <a:fontRef idx="minor">
-            <a:schemeClr val="lt1"/>
-          </a:fontRef>
-        </p:style>
-        <p:txBody>
-          <a:bodyPr rtlCol="0" anchor="ctr"/>
-          <a:lstStyle/>
-          <a:p>
-            <a:pPr algn="ctr"/>
-            <a:endParaRPr lang="en-IN"/>
-          </a:p>
-        </p:txBody>
-      </p:sp>
-    </p:spTree>
-    <p:extLst>
-      <p:ext uri="{BB962C8B-B14F-4D97-AF65-F5344CB8AC3E}">
-        <p14:creationId xmlns:p14="http://schemas.microsoft.com/office/powerpoint/2010/main" val="2271659230"/>
-      </p:ext>
-    </p:extLst>
-  </p:cSld>
-  <p:clrMapOvr>
-    <a:masterClrMapping/>
-  </p:clrMapOvr>
-</p:sld>
-</file>
-
-<file path=ppt/slides/slide6.xml><?xml version="1.0" encoding="utf-8"?>
-<p:sld xmlns:a="http://schemas.openxmlformats.org/drawingml/2006/main" xmlns:r="http://schemas.openxmlformats.org/officeDocument/2006/relationships" xmlns:p="http://schemas.openxmlformats.org/presentationml/2006/main">
-  <p:cSld>
-    <p:spTree>
-      <p:nvGrpSpPr>
-        <p:cNvPr id="1" name=""/>
-        <p:cNvGrpSpPr/>
-        <p:nvPr/>
-      </p:nvGrpSpPr>
-      <p:grpSpPr>
-        <a:xfrm>
-          <a:off x="0" y="0"/>
-          <a:ext cx="0" cy="0"/>
-          <a:chOff x="0" y="0"/>
-          <a:chExt cx="0" cy="0"/>
-        </a:xfrm>
-      </p:grpSpPr>
-      <p:sp>
-        <p:nvSpPr>
-          <p:cNvPr id="2" name="Title 1">
-            <a:extLst>
-              <a:ext uri="{FF2B5EF4-FFF2-40B4-BE49-F238E27FC236}">
-                <a16:creationId xmlns:a16="http://schemas.microsoft.com/office/drawing/2014/main" id="{158A99C2-E9B4-FFD4-B089-AB898B8D68E6}"/>
-              </a:ext>
-            </a:extLst>
-          </p:cNvPr>
-          <p:cNvSpPr>
-            <a:spLocks noGrp="1"/>
-          </p:cNvSpPr>
-          <p:nvPr>
-            <p:ph type="title"/>
-          </p:nvPr>
-        </p:nvSpPr>
-        <p:spPr>
-          <a:xfrm>
-            <a:off x="968828" y="207960"/>
-            <a:ext cx="10515600" cy="734333"/>
-          </a:xfrm>
-        </p:spPr>
-        <p:txBody>
-          <a:bodyPr/>
-          <a:lstStyle/>
-          <a:p>
-            <a:pPr algn="ctr"/>
-            <a:r>
-              <a:rPr lang="en-IN" b="1" dirty="0">
-                <a:latin typeface="Times New Roman" panose="02020603050405020304" pitchFamily="18" charset="0"/>
-                <a:cs typeface="Times New Roman" panose="02020603050405020304" pitchFamily="18" charset="0"/>
-              </a:rPr>
-              <a:t>MODULES OVERVIEW</a:t>
-            </a:r>
-          </a:p>
-        </p:txBody>
-      </p:sp>
-      <p:sp>
-        <p:nvSpPr>
-          <p:cNvPr id="3" name="Content Placeholder 2">
-            <a:extLst>
-              <a:ext uri="{FF2B5EF4-FFF2-40B4-BE49-F238E27FC236}">
-                <a16:creationId xmlns:a16="http://schemas.microsoft.com/office/drawing/2014/main" id="{43B2F7F7-6662-9AC1-BEA7-69C5E18168F6}"/>
-              </a:ext>
-            </a:extLst>
-          </p:cNvPr>
-          <p:cNvSpPr>
-            <a:spLocks noGrp="1"/>
+              <a:t>OBJECTIVES</a:t>
+            </a:r>
+          </a:p>
+        </p:txBody>
+      </p:sp>
+      <p:sp>
+        <p:nvSpPr>
+          <p:cNvPr id="4" name="Rectangle 1">
+            <a:extLst>
+              <a:ext uri="{FF2B5EF4-FFF2-40B4-BE49-F238E27FC236}">
+                <a16:creationId xmlns:a16="http://schemas.microsoft.com/office/drawing/2014/main" id="{B22A8145-D998-1654-CD47-E7DFFDD3F10B}"/>
+              </a:ext>
+            </a:extLst>
+          </p:cNvPr>
+          <p:cNvSpPr>
+            <a:spLocks noGrp="1" noChangeArrowheads="1"/>
           </p:cNvSpPr>
           <p:nvPr>
             <p:ph idx="1"/>
           </p:nvPr>
         </p:nvSpPr>
-        <p:spPr>
-          <a:xfrm>
-            <a:off x="664028" y="1534885"/>
-            <a:ext cx="11157858" cy="5584371"/>
-          </a:xfrm>
-        </p:spPr>
-        <p:txBody>
-          <a:bodyPr>
-            <a:normAutofit/>
-          </a:bodyPr>
-          <a:lstStyle/>
-          <a:p>
-            <a:pPr>
-              <a:lnSpc>
-                <a:spcPct val="150000"/>
-              </a:lnSpc>
-            </a:pPr>
-            <a:r>
-              <a:rPr lang="en-US" dirty="0">
-                <a:latin typeface="Times New Roman" panose="02020603050405020304" pitchFamily="18" charset="0"/>
-                <a:cs typeface="Times New Roman" panose="02020603050405020304" pitchFamily="18" charset="0"/>
-              </a:rPr>
-              <a:t>The system is divided into two main modules:</a:t>
-            </a:r>
-            <a:br>
-              <a:rPr lang="en-US" dirty="0">
-                <a:latin typeface="Times New Roman" panose="02020603050405020304" pitchFamily="18" charset="0"/>
-                <a:cs typeface="Times New Roman" panose="02020603050405020304" pitchFamily="18" charset="0"/>
-              </a:rPr>
-            </a:br>
-            <a:r>
-              <a:rPr lang="en-US" dirty="0">
-                <a:latin typeface="Times New Roman" panose="02020603050405020304" pitchFamily="18" charset="0"/>
-                <a:cs typeface="Times New Roman" panose="02020603050405020304" pitchFamily="18" charset="0"/>
-              </a:rPr>
-              <a:t>Module 1 – Input Interface and User Entry Capture</a:t>
-            </a:r>
-            <a:br>
-              <a:rPr lang="en-US" dirty="0">
-                <a:latin typeface="Times New Roman" panose="02020603050405020304" pitchFamily="18" charset="0"/>
-                <a:cs typeface="Times New Roman" panose="02020603050405020304" pitchFamily="18" charset="0"/>
-              </a:rPr>
-            </a:br>
-            <a:r>
-              <a:rPr lang="en-US" dirty="0">
-                <a:latin typeface="Times New Roman" panose="02020603050405020304" pitchFamily="18" charset="0"/>
-                <a:cs typeface="Times New Roman" panose="02020603050405020304" pitchFamily="18" charset="0"/>
-              </a:rPr>
-              <a:t>Module 2 – File Handling and Date-Time Management</a:t>
-            </a:r>
-          </a:p>
-          <a:p>
-            <a:pPr>
-              <a:lnSpc>
-                <a:spcPct val="150000"/>
-              </a:lnSpc>
-            </a:pPr>
-            <a:r>
-              <a:rPr lang="en-US" dirty="0">
-                <a:latin typeface="Times New Roman" panose="02020603050405020304" pitchFamily="18" charset="0"/>
-                <a:cs typeface="Times New Roman" panose="02020603050405020304" pitchFamily="18" charset="0"/>
-              </a:rPr>
-              <a:t>Each module performs specific functions to ensure smooth working of the system.</a:t>
-            </a:r>
-          </a:p>
-          <a:p>
-            <a:endParaRPr lang="en-IN" dirty="0"/>
-          </a:p>
-        </p:txBody>
-      </p:sp>
-      <p:pic>
-        <p:nvPicPr>
-          <p:cNvPr id="4" name="Picture 3">
-            <a:extLst>
-              <a:ext uri="{FF2B5EF4-FFF2-40B4-BE49-F238E27FC236}">
-                <a16:creationId xmlns:a16="http://schemas.microsoft.com/office/drawing/2014/main" id="{4F983E4A-7538-F309-F0FC-F409ED475624}"/>
-              </a:ext>
-            </a:extLst>
-          </p:cNvPr>
-          <p:cNvPicPr>
-            <a:picLocks noChangeAspect="1"/>
-          </p:cNvPicPr>
-          <p:nvPr/>
-        </p:nvPicPr>
-        <p:blipFill>
-          <a:blip r:embed="rId2"/>
-          <a:stretch>
-            <a:fillRect/>
-          </a:stretch>
-        </p:blipFill>
-        <p:spPr>
-          <a:xfrm>
-            <a:off x="0" y="-8783"/>
-            <a:ext cx="1219354" cy="1081314"/>
-          </a:xfrm>
-          <a:prstGeom prst="rect">
-            <a:avLst/>
-          </a:prstGeom>
-        </p:spPr>
-      </p:pic>
-      <p:pic>
-        <p:nvPicPr>
-          <p:cNvPr id="5" name="Picture 4">
-            <a:extLst>
-              <a:ext uri="{FF2B5EF4-FFF2-40B4-BE49-F238E27FC236}">
-                <a16:creationId xmlns:a16="http://schemas.microsoft.com/office/drawing/2014/main" id="{0C5A65EA-AE95-3654-C3CE-7CD02C52C8B1}"/>
-              </a:ext>
-            </a:extLst>
-          </p:cNvPr>
-          <p:cNvPicPr>
-            <a:picLocks noChangeAspect="1"/>
-          </p:cNvPicPr>
-          <p:nvPr/>
-        </p:nvPicPr>
-        <p:blipFill>
-          <a:blip r:embed="rId3"/>
-          <a:stretch>
-            <a:fillRect/>
-          </a:stretch>
-        </p:blipFill>
-        <p:spPr>
-          <a:xfrm>
-            <a:off x="11274046" y="-15129"/>
-            <a:ext cx="917954" cy="1087660"/>
-          </a:xfrm>
-          <a:prstGeom prst="rect">
-            <a:avLst/>
-          </a:prstGeom>
-        </p:spPr>
-      </p:pic>
-    </p:spTree>
-    <p:extLst>
-      <p:ext uri="{BB962C8B-B14F-4D97-AF65-F5344CB8AC3E}">
-        <p14:creationId xmlns:p14="http://schemas.microsoft.com/office/powerpoint/2010/main" val="2873372235"/>
-      </p:ext>
-    </p:extLst>
-  </p:cSld>
-  <p:clrMapOvr>
-    <a:masterClrMapping/>
-  </p:clrMapOvr>
-</p:sld>
-</file>
-
-<file path=ppt/slides/slide7.xml><?xml version="1.0" encoding="utf-8"?>
-<p:sld xmlns:a="http://schemas.openxmlformats.org/drawingml/2006/main" xmlns:r="http://schemas.openxmlformats.org/officeDocument/2006/relationships" xmlns:p="http://schemas.openxmlformats.org/presentationml/2006/main">
-  <p:cSld>
-    <p:spTree>
-      <p:nvGrpSpPr>
-        <p:cNvPr id="1" name=""/>
-        <p:cNvGrpSpPr/>
-        <p:nvPr/>
-      </p:nvGrpSpPr>
-      <p:grpSpPr>
-        <a:xfrm>
-          <a:off x="0" y="0"/>
-          <a:ext cx="0" cy="0"/>
-          <a:chOff x="0" y="0"/>
-          <a:chExt cx="0" cy="0"/>
-        </a:xfrm>
-      </p:grpSpPr>
-      <p:sp>
-        <p:nvSpPr>
-          <p:cNvPr id="2" name="Title 1">
-            <a:extLst>
-              <a:ext uri="{FF2B5EF4-FFF2-40B4-BE49-F238E27FC236}">
-                <a16:creationId xmlns:a16="http://schemas.microsoft.com/office/drawing/2014/main" id="{5DD132DE-00A2-8652-577A-CF3AA1CF9EF8}"/>
-              </a:ext>
-            </a:extLst>
-          </p:cNvPr>
-          <p:cNvSpPr>
-            <a:spLocks noGrp="1"/>
-          </p:cNvSpPr>
-          <p:nvPr>
-            <p:ph type="title"/>
-          </p:nvPr>
-        </p:nvSpPr>
-        <p:spPr>
-          <a:xfrm>
-            <a:off x="1447800" y="0"/>
-            <a:ext cx="9925050" cy="1325563"/>
-          </a:xfrm>
-        </p:spPr>
-        <p:txBody>
-          <a:bodyPr>
-            <a:normAutofit/>
-          </a:bodyPr>
-          <a:lstStyle/>
-          <a:p>
-            <a:pPr algn="ctr"/>
-            <a:r>
-              <a:rPr lang="en-US" sz="3200" b="1" dirty="0">
-                <a:latin typeface="Times New Roman" panose="02020603050405020304" pitchFamily="18" charset="0"/>
-                <a:cs typeface="Times New Roman" panose="02020603050405020304" pitchFamily="18" charset="0"/>
-              </a:rPr>
-              <a:t>MODULE 1 – INPUT INTERFACE AND USER ENTRY CAPTURE</a:t>
-            </a:r>
-            <a:endParaRPr lang="en-IN" sz="3200" b="1" dirty="0">
-              <a:latin typeface="Times New Roman" panose="02020603050405020304" pitchFamily="18" charset="0"/>
-              <a:cs typeface="Times New Roman" panose="02020603050405020304" pitchFamily="18" charset="0"/>
-            </a:endParaRPr>
-          </a:p>
-        </p:txBody>
-      </p:sp>
-      <p:sp>
-        <p:nvSpPr>
-          <p:cNvPr id="4" name="Rectangle 1">
-            <a:extLst>
-              <a:ext uri="{FF2B5EF4-FFF2-40B4-BE49-F238E27FC236}">
-                <a16:creationId xmlns:a16="http://schemas.microsoft.com/office/drawing/2014/main" id="{C9138BF4-9953-A9C7-2460-2C933F0CA821}"/>
-              </a:ext>
-            </a:extLst>
-          </p:cNvPr>
-          <p:cNvSpPr>
-            <a:spLocks noGrp="1" noChangeArrowheads="1"/>
-          </p:cNvSpPr>
-          <p:nvPr>
-            <p:ph idx="1"/>
-          </p:nvPr>
-        </p:nvSpPr>
         <p:spPr bwMode="auto">
           <a:xfrm>
-            <a:off x="283028" y="1690687"/>
-            <a:ext cx="11440885" cy="4539191"/>
+            <a:off x="304800" y="1324858"/>
+            <a:ext cx="11734800" cy="5185522"/>
           </a:xfrm>
           <a:prstGeom prst="rect">
             <a:avLst/>
@@ -6358,7 +6936,7 @@
           </a:bodyPr>
           <a:lstStyle/>
           <a:p>
-            <a:pPr algn="just" eaLnBrk="0" fontAlgn="base" hangingPunct="0">
+            <a:pPr marL="0" lvl="0" indent="0" eaLnBrk="0" fontAlgn="base" hangingPunct="0">
               <a:lnSpc>
                 <a:spcPct val="150000"/>
               </a:lnSpc>
@@ -6368,17 +6946,19 @@
               <a:spcAft>
                 <a:spcPct val="0"/>
               </a:spcAft>
+              <a:buFontTx/>
+              <a:buChar char="•"/>
             </a:pPr>
             <a:r>
               <a:rPr lang="en-US" dirty="0">
                 <a:latin typeface="Times New Roman" panose="02020603050405020304" pitchFamily="18" charset="0"/>
                 <a:cs typeface="Times New Roman" panose="02020603050405020304" pitchFamily="18" charset="0"/>
               </a:rPr>
-              <a:t>This module focuses on user interaction with the system.</a:t>
-            </a:r>
-          </a:p>
-          <a:p>
-            <a:pPr algn="just" eaLnBrk="0" fontAlgn="base" hangingPunct="0">
+              <a:t>The main objective of this project is to develop a simple and user-friendly digital diary system.</a:t>
+            </a:r>
+          </a:p>
+          <a:p>
+            <a:pPr marL="0" lvl="0" indent="0" eaLnBrk="0" fontAlgn="base" hangingPunct="0">
               <a:lnSpc>
                 <a:spcPct val="150000"/>
               </a:lnSpc>
@@ -6388,17 +6968,19 @@
               <a:spcAft>
                 <a:spcPct val="0"/>
               </a:spcAft>
+              <a:buFontTx/>
+              <a:buChar char="•"/>
             </a:pPr>
             <a:r>
               <a:rPr lang="en-US" dirty="0">
                 <a:latin typeface="Times New Roman" panose="02020603050405020304" pitchFamily="18" charset="0"/>
                 <a:cs typeface="Times New Roman" panose="02020603050405020304" pitchFamily="18" charset="0"/>
               </a:rPr>
-              <a:t>It provides a simple interface where users can write their daily notes or activities.</a:t>
-            </a:r>
-          </a:p>
-          <a:p>
-            <a:pPr algn="just" eaLnBrk="0" fontAlgn="base" hangingPunct="0">
+              <a:t>It aims to enable users to write and store daily entries digitally.</a:t>
+            </a:r>
+          </a:p>
+          <a:p>
+            <a:pPr marL="0" lvl="0" indent="0" eaLnBrk="0" fontAlgn="base" hangingPunct="0">
               <a:lnSpc>
                 <a:spcPct val="150000"/>
               </a:lnSpc>
@@ -6408,17 +6990,19 @@
               <a:spcAft>
                 <a:spcPct val="0"/>
               </a:spcAft>
+              <a:buFontTx/>
+              <a:buChar char="•"/>
             </a:pPr>
             <a:r>
               <a:rPr lang="en-US" dirty="0">
                 <a:latin typeface="Times New Roman" panose="02020603050405020304" pitchFamily="18" charset="0"/>
                 <a:cs typeface="Times New Roman" panose="02020603050405020304" pitchFamily="18" charset="0"/>
               </a:rPr>
-              <a:t>The module ensures that the entered data is properly validated before saving.</a:t>
-            </a:r>
-          </a:p>
-          <a:p>
-            <a:pPr algn="just" eaLnBrk="0" fontAlgn="base" hangingPunct="0">
+              <a:t>The system automatically records date and time to maintain chronological order.</a:t>
+            </a:r>
+          </a:p>
+          <a:p>
+            <a:pPr marL="0" lvl="0" indent="0" eaLnBrk="0" fontAlgn="base" hangingPunct="0">
               <a:lnSpc>
                 <a:spcPct val="150000"/>
               </a:lnSpc>
@@ -6428,17 +7012,19 @@
               <a:spcAft>
                 <a:spcPct val="0"/>
               </a:spcAft>
+              <a:buFontTx/>
+              <a:buChar char="•"/>
             </a:pPr>
             <a:r>
               <a:rPr lang="en-US" dirty="0">
                 <a:latin typeface="Times New Roman" panose="02020603050405020304" pitchFamily="18" charset="0"/>
                 <a:cs typeface="Times New Roman" panose="02020603050405020304" pitchFamily="18" charset="0"/>
               </a:rPr>
-              <a:t>Users can save, view, edit, or delete their entries.</a:t>
-            </a:r>
-          </a:p>
-          <a:p>
-            <a:pPr algn="just" eaLnBrk="0" fontAlgn="base" hangingPunct="0">
+              <a:t>It also allows file attachments for better documentation.</a:t>
+            </a:r>
+          </a:p>
+          <a:p>
+            <a:pPr marL="0" lvl="0" indent="0" eaLnBrk="0" fontAlgn="base" hangingPunct="0">
               <a:lnSpc>
                 <a:spcPct val="150000"/>
               </a:lnSpc>
@@ -6448,13 +7034,15 @@
               <a:spcAft>
                 <a:spcPct val="0"/>
               </a:spcAft>
+              <a:buFontTx/>
+              <a:buChar char="•"/>
             </a:pPr>
             <a:r>
               <a:rPr lang="en-US" dirty="0">
                 <a:latin typeface="Times New Roman" panose="02020603050405020304" pitchFamily="18" charset="0"/>
                 <a:cs typeface="Times New Roman" panose="02020603050405020304" pitchFamily="18" charset="0"/>
               </a:rPr>
-              <a:t>This module plays a major role in capturing and managing user input efficiently.</a:t>
+              <a:t>Overall, the goal is to provide secure, organized, and efficient record management.</a:t>
             </a:r>
             <a:endParaRPr kumimoji="0" lang="en-US" altLang="en-US" i="0" u="none" strike="noStrike" cap="none" normalizeH="0" baseline="0" dirty="0">
               <a:ln>
@@ -6475,7 +7063,7 @@
           <p:cNvPr id="5" name="Picture 4">
             <a:extLst>
               <a:ext uri="{FF2B5EF4-FFF2-40B4-BE49-F238E27FC236}">
-                <a16:creationId xmlns:a16="http://schemas.microsoft.com/office/drawing/2014/main" id="{57D7A44E-BE01-7291-CF2E-090C042E384D}"/>
+                <a16:creationId xmlns:a16="http://schemas.microsoft.com/office/drawing/2014/main" id="{BA6CA8E1-F61A-78A6-4400-6FA60F0B3F75}"/>
               </a:ext>
             </a:extLst>
           </p:cNvPr>
@@ -6505,7 +7093,7 @@
           <p:cNvPr id="6" name="Picture 5">
             <a:extLst>
               <a:ext uri="{FF2B5EF4-FFF2-40B4-BE49-F238E27FC236}">
-                <a16:creationId xmlns:a16="http://schemas.microsoft.com/office/drawing/2014/main" id="{8D997098-068F-5C3D-D6F9-811AFB6D5ED3}"/>
+                <a16:creationId xmlns:a16="http://schemas.microsoft.com/office/drawing/2014/main" id="{8D69BB45-4548-9C42-679C-3CCCCCF139FE}"/>
               </a:ext>
             </a:extLst>
           </p:cNvPr>
@@ -6522,7 +7110,7 @@
         </p:blipFill>
         <p:spPr>
           <a:xfrm>
-            <a:off x="11274046" y="-15129"/>
+            <a:off x="11274046" y="-2429"/>
             <a:ext cx="917954" cy="1087660"/>
           </a:xfrm>
           <a:prstGeom prst="rect">
@@ -6533,7 +7121,476 @@
     </p:spTree>
     <p:extLst>
       <p:ext uri="{BB962C8B-B14F-4D97-AF65-F5344CB8AC3E}">
-        <p14:creationId xmlns:p14="http://schemas.microsoft.com/office/powerpoint/2010/main" val="1681177244"/>
+        <p14:creationId xmlns:p14="http://schemas.microsoft.com/office/powerpoint/2010/main" val="1852918126"/>
+      </p:ext>
+    </p:extLst>
+  </p:cSld>
+  <p:clrMapOvr>
+    <a:masterClrMapping/>
+  </p:clrMapOvr>
+</p:sld>
+</file>
+
+<file path=ppt/slides/slide6.xml><?xml version="1.0" encoding="utf-8"?>
+<p:sld xmlns:a="http://schemas.openxmlformats.org/drawingml/2006/main" xmlns:r="http://schemas.openxmlformats.org/officeDocument/2006/relationships" xmlns:p="http://schemas.openxmlformats.org/presentationml/2006/main">
+  <p:cSld>
+    <p:spTree>
+      <p:nvGrpSpPr>
+        <p:cNvPr id="1" name=""/>
+        <p:cNvGrpSpPr/>
+        <p:nvPr/>
+      </p:nvGrpSpPr>
+      <p:grpSpPr>
+        <a:xfrm>
+          <a:off x="0" y="0"/>
+          <a:ext cx="0" cy="0"/>
+          <a:chOff x="0" y="0"/>
+          <a:chExt cx="0" cy="0"/>
+        </a:xfrm>
+      </p:grpSpPr>
+      <p:sp>
+        <p:nvSpPr>
+          <p:cNvPr id="2" name="Title 1">
+            <a:extLst>
+              <a:ext uri="{FF2B5EF4-FFF2-40B4-BE49-F238E27FC236}">
+                <a16:creationId xmlns:a16="http://schemas.microsoft.com/office/drawing/2014/main" id="{B9B2A7FF-2092-D1D7-8F35-AD6A289A09CE}"/>
+              </a:ext>
+            </a:extLst>
+          </p:cNvPr>
+          <p:cNvSpPr>
+            <a:spLocks noGrp="1"/>
+          </p:cNvSpPr>
+          <p:nvPr>
+            <p:ph type="title"/>
+          </p:nvPr>
+        </p:nvSpPr>
+        <p:spPr>
+          <a:xfrm>
+            <a:off x="838200" y="0"/>
+            <a:ext cx="10515600" cy="1325563"/>
+          </a:xfrm>
+        </p:spPr>
+        <p:txBody>
+          <a:bodyPr/>
+          <a:lstStyle/>
+          <a:p>
+            <a:pPr algn="ctr"/>
+            <a:r>
+              <a:rPr lang="en-IN" b="1" dirty="0">
+                <a:latin typeface="Times New Roman" panose="02020603050405020304" pitchFamily="18" charset="0"/>
+                <a:cs typeface="Times New Roman" panose="02020603050405020304" pitchFamily="18" charset="0"/>
+              </a:rPr>
+              <a:t>ARCHITECTURE DIAGRAM</a:t>
+            </a:r>
+          </a:p>
+        </p:txBody>
+      </p:sp>
+      <p:pic>
+        <p:nvPicPr>
+          <p:cNvPr id="5" name="Picture 4">
+            <a:extLst>
+              <a:ext uri="{FF2B5EF4-FFF2-40B4-BE49-F238E27FC236}">
+                <a16:creationId xmlns:a16="http://schemas.microsoft.com/office/drawing/2014/main" id="{1D53C8B1-22C6-3B23-6998-02FEAACA1521}"/>
+              </a:ext>
+            </a:extLst>
+          </p:cNvPr>
+          <p:cNvPicPr>
+            <a:picLocks noChangeAspect="1"/>
+          </p:cNvPicPr>
+          <p:nvPr/>
+        </p:nvPicPr>
+        <p:blipFill>
+          <a:blip r:embed="rId2"/>
+          <a:stretch>
+            <a:fillRect/>
+          </a:stretch>
+        </p:blipFill>
+        <p:spPr>
+          <a:xfrm>
+            <a:off x="0" y="-8783"/>
+            <a:ext cx="1219354" cy="1081314"/>
+          </a:xfrm>
+          <a:prstGeom prst="rect">
+            <a:avLst/>
+          </a:prstGeom>
+        </p:spPr>
+      </p:pic>
+      <p:pic>
+        <p:nvPicPr>
+          <p:cNvPr id="6" name="Picture 5">
+            <a:extLst>
+              <a:ext uri="{FF2B5EF4-FFF2-40B4-BE49-F238E27FC236}">
+                <a16:creationId xmlns:a16="http://schemas.microsoft.com/office/drawing/2014/main" id="{FBA6CF7A-FC98-7608-CFA6-650AA839D494}"/>
+              </a:ext>
+            </a:extLst>
+          </p:cNvPr>
+          <p:cNvPicPr>
+            <a:picLocks noChangeAspect="1"/>
+          </p:cNvPicPr>
+          <p:nvPr/>
+        </p:nvPicPr>
+        <p:blipFill>
+          <a:blip r:embed="rId3"/>
+          <a:stretch>
+            <a:fillRect/>
+          </a:stretch>
+        </p:blipFill>
+        <p:spPr>
+          <a:xfrm>
+            <a:off x="11274046" y="-15129"/>
+            <a:ext cx="917954" cy="1087660"/>
+          </a:xfrm>
+          <a:prstGeom prst="rect">
+            <a:avLst/>
+          </a:prstGeom>
+        </p:spPr>
+      </p:pic>
+      <p:sp>
+        <p:nvSpPr>
+          <p:cNvPr id="9" name="TextBox 8">
+            <a:extLst>
+              <a:ext uri="{FF2B5EF4-FFF2-40B4-BE49-F238E27FC236}">
+                <a16:creationId xmlns:a16="http://schemas.microsoft.com/office/drawing/2014/main" id="{7F506FBB-17E2-B932-95A2-AEDF172C96A3}"/>
+              </a:ext>
+            </a:extLst>
+          </p:cNvPr>
+          <p:cNvSpPr txBox="1"/>
+          <p:nvPr/>
+        </p:nvSpPr>
+        <p:spPr>
+          <a:xfrm>
+            <a:off x="838200" y="5660573"/>
+            <a:ext cx="11186960" cy="926536"/>
+          </a:xfrm>
+          <a:prstGeom prst="rect">
+            <a:avLst/>
+          </a:prstGeom>
+          <a:noFill/>
+        </p:spPr>
+        <p:txBody>
+          <a:bodyPr wrap="square">
+            <a:spAutoFit/>
+          </a:bodyPr>
+          <a:lstStyle/>
+          <a:p>
+            <a:pPr>
+              <a:lnSpc>
+                <a:spcPct val="150000"/>
+              </a:lnSpc>
+            </a:pPr>
+            <a:r>
+              <a:rPr lang="en-US" sz="2000" dirty="0">
+                <a:latin typeface="Times New Roman" panose="02020603050405020304" pitchFamily="18" charset="0"/>
+                <a:cs typeface="Times New Roman" panose="02020603050405020304" pitchFamily="18" charset="0"/>
+              </a:rPr>
+              <a:t>The</a:t>
+            </a:r>
+            <a:r>
+              <a:rPr lang="en-US" dirty="0"/>
+              <a:t> user enters the diary through a user-friendly GUI, the system securely captures the input, automatically records the current date and time, and stores the entry permanently in a text file for future reference.</a:t>
+            </a:r>
+          </a:p>
+        </p:txBody>
+      </p:sp>
+      <p:sp>
+        <p:nvSpPr>
+          <p:cNvPr id="10" name="Arrow: Right 9">
+            <a:extLst>
+              <a:ext uri="{FF2B5EF4-FFF2-40B4-BE49-F238E27FC236}">
+                <a16:creationId xmlns:a16="http://schemas.microsoft.com/office/drawing/2014/main" id="{A874CF47-4D32-0A9C-5665-D0C35B5322C5}"/>
+              </a:ext>
+            </a:extLst>
+          </p:cNvPr>
+          <p:cNvSpPr/>
+          <p:nvPr/>
+        </p:nvSpPr>
+        <p:spPr>
+          <a:xfrm>
+            <a:off x="395663" y="5811521"/>
+            <a:ext cx="499514" cy="306249"/>
+          </a:xfrm>
+          <a:prstGeom prst="rightArrow">
+            <a:avLst/>
+          </a:prstGeom>
+        </p:spPr>
+        <p:style>
+          <a:lnRef idx="2">
+            <a:schemeClr val="accent1">
+              <a:shade val="15000"/>
+            </a:schemeClr>
+          </a:lnRef>
+          <a:fillRef idx="1">
+            <a:schemeClr val="accent1"/>
+          </a:fillRef>
+          <a:effectRef idx="0">
+            <a:schemeClr val="accent1"/>
+          </a:effectRef>
+          <a:fontRef idx="minor">
+            <a:schemeClr val="lt1"/>
+          </a:fontRef>
+        </p:style>
+        <p:txBody>
+          <a:bodyPr rtlCol="0" anchor="ctr"/>
+          <a:lstStyle/>
+          <a:p>
+            <a:pPr algn="ctr"/>
+            <a:endParaRPr lang="en-IN"/>
+          </a:p>
+        </p:txBody>
+      </p:sp>
+      <p:pic>
+        <p:nvPicPr>
+          <p:cNvPr id="4" name="Picture 3">
+            <a:extLst>
+              <a:ext uri="{FF2B5EF4-FFF2-40B4-BE49-F238E27FC236}">
+                <a16:creationId xmlns:a16="http://schemas.microsoft.com/office/drawing/2014/main" id="{5AA3A4DA-D4C5-9C6E-3347-A2C3B8FF01AA}"/>
+              </a:ext>
+            </a:extLst>
+          </p:cNvPr>
+          <p:cNvPicPr>
+            <a:picLocks noChangeAspect="1"/>
+          </p:cNvPicPr>
+          <p:nvPr/>
+        </p:nvPicPr>
+        <p:blipFill>
+          <a:blip r:embed="rId4">
+            <a:extLst>
+              <a:ext uri="{28A0092B-C50C-407E-A947-70E740481C1C}">
+                <a14:useLocalDpi xmlns:a14="http://schemas.microsoft.com/office/drawing/2010/main" val="0"/>
+              </a:ext>
+            </a:extLst>
+          </a:blip>
+          <a:stretch>
+            <a:fillRect/>
+          </a:stretch>
+        </p:blipFill>
+        <p:spPr>
+          <a:xfrm>
+            <a:off x="4444231" y="1186542"/>
+            <a:ext cx="2791215" cy="4484915"/>
+          </a:xfrm>
+          <a:prstGeom prst="rect">
+            <a:avLst/>
+          </a:prstGeom>
+        </p:spPr>
+      </p:pic>
+    </p:spTree>
+    <p:extLst>
+      <p:ext uri="{BB962C8B-B14F-4D97-AF65-F5344CB8AC3E}">
+        <p14:creationId xmlns:p14="http://schemas.microsoft.com/office/powerpoint/2010/main" val="2271659230"/>
+      </p:ext>
+    </p:extLst>
+  </p:cSld>
+  <p:clrMapOvr>
+    <a:masterClrMapping/>
+  </p:clrMapOvr>
+</p:sld>
+</file>
+
+<file path=ppt/slides/slide7.xml><?xml version="1.0" encoding="utf-8"?>
+<p:sld xmlns:a="http://schemas.openxmlformats.org/drawingml/2006/main" xmlns:r="http://schemas.openxmlformats.org/officeDocument/2006/relationships" xmlns:p="http://schemas.openxmlformats.org/presentationml/2006/main">
+  <p:cSld>
+    <p:spTree>
+      <p:nvGrpSpPr>
+        <p:cNvPr id="1" name=""/>
+        <p:cNvGrpSpPr/>
+        <p:nvPr/>
+      </p:nvGrpSpPr>
+      <p:grpSpPr>
+        <a:xfrm>
+          <a:off x="0" y="0"/>
+          <a:ext cx="0" cy="0"/>
+          <a:chOff x="0" y="0"/>
+          <a:chExt cx="0" cy="0"/>
+        </a:xfrm>
+      </p:grpSpPr>
+      <p:sp>
+        <p:nvSpPr>
+          <p:cNvPr id="2" name="Title 1">
+            <a:extLst>
+              <a:ext uri="{FF2B5EF4-FFF2-40B4-BE49-F238E27FC236}">
+                <a16:creationId xmlns:a16="http://schemas.microsoft.com/office/drawing/2014/main" id="{158A99C2-E9B4-FFD4-B089-AB898B8D68E6}"/>
+              </a:ext>
+            </a:extLst>
+          </p:cNvPr>
+          <p:cNvSpPr>
+            <a:spLocks noGrp="1"/>
+          </p:cNvSpPr>
+          <p:nvPr>
+            <p:ph type="title"/>
+          </p:nvPr>
+        </p:nvSpPr>
+        <p:spPr>
+          <a:xfrm>
+            <a:off x="968828" y="207960"/>
+            <a:ext cx="10515600" cy="734333"/>
+          </a:xfrm>
+        </p:spPr>
+        <p:txBody>
+          <a:bodyPr/>
+          <a:lstStyle/>
+          <a:p>
+            <a:pPr algn="ctr"/>
+            <a:r>
+              <a:rPr lang="en-IN" b="1" dirty="0">
+                <a:latin typeface="Times New Roman" panose="02020603050405020304" pitchFamily="18" charset="0"/>
+                <a:cs typeface="Times New Roman" panose="02020603050405020304" pitchFamily="18" charset="0"/>
+              </a:rPr>
+              <a:t>MODULES OVERVIEW</a:t>
+            </a:r>
+          </a:p>
+        </p:txBody>
+      </p:sp>
+      <p:sp>
+        <p:nvSpPr>
+          <p:cNvPr id="3" name="Content Placeholder 2">
+            <a:extLst>
+              <a:ext uri="{FF2B5EF4-FFF2-40B4-BE49-F238E27FC236}">
+                <a16:creationId xmlns:a16="http://schemas.microsoft.com/office/drawing/2014/main" id="{43B2F7F7-6662-9AC1-BEA7-69C5E18168F6}"/>
+              </a:ext>
+            </a:extLst>
+          </p:cNvPr>
+          <p:cNvSpPr>
+            <a:spLocks noGrp="1"/>
+          </p:cNvSpPr>
+          <p:nvPr>
+            <p:ph idx="1"/>
+          </p:nvPr>
+        </p:nvSpPr>
+        <p:spPr>
+          <a:xfrm>
+            <a:off x="664028" y="1534885"/>
+            <a:ext cx="11157858" cy="5584371"/>
+          </a:xfrm>
+        </p:spPr>
+        <p:txBody>
+          <a:bodyPr>
+            <a:normAutofit/>
+          </a:bodyPr>
+          <a:lstStyle/>
+          <a:p>
+            <a:pPr>
+              <a:lnSpc>
+                <a:spcPct val="150000"/>
+              </a:lnSpc>
+            </a:pPr>
+            <a:r>
+              <a:rPr lang="en-US" dirty="0">
+                <a:latin typeface="Times New Roman" panose="02020603050405020304" pitchFamily="18" charset="0"/>
+                <a:cs typeface="Times New Roman" panose="02020603050405020304" pitchFamily="18" charset="0"/>
+              </a:rPr>
+              <a:t>The system is divided into two main modules:</a:t>
+            </a:r>
+            <a:br>
+              <a:rPr lang="en-US" dirty="0">
+                <a:latin typeface="Times New Roman" panose="02020603050405020304" pitchFamily="18" charset="0"/>
+                <a:cs typeface="Times New Roman" panose="02020603050405020304" pitchFamily="18" charset="0"/>
+              </a:rPr>
+            </a:br>
+            <a:r>
+              <a:rPr lang="en-US" dirty="0">
+                <a:latin typeface="Times New Roman" panose="02020603050405020304" pitchFamily="18" charset="0"/>
+                <a:cs typeface="Times New Roman" panose="02020603050405020304" pitchFamily="18" charset="0"/>
+              </a:rPr>
+              <a:t>Module 1 – Input Interface and User Entry Capture</a:t>
+            </a:r>
+            <a:br>
+              <a:rPr lang="en-US" dirty="0">
+                <a:latin typeface="Times New Roman" panose="02020603050405020304" pitchFamily="18" charset="0"/>
+                <a:cs typeface="Times New Roman" panose="02020603050405020304" pitchFamily="18" charset="0"/>
+              </a:rPr>
+            </a:br>
+            <a:r>
+              <a:rPr lang="en-US" dirty="0">
+                <a:latin typeface="Times New Roman" panose="02020603050405020304" pitchFamily="18" charset="0"/>
+                <a:cs typeface="Times New Roman" panose="02020603050405020304" pitchFamily="18" charset="0"/>
+              </a:rPr>
+              <a:t>Module 2 – File Handling and Date-Time Management</a:t>
+            </a:r>
+          </a:p>
+          <a:p>
+            <a:pPr>
+              <a:lnSpc>
+                <a:spcPct val="150000"/>
+              </a:lnSpc>
+            </a:pPr>
+            <a:r>
+              <a:rPr lang="en-US" dirty="0">
+                <a:latin typeface="Times New Roman" panose="02020603050405020304" pitchFamily="18" charset="0"/>
+                <a:cs typeface="Times New Roman" panose="02020603050405020304" pitchFamily="18" charset="0"/>
+              </a:rPr>
+              <a:t>Each module performs specific functions to ensure smooth working of the system.</a:t>
+            </a:r>
+          </a:p>
+          <a:p>
+            <a:endParaRPr lang="en-IN" dirty="0"/>
+          </a:p>
+        </p:txBody>
+      </p:sp>
+      <p:pic>
+        <p:nvPicPr>
+          <p:cNvPr id="4" name="Picture 3">
+            <a:extLst>
+              <a:ext uri="{FF2B5EF4-FFF2-40B4-BE49-F238E27FC236}">
+                <a16:creationId xmlns:a16="http://schemas.microsoft.com/office/drawing/2014/main" id="{4F983E4A-7538-F309-F0FC-F409ED475624}"/>
+              </a:ext>
+            </a:extLst>
+          </p:cNvPr>
+          <p:cNvPicPr>
+            <a:picLocks noChangeAspect="1"/>
+          </p:cNvPicPr>
+          <p:nvPr/>
+        </p:nvPicPr>
+        <p:blipFill>
+          <a:blip r:embed="rId2"/>
+          <a:stretch>
+            <a:fillRect/>
+          </a:stretch>
+        </p:blipFill>
+        <p:spPr>
+          <a:xfrm>
+            <a:off x="0" y="-8783"/>
+            <a:ext cx="1219354" cy="1081314"/>
+          </a:xfrm>
+          <a:prstGeom prst="rect">
+            <a:avLst/>
+          </a:prstGeom>
+        </p:spPr>
+      </p:pic>
+      <p:pic>
+        <p:nvPicPr>
+          <p:cNvPr id="5" name="Picture 4">
+            <a:extLst>
+              <a:ext uri="{FF2B5EF4-FFF2-40B4-BE49-F238E27FC236}">
+                <a16:creationId xmlns:a16="http://schemas.microsoft.com/office/drawing/2014/main" id="{0C5A65EA-AE95-3654-C3CE-7CD02C52C8B1}"/>
+              </a:ext>
+            </a:extLst>
+          </p:cNvPr>
+          <p:cNvPicPr>
+            <a:picLocks noChangeAspect="1"/>
+          </p:cNvPicPr>
+          <p:nvPr/>
+        </p:nvPicPr>
+        <p:blipFill>
+          <a:blip r:embed="rId3"/>
+          <a:stretch>
+            <a:fillRect/>
+          </a:stretch>
+        </p:blipFill>
+        <p:spPr>
+          <a:xfrm>
+            <a:off x="11274046" y="-15129"/>
+            <a:ext cx="917954" cy="1087660"/>
+          </a:xfrm>
+          <a:prstGeom prst="rect">
+            <a:avLst/>
+          </a:prstGeom>
+        </p:spPr>
+      </p:pic>
+    </p:spTree>
+    <p:extLst>
+      <p:ext uri="{BB962C8B-B14F-4D97-AF65-F5344CB8AC3E}">
+        <p14:creationId xmlns:p14="http://schemas.microsoft.com/office/powerpoint/2010/main" val="2873372235"/>
       </p:ext>
     </p:extLst>
   </p:cSld>
@@ -6565,7 +7622,7 @@
           <p:cNvPr id="2" name="Title 1">
             <a:extLst>
               <a:ext uri="{FF2B5EF4-FFF2-40B4-BE49-F238E27FC236}">
-                <a16:creationId xmlns:a16="http://schemas.microsoft.com/office/drawing/2014/main" id="{EDD6D974-41D4-828C-6F47-0EF369D5EF50}"/>
+                <a16:creationId xmlns:a16="http://schemas.microsoft.com/office/drawing/2014/main" id="{5DD132DE-00A2-8652-577A-CF3AA1CF9EF8}"/>
               </a:ext>
             </a:extLst>
           </p:cNvPr>
@@ -6578,165 +7635,8 @@
         </p:nvSpPr>
         <p:spPr>
           <a:xfrm>
-            <a:off x="838200" y="-155574"/>
-            <a:ext cx="10515600" cy="836612"/>
-          </a:xfrm>
-        </p:spPr>
-        <p:txBody>
-          <a:bodyPr/>
-          <a:lstStyle/>
-          <a:p>
-            <a:pPr algn="ctr"/>
-            <a:r>
-              <a:rPr lang="en-IN" b="1" dirty="0">
-                <a:latin typeface="Times New Roman" panose="02020603050405020304" pitchFamily="18" charset="0"/>
-                <a:cs typeface="Times New Roman" panose="02020603050405020304" pitchFamily="18" charset="0"/>
-              </a:rPr>
-              <a:t>MODULE 1 OUTPUT</a:t>
-            </a:r>
-          </a:p>
-        </p:txBody>
-      </p:sp>
-      <p:pic>
-        <p:nvPicPr>
-          <p:cNvPr id="4" name="Picture 3">
-            <a:extLst>
-              <a:ext uri="{FF2B5EF4-FFF2-40B4-BE49-F238E27FC236}">
-                <a16:creationId xmlns:a16="http://schemas.microsoft.com/office/drawing/2014/main" id="{F8D38761-8269-6317-17AD-A7E8F70B1569}"/>
-              </a:ext>
-            </a:extLst>
-          </p:cNvPr>
-          <p:cNvPicPr>
-            <a:picLocks noChangeAspect="1"/>
-          </p:cNvPicPr>
-          <p:nvPr/>
-        </p:nvPicPr>
-        <p:blipFill>
-          <a:blip r:embed="rId2"/>
-          <a:stretch>
-            <a:fillRect/>
-          </a:stretch>
-        </p:blipFill>
-        <p:spPr>
-          <a:xfrm>
-            <a:off x="0" y="-8783"/>
-            <a:ext cx="1219354" cy="1081314"/>
-          </a:xfrm>
-          <a:prstGeom prst="rect">
-            <a:avLst/>
-          </a:prstGeom>
-        </p:spPr>
-      </p:pic>
-      <p:pic>
-        <p:nvPicPr>
-          <p:cNvPr id="5" name="Picture 4">
-            <a:extLst>
-              <a:ext uri="{FF2B5EF4-FFF2-40B4-BE49-F238E27FC236}">
-                <a16:creationId xmlns:a16="http://schemas.microsoft.com/office/drawing/2014/main" id="{741C03AF-1F34-87F9-8257-1640BF895927}"/>
-              </a:ext>
-            </a:extLst>
-          </p:cNvPr>
-          <p:cNvPicPr>
-            <a:picLocks noChangeAspect="1"/>
-          </p:cNvPicPr>
-          <p:nvPr/>
-        </p:nvPicPr>
-        <p:blipFill>
-          <a:blip r:embed="rId3"/>
-          <a:stretch>
-            <a:fillRect/>
-          </a:stretch>
-        </p:blipFill>
-        <p:spPr>
-          <a:xfrm>
-            <a:off x="11274046" y="-15129"/>
-            <a:ext cx="917954" cy="1087660"/>
-          </a:xfrm>
-          <a:prstGeom prst="rect">
-            <a:avLst/>
-          </a:prstGeom>
-        </p:spPr>
-      </p:pic>
-      <p:pic>
-        <p:nvPicPr>
-          <p:cNvPr id="10" name="Picture 9">
-            <a:extLst>
-              <a:ext uri="{FF2B5EF4-FFF2-40B4-BE49-F238E27FC236}">
-                <a16:creationId xmlns:a16="http://schemas.microsoft.com/office/drawing/2014/main" id="{ED367DD3-583C-A303-9BB4-5E487EEFFDC8}"/>
-              </a:ext>
-            </a:extLst>
-          </p:cNvPr>
-          <p:cNvPicPr>
-            <a:picLocks noChangeAspect="1"/>
-          </p:cNvPicPr>
-          <p:nvPr/>
-        </p:nvPicPr>
-        <p:blipFill>
-          <a:blip r:embed="rId4"/>
-          <a:stretch>
-            <a:fillRect/>
-          </a:stretch>
-        </p:blipFill>
-        <p:spPr>
-          <a:xfrm>
-            <a:off x="1763486" y="1208314"/>
-            <a:ext cx="9176657" cy="4637315"/>
-          </a:xfrm>
-          <a:prstGeom prst="rect">
-            <a:avLst/>
-          </a:prstGeom>
-        </p:spPr>
-      </p:pic>
-    </p:spTree>
-    <p:extLst>
-      <p:ext uri="{BB962C8B-B14F-4D97-AF65-F5344CB8AC3E}">
-        <p14:creationId xmlns:p14="http://schemas.microsoft.com/office/powerpoint/2010/main" val="4290727365"/>
-      </p:ext>
-    </p:extLst>
-  </p:cSld>
-  <p:clrMapOvr>
-    <a:masterClrMapping/>
-  </p:clrMapOvr>
-</p:sld>
-</file>
-
-<file path=ppt/slides/slide9.xml><?xml version="1.0" encoding="utf-8"?>
-<p:sld xmlns:a="http://schemas.openxmlformats.org/drawingml/2006/main" xmlns:r="http://schemas.openxmlformats.org/officeDocument/2006/relationships" xmlns:p="http://schemas.openxmlformats.org/presentationml/2006/main">
-  <p:cSld>
-    <p:spTree>
-      <p:nvGrpSpPr>
-        <p:cNvPr id="1" name=""/>
-        <p:cNvGrpSpPr/>
-        <p:nvPr/>
-      </p:nvGrpSpPr>
-      <p:grpSpPr>
-        <a:xfrm>
-          <a:off x="0" y="0"/>
-          <a:ext cx="0" cy="0"/>
-          <a:chOff x="0" y="0"/>
-          <a:chExt cx="0" cy="0"/>
-        </a:xfrm>
-      </p:grpSpPr>
-      <p:sp>
-        <p:nvSpPr>
-          <p:cNvPr id="2" name="Title 1">
-            <a:extLst>
-              <a:ext uri="{FF2B5EF4-FFF2-40B4-BE49-F238E27FC236}">
-                <a16:creationId xmlns:a16="http://schemas.microsoft.com/office/drawing/2014/main" id="{2EE4A332-29CA-1798-D214-A68445F4BAB4}"/>
-              </a:ext>
-            </a:extLst>
-          </p:cNvPr>
-          <p:cNvSpPr>
-            <a:spLocks noGrp="1"/>
-          </p:cNvSpPr>
-          <p:nvPr>
-            <p:ph type="title"/>
-          </p:nvPr>
-        </p:nvSpPr>
-        <p:spPr>
-          <a:xfrm>
-            <a:off x="1816100" y="0"/>
-            <a:ext cx="9410700" cy="1325563"/>
+            <a:off x="1447800" y="0"/>
+            <a:ext cx="9925050" cy="1325563"/>
           </a:xfrm>
         </p:spPr>
         <p:txBody>
@@ -6747,13 +7647,13 @@
           <a:p>
             <a:pPr algn="ctr"/>
             <a:r>
-              <a:rPr lang="en-US" sz="3600" b="1" dirty="0">
-                <a:latin typeface="Times New Roman" panose="02020603050405020304" pitchFamily="18" charset="0"/>
-                <a:cs typeface="Times New Roman" panose="02020603050405020304" pitchFamily="18" charset="0"/>
-              </a:rPr>
-              <a:t>MODULE 2 – FILE HANDLING AND DATE-TIME MANAGEMENT</a:t>
-            </a:r>
-            <a:endParaRPr lang="en-IN" sz="3600" b="1" dirty="0">
+              <a:rPr lang="en-US" sz="3200" b="1" dirty="0">
+                <a:latin typeface="Times New Roman" panose="02020603050405020304" pitchFamily="18" charset="0"/>
+                <a:cs typeface="Times New Roman" panose="02020603050405020304" pitchFamily="18" charset="0"/>
+              </a:rPr>
+              <a:t>MODULE 1 – INPUT INTERFACE AND USER ENTRY CAPTURE</a:t>
+            </a:r>
+            <a:endParaRPr lang="en-IN" sz="3200" b="1" dirty="0">
               <a:latin typeface="Times New Roman" panose="02020603050405020304" pitchFamily="18" charset="0"/>
               <a:cs typeface="Times New Roman" panose="02020603050405020304" pitchFamily="18" charset="0"/>
             </a:endParaRPr>
@@ -6765,7 +7665,7 @@
           <p:cNvPr id="4" name="Rectangle 1">
             <a:extLst>
               <a:ext uri="{FF2B5EF4-FFF2-40B4-BE49-F238E27FC236}">
-                <a16:creationId xmlns:a16="http://schemas.microsoft.com/office/drawing/2014/main" id="{D5E795FF-B27F-966F-AB88-7167E9D357F0}"/>
+                <a16:creationId xmlns:a16="http://schemas.microsoft.com/office/drawing/2014/main" id="{C9138BF4-9953-A9C7-2460-2C933F0CA821}"/>
               </a:ext>
             </a:extLst>
           </p:cNvPr>
@@ -6778,8 +7678,8 @@
         </p:nvSpPr>
         <p:spPr bwMode="auto">
           <a:xfrm>
-            <a:off x="304801" y="1236112"/>
-            <a:ext cx="11800114" cy="5185522"/>
+            <a:off x="283028" y="1690687"/>
+            <a:ext cx="11440885" cy="4539191"/>
           </a:xfrm>
           <a:prstGeom prst="rect">
             <a:avLst/>
@@ -6843,7 +7743,7 @@
                 <a:latin typeface="Times New Roman" panose="02020603050405020304" pitchFamily="18" charset="0"/>
                 <a:cs typeface="Times New Roman" panose="02020603050405020304" pitchFamily="18" charset="0"/>
               </a:rPr>
-              <a:t>This module manages backend operations of the system.</a:t>
+              <a:t>This module focuses on user interaction with the system.</a:t>
             </a:r>
           </a:p>
           <a:p>
@@ -6863,7 +7763,7 @@
                 <a:latin typeface="Times New Roman" panose="02020603050405020304" pitchFamily="18" charset="0"/>
                 <a:cs typeface="Times New Roman" panose="02020603050405020304" pitchFamily="18" charset="0"/>
               </a:rPr>
-              <a:t>Whenever a user saves an entry, the system automatically captures the current date and time.</a:t>
+              <a:t>It provides a simple interface where users can write their daily notes or activities.</a:t>
             </a:r>
           </a:p>
           <a:p>
@@ -6883,7 +7783,7 @@
                 <a:latin typeface="Times New Roman" panose="02020603050405020304" pitchFamily="18" charset="0"/>
                 <a:cs typeface="Times New Roman" panose="02020603050405020304" pitchFamily="18" charset="0"/>
               </a:rPr>
-              <a:t>This ensures that each entry is stored with a proper timestamp.</a:t>
+              <a:t>The module ensures that the entered data is properly validated before saving.</a:t>
             </a:r>
           </a:p>
           <a:p>
@@ -6903,7 +7803,7 @@
                 <a:latin typeface="Times New Roman" panose="02020603050405020304" pitchFamily="18" charset="0"/>
                 <a:cs typeface="Times New Roman" panose="02020603050405020304" pitchFamily="18" charset="0"/>
               </a:rPr>
-              <a:t>The module also allows users to upload files such as images, PDFs, or documents.</a:t>
+              <a:t>Users can save, view, edit, or delete their entries.</a:t>
             </a:r>
           </a:p>
           <a:p>
@@ -6923,27 +7823,7 @@
                 <a:latin typeface="Times New Roman" panose="02020603050405020304" pitchFamily="18" charset="0"/>
                 <a:cs typeface="Times New Roman" panose="02020603050405020304" pitchFamily="18" charset="0"/>
               </a:rPr>
-              <a:t>These files are stored securely and linked with the respective diary entry.</a:t>
-            </a:r>
-          </a:p>
-          <a:p>
-            <a:pPr algn="just" eaLnBrk="0" fontAlgn="base" hangingPunct="0">
-              <a:lnSpc>
-                <a:spcPct val="150000"/>
-              </a:lnSpc>
-              <a:spcBef>
-                <a:spcPct val="0"/>
-              </a:spcBef>
-              <a:spcAft>
-                <a:spcPct val="0"/>
-              </a:spcAft>
-            </a:pPr>
-            <a:r>
-              <a:rPr lang="en-US" dirty="0">
-                <a:latin typeface="Times New Roman" panose="02020603050405020304" pitchFamily="18" charset="0"/>
-                <a:cs typeface="Times New Roman" panose="02020603050405020304" pitchFamily="18" charset="0"/>
-              </a:rPr>
-              <a:t>This helps in maintaining structured and organized records.</a:t>
+              <a:t>This module plays a major role in capturing and managing user input efficiently.</a:t>
             </a:r>
             <a:endParaRPr kumimoji="0" lang="en-US" altLang="en-US" i="0" u="none" strike="noStrike" cap="none" normalizeH="0" baseline="0" dirty="0">
               <a:ln>
@@ -6964,7 +7844,7 @@
           <p:cNvPr id="5" name="Picture 4">
             <a:extLst>
               <a:ext uri="{FF2B5EF4-FFF2-40B4-BE49-F238E27FC236}">
-                <a16:creationId xmlns:a16="http://schemas.microsoft.com/office/drawing/2014/main" id="{0D89BEF3-E50A-B63A-E7D6-416CA55A09B7}"/>
+                <a16:creationId xmlns:a16="http://schemas.microsoft.com/office/drawing/2014/main" id="{57D7A44E-BE01-7291-CF2E-090C042E384D}"/>
               </a:ext>
             </a:extLst>
           </p:cNvPr>
@@ -6994,7 +7874,7 @@
           <p:cNvPr id="6" name="Picture 5">
             <a:extLst>
               <a:ext uri="{FF2B5EF4-FFF2-40B4-BE49-F238E27FC236}">
-                <a16:creationId xmlns:a16="http://schemas.microsoft.com/office/drawing/2014/main" id="{C2506793-7B93-7571-97D2-EF28D2BFEECE}"/>
+                <a16:creationId xmlns:a16="http://schemas.microsoft.com/office/drawing/2014/main" id="{8D997098-068F-5C3D-D6F9-811AFB6D5ED3}"/>
               </a:ext>
             </a:extLst>
           </p:cNvPr>
@@ -7022,7 +7902,164 @@
     </p:spTree>
     <p:extLst>
       <p:ext uri="{BB962C8B-B14F-4D97-AF65-F5344CB8AC3E}">
-        <p14:creationId xmlns:p14="http://schemas.microsoft.com/office/powerpoint/2010/main" val="418418201"/>
+        <p14:creationId xmlns:p14="http://schemas.microsoft.com/office/powerpoint/2010/main" val="1681177244"/>
+      </p:ext>
+    </p:extLst>
+  </p:cSld>
+  <p:clrMapOvr>
+    <a:masterClrMapping/>
+  </p:clrMapOvr>
+</p:sld>
+</file>
+
+<file path=ppt/slides/slide9.xml><?xml version="1.0" encoding="utf-8"?>
+<p:sld xmlns:a="http://schemas.openxmlformats.org/drawingml/2006/main" xmlns:r="http://schemas.openxmlformats.org/officeDocument/2006/relationships" xmlns:p="http://schemas.openxmlformats.org/presentationml/2006/main">
+  <p:cSld>
+    <p:spTree>
+      <p:nvGrpSpPr>
+        <p:cNvPr id="1" name=""/>
+        <p:cNvGrpSpPr/>
+        <p:nvPr/>
+      </p:nvGrpSpPr>
+      <p:grpSpPr>
+        <a:xfrm>
+          <a:off x="0" y="0"/>
+          <a:ext cx="0" cy="0"/>
+          <a:chOff x="0" y="0"/>
+          <a:chExt cx="0" cy="0"/>
+        </a:xfrm>
+      </p:grpSpPr>
+      <p:sp>
+        <p:nvSpPr>
+          <p:cNvPr id="2" name="Title 1">
+            <a:extLst>
+              <a:ext uri="{FF2B5EF4-FFF2-40B4-BE49-F238E27FC236}">
+                <a16:creationId xmlns:a16="http://schemas.microsoft.com/office/drawing/2014/main" id="{EDD6D974-41D4-828C-6F47-0EF369D5EF50}"/>
+              </a:ext>
+            </a:extLst>
+          </p:cNvPr>
+          <p:cNvSpPr>
+            <a:spLocks noGrp="1"/>
+          </p:cNvSpPr>
+          <p:nvPr>
+            <p:ph type="title"/>
+          </p:nvPr>
+        </p:nvSpPr>
+        <p:spPr>
+          <a:xfrm>
+            <a:off x="838200" y="-155574"/>
+            <a:ext cx="10515600" cy="836612"/>
+          </a:xfrm>
+        </p:spPr>
+        <p:txBody>
+          <a:bodyPr/>
+          <a:lstStyle/>
+          <a:p>
+            <a:pPr algn="ctr"/>
+            <a:r>
+              <a:rPr lang="en-IN" b="1" dirty="0">
+                <a:latin typeface="Times New Roman" panose="02020603050405020304" pitchFamily="18" charset="0"/>
+                <a:cs typeface="Times New Roman" panose="02020603050405020304" pitchFamily="18" charset="0"/>
+              </a:rPr>
+              <a:t>MODULE 1 OUTPUT</a:t>
+            </a:r>
+          </a:p>
+        </p:txBody>
+      </p:sp>
+      <p:pic>
+        <p:nvPicPr>
+          <p:cNvPr id="4" name="Picture 3">
+            <a:extLst>
+              <a:ext uri="{FF2B5EF4-FFF2-40B4-BE49-F238E27FC236}">
+                <a16:creationId xmlns:a16="http://schemas.microsoft.com/office/drawing/2014/main" id="{F8D38761-8269-6317-17AD-A7E8F70B1569}"/>
+              </a:ext>
+            </a:extLst>
+          </p:cNvPr>
+          <p:cNvPicPr>
+            <a:picLocks noChangeAspect="1"/>
+          </p:cNvPicPr>
+          <p:nvPr/>
+        </p:nvPicPr>
+        <p:blipFill>
+          <a:blip r:embed="rId2"/>
+          <a:stretch>
+            <a:fillRect/>
+          </a:stretch>
+        </p:blipFill>
+        <p:spPr>
+          <a:xfrm>
+            <a:off x="0" y="-8783"/>
+            <a:ext cx="1219354" cy="1081314"/>
+          </a:xfrm>
+          <a:prstGeom prst="rect">
+            <a:avLst/>
+          </a:prstGeom>
+        </p:spPr>
+      </p:pic>
+      <p:pic>
+        <p:nvPicPr>
+          <p:cNvPr id="5" name="Picture 4">
+            <a:extLst>
+              <a:ext uri="{FF2B5EF4-FFF2-40B4-BE49-F238E27FC236}">
+                <a16:creationId xmlns:a16="http://schemas.microsoft.com/office/drawing/2014/main" id="{741C03AF-1F34-87F9-8257-1640BF895927}"/>
+              </a:ext>
+            </a:extLst>
+          </p:cNvPr>
+          <p:cNvPicPr>
+            <a:picLocks noChangeAspect="1"/>
+          </p:cNvPicPr>
+          <p:nvPr/>
+        </p:nvPicPr>
+        <p:blipFill>
+          <a:blip r:embed="rId3"/>
+          <a:stretch>
+            <a:fillRect/>
+          </a:stretch>
+        </p:blipFill>
+        <p:spPr>
+          <a:xfrm>
+            <a:off x="11274046" y="-15129"/>
+            <a:ext cx="917954" cy="1087660"/>
+          </a:xfrm>
+          <a:prstGeom prst="rect">
+            <a:avLst/>
+          </a:prstGeom>
+        </p:spPr>
+      </p:pic>
+      <p:pic>
+        <p:nvPicPr>
+          <p:cNvPr id="10" name="Picture 9">
+            <a:extLst>
+              <a:ext uri="{FF2B5EF4-FFF2-40B4-BE49-F238E27FC236}">
+                <a16:creationId xmlns:a16="http://schemas.microsoft.com/office/drawing/2014/main" id="{ED367DD3-583C-A303-9BB4-5E487EEFFDC8}"/>
+              </a:ext>
+            </a:extLst>
+          </p:cNvPr>
+          <p:cNvPicPr>
+            <a:picLocks noChangeAspect="1"/>
+          </p:cNvPicPr>
+          <p:nvPr/>
+        </p:nvPicPr>
+        <p:blipFill>
+          <a:blip r:embed="rId4"/>
+          <a:stretch>
+            <a:fillRect/>
+          </a:stretch>
+        </p:blipFill>
+        <p:spPr>
+          <a:xfrm>
+            <a:off x="1763486" y="1208314"/>
+            <a:ext cx="9176657" cy="4637315"/>
+          </a:xfrm>
+          <a:prstGeom prst="rect">
+            <a:avLst/>
+          </a:prstGeom>
+        </p:spPr>
+      </p:pic>
+    </p:spTree>
+    <p:extLst>
+      <p:ext uri="{BB962C8B-B14F-4D97-AF65-F5344CB8AC3E}">
+        <p14:creationId xmlns:p14="http://schemas.microsoft.com/office/powerpoint/2010/main" val="4290727365"/>
       </p:ext>
     </p:extLst>
   </p:cSld>
